--- a/slides/output/Career_Canvas_Meeting_4_Write_The_Business_Spotlight.pptx
+++ b/slides/output/Career_Canvas_Meeting_4_Write_The_Business_Spotlight.pptx
@@ -2,23 +2,23 @@
 <file path=ppt/presentation.xml><?xml version="1.0" encoding="utf-8"?>
 <p:presentation xmlns:p="http://schemas.openxmlformats.org/presentationml/2006/main">
   <p:sldMasterIdLst>
-    <p:sldMasterId xmlns:r="http://schemas.openxmlformats.org/officeDocument/2006/relationships" id="2147483648" r:id="R17cf77775ef94149"/>
+    <p:sldMasterId xmlns:r="http://schemas.openxmlformats.org/officeDocument/2006/relationships" id="2147483648" r:id="R53f5983dbdfe41aa"/>
   </p:sldMasterIdLst>
   <p:notesMasterIdLst>
-    <p:notesMasterId xmlns:r="http://schemas.openxmlformats.org/officeDocument/2006/relationships" r:id="R0d5ffcbe27fb47eb"/>
+    <p:notesMasterId xmlns:r="http://schemas.openxmlformats.org/officeDocument/2006/relationships" r:id="Ra782c83d94be4f87"/>
   </p:notesMasterIdLst>
   <p:sldIdLst>
-    <p:sldId xmlns:r="http://schemas.openxmlformats.org/officeDocument/2006/relationships" id="256" r:id="R854c82beca31437b"/>
-    <p:sldId xmlns:r="http://schemas.openxmlformats.org/officeDocument/2006/relationships" id="257" r:id="Rf393db2ee45849ab"/>
-    <p:sldId xmlns:r="http://schemas.openxmlformats.org/officeDocument/2006/relationships" id="258" r:id="Ra28f9b2a4a564376"/>
-    <p:sldId xmlns:r="http://schemas.openxmlformats.org/officeDocument/2006/relationships" id="259" r:id="Rd525c73e49ca4985"/>
-    <p:sldId xmlns:r="http://schemas.openxmlformats.org/officeDocument/2006/relationships" id="260" r:id="R5c1d6e697da94750"/>
-    <p:sldId xmlns:r="http://schemas.openxmlformats.org/officeDocument/2006/relationships" id="261" r:id="Re873de73fa544dff"/>
-    <p:sldId xmlns:r="http://schemas.openxmlformats.org/officeDocument/2006/relationships" id="262" r:id="R377c1f021bda4985"/>
-    <p:sldId xmlns:r="http://schemas.openxmlformats.org/officeDocument/2006/relationships" id="263" r:id="R6258a0cdfd154326"/>
-    <p:sldId xmlns:r="http://schemas.openxmlformats.org/officeDocument/2006/relationships" id="264" r:id="R7e83ab4afd574f72"/>
-    <p:sldId xmlns:r="http://schemas.openxmlformats.org/officeDocument/2006/relationships" id="265" r:id="R21b4461395534687"/>
-    <p:sldId xmlns:r="http://schemas.openxmlformats.org/officeDocument/2006/relationships" id="266" r:id="R48d910943af14d4f"/>
+    <p:sldId xmlns:r="http://schemas.openxmlformats.org/officeDocument/2006/relationships" id="256" r:id="Rcd416f9459ea4275"/>
+    <p:sldId xmlns:r="http://schemas.openxmlformats.org/officeDocument/2006/relationships" id="257" r:id="R580b47a84fc144da"/>
+    <p:sldId xmlns:r="http://schemas.openxmlformats.org/officeDocument/2006/relationships" id="258" r:id="Rfa8fddc361314143"/>
+    <p:sldId xmlns:r="http://schemas.openxmlformats.org/officeDocument/2006/relationships" id="259" r:id="R9d2e77656f7248ea"/>
+    <p:sldId xmlns:r="http://schemas.openxmlformats.org/officeDocument/2006/relationships" id="260" r:id="R4662a10dd2ed4b70"/>
+    <p:sldId xmlns:r="http://schemas.openxmlformats.org/officeDocument/2006/relationships" id="261" r:id="R06ecc4ac17bc4fa2"/>
+    <p:sldId xmlns:r="http://schemas.openxmlformats.org/officeDocument/2006/relationships" id="262" r:id="R3632fc1c63d34506"/>
+    <p:sldId xmlns:r="http://schemas.openxmlformats.org/officeDocument/2006/relationships" id="263" r:id="Rfe8c8fb72d9540cc"/>
+    <p:sldId xmlns:r="http://schemas.openxmlformats.org/officeDocument/2006/relationships" id="264" r:id="R7e1cc297616f442b"/>
+    <p:sldId xmlns:r="http://schemas.openxmlformats.org/officeDocument/2006/relationships" id="265" r:id="R6f116be4e48b4d89"/>
+    <p:sldId xmlns:r="http://schemas.openxmlformats.org/officeDocument/2006/relationships" id="266" r:id="Rbbd5f5f00df94260"/>
   </p:sldIdLst>
   <p:sldSz cx="12192000" cy="6858000"/>
   <p:notesSz cx="6858000" cy="9144000"/>
@@ -1375,7 +1375,7 @@
   </p:cSld>
   <p:clrMap bg1="lt1" tx1="dk1" bg2="lt2" tx2="dk2" accent1="accent1" accent2="accent2" accent3="accent3" accent4="accent4" accent5="accent5" accent6="accent6" hlink="hlink" folHlink="folHlink"/>
   <p:sldLayoutIdLst>
-    <p:sldLayoutId xmlns:r="http://schemas.openxmlformats.org/officeDocument/2006/relationships" id="2147483649" r:id="R913787c883fb479f"/>
+    <p:sldLayoutId xmlns:r="http://schemas.openxmlformats.org/officeDocument/2006/relationships" id="2147483649" r:id="Ra887a29eae8f4597"/>
   </p:sldLayoutIdLst>
   <p:txStyles>
     <p:titleStyle>
@@ -1923,10 +1923,10 @@
       </p:grpSpPr>
       <p:sp>
         <p:nvSpPr>
-          <p:cNvPr id="11" name="">
-            <a:extLst xmlns:a="http://schemas.openxmlformats.org/drawingml/2006/main">
-              <a:ext uri="{FF2B5EF4-FFF2-40B4-BE49-F238E27FC236}">
-                <a16:creationId xmlns:a16="http://schemas.microsoft.com/office/drawing/2014/main" id="{16C6051A-A50B-40E9-B18A-87CA7285393D}"/>
+          <p:cNvPr id="12" name="">
+            <a:extLst xmlns:a="http://schemas.openxmlformats.org/drawingml/2006/main">
+              <a:ext uri="{FF2B5EF4-FFF2-40B4-BE49-F238E27FC236}">
+                <a16:creationId xmlns:a16="http://schemas.microsoft.com/office/drawing/2014/main" id="{BBFAD6B1-1FE7-46B9-9E74-EBB114B3AD5E}"/>
               </a:ext>
             </a:extLst>
           </p:cNvPr>
@@ -1944,7 +1944,7 @@
             <a:avLst/>
           </a:prstGeom>
           <a:solidFill xmlns:a="http://schemas.openxmlformats.org/drawingml/2006/main">
-            <a:srgbClr val="EEF7FF"/>
+            <a:srgbClr val="0F1A2B"/>
           </a:solidFill>
           <a:ln xmlns:a="http://schemas.openxmlformats.org/drawingml/2006/main" w="0">
             <a:noFill/>
@@ -1956,27 +1956,27 @@
           <p:cNvPr id="2" name="">
             <a:extLst xmlns:a="http://schemas.openxmlformats.org/drawingml/2006/main">
               <a:ext uri="{FF2B5EF4-FFF2-40B4-BE49-F238E27FC236}">
-                <a16:creationId xmlns:a16="http://schemas.microsoft.com/office/drawing/2014/main" id="{66A164A6-5F0D-4A67-9FBF-C8E5EC5E3624}"/>
-              </a:ext>
-            </a:extLst>
-          </p:cNvPr>
-          <p:cNvSpPr>
-            <a:spLocks xmlns:a="http://schemas.openxmlformats.org/drawingml/2006/main" noGrp="1"/>
-          </p:cNvSpPr>
-          <p:nvPr/>
-        </p:nvSpPr>
-        <p:spPr>
-          <a:xfrm xmlns:a="http://schemas.openxmlformats.org/drawingml/2006/main">
-            <a:off x="7239000" y="1143000"/>
-            <a:ext cx="4381500" cy="4572000"/>
+                <a16:creationId xmlns:a16="http://schemas.microsoft.com/office/drawing/2014/main" id="{6CDE2B0D-C83B-40F9-A9CF-CB3DC0ED5B66}"/>
+              </a:ext>
+            </a:extLst>
+          </p:cNvPr>
+          <p:cNvSpPr>
+            <a:spLocks xmlns:a="http://schemas.openxmlformats.org/drawingml/2006/main" noGrp="1"/>
+          </p:cNvSpPr>
+          <p:nvPr/>
+        </p:nvSpPr>
+        <p:spPr>
+          <a:xfrm xmlns:a="http://schemas.openxmlformats.org/drawingml/2006/main">
+            <a:off x="7239000" y="1333500"/>
+            <a:ext cx="4381500" cy="4191000"/>
           </a:xfrm>
           <a:prstGeom xmlns:a="http://schemas.openxmlformats.org/drawingml/2006/main" prst="roundRect">
             <a:avLst>
-              <a:gd name="adj" fmla="val 1739"/>
+              <a:gd name="adj" fmla="val 1818"/>
             </a:avLst>
           </a:prstGeom>
           <a:solidFill xmlns:a="http://schemas.openxmlformats.org/drawingml/2006/main">
-            <a:srgbClr val="092454"/>
+            <a:srgbClr val="1C2E4A"/>
           </a:solidFill>
           <a:ln xmlns:a="http://schemas.openxmlformats.org/drawingml/2006/main" w="0">
             <a:noFill/>
@@ -1988,18 +1988,18 @@
           <p:cNvPr id="3" name="">
             <a:extLst xmlns:a="http://schemas.openxmlformats.org/drawingml/2006/main">
               <a:ext uri="{FF2B5EF4-FFF2-40B4-BE49-F238E27FC236}">
-                <a16:creationId xmlns:a16="http://schemas.microsoft.com/office/drawing/2014/main" id="{AA9C8909-EED9-46EC-94B3-74533F36EE5A}"/>
-              </a:ext>
-            </a:extLst>
-          </p:cNvPr>
-          <p:cNvSpPr>
-            <a:spLocks xmlns:a="http://schemas.openxmlformats.org/drawingml/2006/main" noGrp="1"/>
-          </p:cNvSpPr>
-          <p:nvPr/>
-        </p:nvSpPr>
-        <p:spPr>
-          <a:xfrm xmlns:a="http://schemas.openxmlformats.org/drawingml/2006/main">
-            <a:off x="7620000" y="1600200"/>
+                <a16:creationId xmlns:a16="http://schemas.microsoft.com/office/drawing/2014/main" id="{D287E464-9966-4E51-A48B-E3057A8E135E}"/>
+              </a:ext>
+            </a:extLst>
+          </p:cNvPr>
+          <p:cNvSpPr>
+            <a:spLocks xmlns:a="http://schemas.openxmlformats.org/drawingml/2006/main" noGrp="1"/>
+          </p:cNvSpPr>
+          <p:nvPr/>
+        </p:nvSpPr>
+        <p:spPr>
+          <a:xfrm xmlns:a="http://schemas.openxmlformats.org/drawingml/2006/main">
+            <a:off x="7620000" y="1771650"/>
             <a:ext cx="3619500" cy="266700"/>
           </a:xfrm>
           <a:prstGeom xmlns:a="http://schemas.openxmlformats.org/drawingml/2006/main" prst="rect">
@@ -2017,19 +2017,19 @@
           <a:lstStyle xmlns:a="http://schemas.openxmlformats.org/drawingml/2006/main"/>
           <a:p xmlns:a="http://schemas.openxmlformats.org/drawingml/2006/main">
             <a:pPr algn="l">
-              <a:defRPr sz="1125" b="1">
-                <a:solidFill>
-                  <a:srgbClr val="FFD43B"/>
-                </a:solidFill>
-                <a:latin typeface="Helvetica Neue"/>
-                <a:ea typeface="Helvetica Neue"/>
-                <a:cs typeface="Helvetica Neue"/>
-              </a:defRPr>
-            </a:pPr>
-            <a:r>
-              <a:rPr sz="1125" b="1">
-                <a:solidFill>
-                  <a:srgbClr val="FFD43B"/>
+              <a:defRPr sz="1050" b="1">
+                <a:solidFill>
+                  <a:srgbClr val="D1CFC9"/>
+                </a:solidFill>
+                <a:latin typeface="Helvetica Neue"/>
+                <a:ea typeface="Helvetica Neue"/>
+                <a:cs typeface="Helvetica Neue"/>
+              </a:defRPr>
+            </a:pPr>
+            <a:r>
+              <a:rPr sz="1050" b="1">
+                <a:solidFill>
+                  <a:srgbClr val="D1CFC9"/>
                 </a:solidFill>
                 <a:latin typeface="Helvetica Neue"/>
                 <a:ea typeface="Helvetica Neue"/>
@@ -2045,156 +2045,19 @@
           <p:cNvPr id="4" name="">
             <a:extLst xmlns:a="http://schemas.openxmlformats.org/drawingml/2006/main">
               <a:ext uri="{FF2B5EF4-FFF2-40B4-BE49-F238E27FC236}">
-                <a16:creationId xmlns:a16="http://schemas.microsoft.com/office/drawing/2014/main" id="{CE7C3AB8-D31A-401F-82F9-1B892B3B44FA}"/>
-              </a:ext>
-            </a:extLst>
-          </p:cNvPr>
-          <p:cNvSpPr>
-            <a:spLocks xmlns:a="http://schemas.openxmlformats.org/drawingml/2006/main" noGrp="1"/>
-          </p:cNvSpPr>
-          <p:nvPr/>
-        </p:nvSpPr>
-        <p:spPr>
-          <a:xfrm xmlns:a="http://schemas.openxmlformats.org/drawingml/2006/main">
-            <a:off x="7620000" y="2114550"/>
-            <a:ext cx="3657600" cy="2857500"/>
-          </a:xfrm>
-          <a:prstGeom xmlns:a="http://schemas.openxmlformats.org/drawingml/2006/main" prst="rect">
-            <a:avLst/>
-          </a:prstGeom>
-          <a:noFill xmlns:a="http://schemas.openxmlformats.org/drawingml/2006/main"/>
-          <a:ln xmlns:a="http://schemas.openxmlformats.org/drawingml/2006/main" w="0">
-            <a:noFill/>
-          </a:ln>
-        </p:spPr>
-        <p:txBody>
-          <a:bodyPr xmlns:a="http://schemas.openxmlformats.org/drawingml/2006/main" anchor="t">
-            <a:noAutofit/>
-          </a:bodyPr>
-          <a:lstStyle xmlns:a="http://schemas.openxmlformats.org/drawingml/2006/main"/>
-          <a:p xmlns:a="http://schemas.openxmlformats.org/drawingml/2006/main">
-            <a:pPr algn="l">
-              <a:defRPr sz="3000" b="1">
-                <a:solidFill>
-                  <a:srgbClr val="FFFFFF"/>
-                </a:solidFill>
-                <a:latin typeface="Helvetica Neue"/>
-                <a:ea typeface="Helvetica Neue"/>
-                <a:cs typeface="Helvetica Neue"/>
-              </a:defRPr>
-            </a:pPr>
-            <a:r>
-              <a:rPr sz="3000" b="1">
-                <a:solidFill>
-                  <a:srgbClr val="FFFFFF"/>
-                </a:solidFill>
-                <a:latin typeface="Helvetica Neue"/>
-                <a:ea typeface="Helvetica Neue"/>
-                <a:cs typeface="Helvetica Neue"/>
-              </a:rPr>
-              <a:t>Write the</a:t>
-            </a:r>
-          </a:p>
-          <a:p xmlns:a="http://schemas.openxmlformats.org/drawingml/2006/main">
-            <a:pPr algn="l">
-              <a:defRPr sz="3000" b="1">
-                <a:solidFill>
-                  <a:srgbClr val="FFFFFF"/>
-                </a:solidFill>
-                <a:latin typeface="Helvetica Neue"/>
-                <a:ea typeface="Helvetica Neue"/>
-                <a:cs typeface="Helvetica Neue"/>
-              </a:defRPr>
-            </a:pPr>
-            <a:r>
-              <a:rPr sz="3000" b="1">
-                <a:solidFill>
-                  <a:srgbClr val="FFFFFF"/>
-                </a:solidFill>
-                <a:latin typeface="Helvetica Neue"/>
-                <a:ea typeface="Helvetica Neue"/>
-                <a:cs typeface="Helvetica Neue"/>
-              </a:rPr>
-              <a:t>business spotlight</a:t>
-            </a:r>
-          </a:p>
-        </p:txBody>
-      </p:sp>
-      <p:sp>
-        <p:nvSpPr>
-          <p:cNvPr id="5" name="">
-            <a:extLst xmlns:a="http://schemas.openxmlformats.org/drawingml/2006/main">
-              <a:ext uri="{FF2B5EF4-FFF2-40B4-BE49-F238E27FC236}">
-                <a16:creationId xmlns:a16="http://schemas.microsoft.com/office/drawing/2014/main" id="{42AECA54-7968-4E0E-B392-9F4E19DCC731}"/>
-              </a:ext>
-            </a:extLst>
-          </p:cNvPr>
-          <p:cNvSpPr>
-            <a:spLocks xmlns:a="http://schemas.openxmlformats.org/drawingml/2006/main" noGrp="1"/>
-          </p:cNvSpPr>
-          <p:nvPr/>
-        </p:nvSpPr>
-        <p:spPr>
-          <a:xfrm xmlns:a="http://schemas.openxmlformats.org/drawingml/2006/main">
-            <a:off x="685800" y="552450"/>
-            <a:ext cx="2857500" cy="247650"/>
-          </a:xfrm>
-          <a:prstGeom xmlns:a="http://schemas.openxmlformats.org/drawingml/2006/main" prst="rect">
-            <a:avLst/>
-          </a:prstGeom>
-          <a:noFill xmlns:a="http://schemas.openxmlformats.org/drawingml/2006/main"/>
-          <a:ln xmlns:a="http://schemas.openxmlformats.org/drawingml/2006/main" w="0">
-            <a:noFill/>
-          </a:ln>
-        </p:spPr>
-        <p:txBody>
-          <a:bodyPr xmlns:a="http://schemas.openxmlformats.org/drawingml/2006/main" anchor="t">
-            <a:noAutofit/>
-          </a:bodyPr>
-          <a:lstStyle xmlns:a="http://schemas.openxmlformats.org/drawingml/2006/main"/>
-          <a:p xmlns:a="http://schemas.openxmlformats.org/drawingml/2006/main">
-            <a:pPr algn="l">
-              <a:defRPr sz="1200" b="1">
-                <a:solidFill>
-                  <a:srgbClr val="2563EB"/>
-                </a:solidFill>
-                <a:latin typeface="Helvetica Neue"/>
-                <a:ea typeface="Helvetica Neue"/>
-                <a:cs typeface="Helvetica Neue"/>
-              </a:defRPr>
-            </a:pPr>
-            <a:r>
-              <a:rPr sz="1200" b="1">
-                <a:solidFill>
-                  <a:srgbClr val="2563EB"/>
-                </a:solidFill>
-                <a:latin typeface="Helvetica Neue"/>
-                <a:ea typeface="Helvetica Neue"/>
-                <a:cs typeface="Helvetica Neue"/>
-              </a:rPr>
-              <a:t>CAREER CANVAS</a:t>
-            </a:r>
-          </a:p>
-        </p:txBody>
-      </p:sp>
-      <p:sp>
-        <p:nvSpPr>
-          <p:cNvPr id="6" name="">
-            <a:extLst xmlns:a="http://schemas.openxmlformats.org/drawingml/2006/main">
-              <a:ext uri="{FF2B5EF4-FFF2-40B4-BE49-F238E27FC236}">
-                <a16:creationId xmlns:a16="http://schemas.microsoft.com/office/drawing/2014/main" id="{6EB0154F-496B-43A0-B543-CAD8D33D22F2}"/>
-              </a:ext>
-            </a:extLst>
-          </p:cNvPr>
-          <p:cNvSpPr>
-            <a:spLocks xmlns:a="http://schemas.openxmlformats.org/drawingml/2006/main" noGrp="1"/>
-          </p:cNvSpPr>
-          <p:nvPr/>
-        </p:nvSpPr>
-        <p:spPr>
-          <a:xfrm xmlns:a="http://schemas.openxmlformats.org/drawingml/2006/main">
-            <a:off x="685800" y="914400"/>
-            <a:ext cx="685800" cy="76200"/>
+                <a16:creationId xmlns:a16="http://schemas.microsoft.com/office/drawing/2014/main" id="{8DD42B02-FC5A-4C1B-B740-5C33F53F4118}"/>
+              </a:ext>
+            </a:extLst>
+          </p:cNvPr>
+          <p:cNvSpPr>
+            <a:spLocks xmlns:a="http://schemas.openxmlformats.org/drawingml/2006/main" noGrp="1"/>
+          </p:cNvSpPr>
+          <p:nvPr/>
+        </p:nvSpPr>
+        <p:spPr>
+          <a:xfrm xmlns:a="http://schemas.openxmlformats.org/drawingml/2006/main">
+            <a:off x="7620000" y="2152650"/>
+            <a:ext cx="571500" cy="57150"/>
           </a:xfrm>
           <a:prstGeom xmlns:a="http://schemas.openxmlformats.org/drawingml/2006/main" prst="roundRect">
             <a:avLst>
@@ -2202,7 +2065,7 @@
             </a:avLst>
           </a:prstGeom>
           <a:solidFill xmlns:a="http://schemas.openxmlformats.org/drawingml/2006/main">
-            <a:srgbClr val="FFD43B"/>
+            <a:srgbClr val="D1CFC9"/>
           </a:solidFill>
           <a:ln xmlns:a="http://schemas.openxmlformats.org/drawingml/2006/main" w="0">
             <a:noFill/>
@@ -2211,10 +2074,179 @@
       </p:sp>
       <p:sp>
         <p:nvSpPr>
+          <p:cNvPr id="5" name="">
+            <a:extLst xmlns:a="http://schemas.openxmlformats.org/drawingml/2006/main">
+              <a:ext uri="{FF2B5EF4-FFF2-40B4-BE49-F238E27FC236}">
+                <a16:creationId xmlns:a16="http://schemas.microsoft.com/office/drawing/2014/main" id="{C9DD2057-E060-49F8-9BAC-7C7D6997641D}"/>
+              </a:ext>
+            </a:extLst>
+          </p:cNvPr>
+          <p:cNvSpPr>
+            <a:spLocks xmlns:a="http://schemas.openxmlformats.org/drawingml/2006/main" noGrp="1"/>
+          </p:cNvSpPr>
+          <p:nvPr/>
+        </p:nvSpPr>
+        <p:spPr>
+          <a:xfrm xmlns:a="http://schemas.openxmlformats.org/drawingml/2006/main">
+            <a:off x="7620000" y="2495550"/>
+            <a:ext cx="3657600" cy="2667000"/>
+          </a:xfrm>
+          <a:prstGeom xmlns:a="http://schemas.openxmlformats.org/drawingml/2006/main" prst="rect">
+            <a:avLst/>
+          </a:prstGeom>
+          <a:noFill xmlns:a="http://schemas.openxmlformats.org/drawingml/2006/main"/>
+          <a:ln xmlns:a="http://schemas.openxmlformats.org/drawingml/2006/main" w="0">
+            <a:noFill/>
+          </a:ln>
+        </p:spPr>
+        <p:txBody>
+          <a:bodyPr xmlns:a="http://schemas.openxmlformats.org/drawingml/2006/main" anchor="t">
+            <a:noAutofit/>
+          </a:bodyPr>
+          <a:lstStyle xmlns:a="http://schemas.openxmlformats.org/drawingml/2006/main"/>
+          <a:p xmlns:a="http://schemas.openxmlformats.org/drawingml/2006/main">
+            <a:pPr algn="l">
+              <a:defRPr sz="2850" b="1">
+                <a:solidFill>
+                  <a:srgbClr val="FFFFFF"/>
+                </a:solidFill>
+                <a:latin typeface="Helvetica Neue"/>
+                <a:ea typeface="Helvetica Neue"/>
+                <a:cs typeface="Helvetica Neue"/>
+              </a:defRPr>
+            </a:pPr>
+            <a:r>
+              <a:rPr sz="2850" b="1">
+                <a:solidFill>
+                  <a:srgbClr val="FFFFFF"/>
+                </a:solidFill>
+                <a:latin typeface="Helvetica Neue"/>
+                <a:ea typeface="Helvetica Neue"/>
+                <a:cs typeface="Helvetica Neue"/>
+              </a:rPr>
+              <a:t>Write the</a:t>
+            </a:r>
+          </a:p>
+          <a:p xmlns:a="http://schemas.openxmlformats.org/drawingml/2006/main">
+            <a:pPr algn="l">
+              <a:defRPr sz="2850" b="1">
+                <a:solidFill>
+                  <a:srgbClr val="FFFFFF"/>
+                </a:solidFill>
+                <a:latin typeface="Helvetica Neue"/>
+                <a:ea typeface="Helvetica Neue"/>
+                <a:cs typeface="Helvetica Neue"/>
+              </a:defRPr>
+            </a:pPr>
+            <a:r>
+              <a:rPr sz="2850" b="1">
+                <a:solidFill>
+                  <a:srgbClr val="FFFFFF"/>
+                </a:solidFill>
+                <a:latin typeface="Helvetica Neue"/>
+                <a:ea typeface="Helvetica Neue"/>
+                <a:cs typeface="Helvetica Neue"/>
+              </a:rPr>
+              <a:t>business spotlight</a:t>
+            </a:r>
+          </a:p>
+        </p:txBody>
+      </p:sp>
+      <p:sp>
+        <p:nvSpPr>
+          <p:cNvPr id="6" name="">
+            <a:extLst xmlns:a="http://schemas.openxmlformats.org/drawingml/2006/main">
+              <a:ext uri="{FF2B5EF4-FFF2-40B4-BE49-F238E27FC236}">
+                <a16:creationId xmlns:a16="http://schemas.microsoft.com/office/drawing/2014/main" id="{0B90B39A-C31C-40C5-8EDA-371A8E65EACB}"/>
+              </a:ext>
+            </a:extLst>
+          </p:cNvPr>
+          <p:cNvSpPr>
+            <a:spLocks xmlns:a="http://schemas.openxmlformats.org/drawingml/2006/main" noGrp="1"/>
+          </p:cNvSpPr>
+          <p:nvPr/>
+        </p:nvSpPr>
+        <p:spPr>
+          <a:xfrm xmlns:a="http://schemas.openxmlformats.org/drawingml/2006/main">
+            <a:off x="685800" y="552450"/>
+            <a:ext cx="2857500" cy="247650"/>
+          </a:xfrm>
+          <a:prstGeom xmlns:a="http://schemas.openxmlformats.org/drawingml/2006/main" prst="rect">
+            <a:avLst/>
+          </a:prstGeom>
+          <a:noFill xmlns:a="http://schemas.openxmlformats.org/drawingml/2006/main"/>
+          <a:ln xmlns:a="http://schemas.openxmlformats.org/drawingml/2006/main" w="0">
+            <a:noFill/>
+          </a:ln>
+        </p:spPr>
+        <p:txBody>
+          <a:bodyPr xmlns:a="http://schemas.openxmlformats.org/drawingml/2006/main" anchor="t">
+            <a:noAutofit/>
+          </a:bodyPr>
+          <a:lstStyle xmlns:a="http://schemas.openxmlformats.org/drawingml/2006/main"/>
+          <a:p xmlns:a="http://schemas.openxmlformats.org/drawingml/2006/main">
+            <a:pPr algn="l">
+              <a:defRPr sz="1125" b="1">
+                <a:solidFill>
+                  <a:srgbClr val="52677D"/>
+                </a:solidFill>
+                <a:latin typeface="Helvetica Neue"/>
+                <a:ea typeface="Helvetica Neue"/>
+                <a:cs typeface="Helvetica Neue"/>
+              </a:defRPr>
+            </a:pPr>
+            <a:r>
+              <a:rPr sz="1125" b="1">
+                <a:solidFill>
+                  <a:srgbClr val="52677D"/>
+                </a:solidFill>
+                <a:latin typeface="Helvetica Neue"/>
+                <a:ea typeface="Helvetica Neue"/>
+                <a:cs typeface="Helvetica Neue"/>
+              </a:rPr>
+              <a:t>CAREER CANVAS</a:t>
+            </a:r>
+          </a:p>
+        </p:txBody>
+      </p:sp>
+      <p:sp>
+        <p:nvSpPr>
           <p:cNvPr id="7" name="">
             <a:extLst xmlns:a="http://schemas.openxmlformats.org/drawingml/2006/main">
               <a:ext uri="{FF2B5EF4-FFF2-40B4-BE49-F238E27FC236}">
-                <a16:creationId xmlns:a16="http://schemas.microsoft.com/office/drawing/2014/main" id="{8F1B2A58-D9D2-4F0A-9DCA-EF9CD44676A9}"/>
+                <a16:creationId xmlns:a16="http://schemas.microsoft.com/office/drawing/2014/main" id="{08C1D996-3BA4-4380-B05B-BF0042EB1011}"/>
+              </a:ext>
+            </a:extLst>
+          </p:cNvPr>
+          <p:cNvSpPr>
+            <a:spLocks xmlns:a="http://schemas.openxmlformats.org/drawingml/2006/main" noGrp="1"/>
+          </p:cNvSpPr>
+          <p:nvPr/>
+        </p:nvSpPr>
+        <p:spPr>
+          <a:xfrm xmlns:a="http://schemas.openxmlformats.org/drawingml/2006/main">
+            <a:off x="685800" y="914400"/>
+            <a:ext cx="685800" cy="76200"/>
+          </a:xfrm>
+          <a:prstGeom xmlns:a="http://schemas.openxmlformats.org/drawingml/2006/main" prst="roundRect">
+            <a:avLst>
+              <a:gd name="adj" fmla="val 50000"/>
+            </a:avLst>
+          </a:prstGeom>
+          <a:solidFill xmlns:a="http://schemas.openxmlformats.org/drawingml/2006/main">
+            <a:srgbClr val="1C2E4A"/>
+          </a:solidFill>
+          <a:ln xmlns:a="http://schemas.openxmlformats.org/drawingml/2006/main" w="0">
+            <a:noFill/>
+          </a:ln>
+        </p:spPr>
+      </p:sp>
+      <p:sp>
+        <p:nvSpPr>
+          <p:cNvPr id="8" name="">
+            <a:extLst xmlns:a="http://schemas.openxmlformats.org/drawingml/2006/main">
+              <a:ext uri="{FF2B5EF4-FFF2-40B4-BE49-F238E27FC236}">
+                <a16:creationId xmlns:a16="http://schemas.microsoft.com/office/drawing/2014/main" id="{97F8E335-5CB8-4B63-9F38-6396FCEAADA7}"/>
               </a:ext>
             </a:extLst>
           </p:cNvPr>
@@ -2226,7 +2258,7 @@
         <p:spPr>
           <a:xfrm xmlns:a="http://schemas.openxmlformats.org/drawingml/2006/main">
             <a:off x="685800" y="1447800"/>
-            <a:ext cx="4762500" cy="1771650"/>
+            <a:ext cx="4953000" cy="1809750"/>
           </a:xfrm>
           <a:prstGeom xmlns:a="http://schemas.openxmlformats.org/drawingml/2006/main" prst="rect">
             <a:avLst/>
@@ -2245,7 +2277,7 @@
             <a:pPr algn="l">
               <a:defRPr sz="3300" b="1">
                 <a:solidFill>
-                  <a:srgbClr val="092454"/>
+                  <a:srgbClr val="1C2E4A"/>
                 </a:solidFill>
                 <a:latin typeface="Helvetica Neue"/>
                 <a:ea typeface="Helvetica Neue"/>
@@ -2255,7 +2287,7 @@
             <a:r>
               <a:rPr sz="3300" b="1">
                 <a:solidFill>
-                  <a:srgbClr val="092454"/>
+                  <a:srgbClr val="1C2E4A"/>
                 </a:solidFill>
                 <a:latin typeface="Helvetica Neue"/>
                 <a:ea typeface="Helvetica Neue"/>
@@ -2268,7 +2300,7 @@
             <a:pPr algn="l">
               <a:defRPr sz="3300" b="1">
                 <a:solidFill>
-                  <a:srgbClr val="092454"/>
+                  <a:srgbClr val="1C2E4A"/>
                 </a:solidFill>
                 <a:latin typeface="Helvetica Neue"/>
                 <a:ea typeface="Helvetica Neue"/>
@@ -2278,7 +2310,7 @@
             <a:r>
               <a:rPr sz="3300" b="1">
                 <a:solidFill>
-                  <a:srgbClr val="092454"/>
+                  <a:srgbClr val="1C2E4A"/>
                 </a:solidFill>
                 <a:latin typeface="Helvetica Neue"/>
                 <a:ea typeface="Helvetica Neue"/>
@@ -2291,22 +2323,22 @@
       </p:sp>
       <p:sp>
         <p:nvSpPr>
-          <p:cNvPr id="8" name="">
-            <a:extLst xmlns:a="http://schemas.openxmlformats.org/drawingml/2006/main">
-              <a:ext uri="{FF2B5EF4-FFF2-40B4-BE49-F238E27FC236}">
-                <a16:creationId xmlns:a16="http://schemas.microsoft.com/office/drawing/2014/main" id="{593A50B2-8035-46D3-A6B5-7F410B5689E3}"/>
-              </a:ext>
-            </a:extLst>
-          </p:cNvPr>
-          <p:cNvSpPr>
-            <a:spLocks xmlns:a="http://schemas.openxmlformats.org/drawingml/2006/main" noGrp="1"/>
-          </p:cNvSpPr>
-          <p:nvPr/>
-        </p:nvSpPr>
-        <p:spPr>
-          <a:xfrm xmlns:a="http://schemas.openxmlformats.org/drawingml/2006/main">
-            <a:off x="685800" y="3429000"/>
-            <a:ext cx="4476750" cy="1047750"/>
+          <p:cNvPr id="9" name="">
+            <a:extLst xmlns:a="http://schemas.openxmlformats.org/drawingml/2006/main">
+              <a:ext uri="{FF2B5EF4-FFF2-40B4-BE49-F238E27FC236}">
+                <a16:creationId xmlns:a16="http://schemas.microsoft.com/office/drawing/2014/main" id="{B12961A2-A34E-4C8E-94C1-93AF5D89B7A3}"/>
+              </a:ext>
+            </a:extLst>
+          </p:cNvPr>
+          <p:cNvSpPr>
+            <a:spLocks xmlns:a="http://schemas.openxmlformats.org/drawingml/2006/main" noGrp="1"/>
+          </p:cNvSpPr>
+          <p:nvPr/>
+        </p:nvSpPr>
+        <p:spPr>
+          <a:xfrm xmlns:a="http://schemas.openxmlformats.org/drawingml/2006/main">
+            <a:off x="685800" y="3467100"/>
+            <a:ext cx="4762500" cy="1143000"/>
           </a:xfrm>
           <a:prstGeom xmlns:a="http://schemas.openxmlformats.org/drawingml/2006/main" prst="rect">
             <a:avLst/>
@@ -2323,19 +2355,19 @@
           <a:lstStyle xmlns:a="http://schemas.openxmlformats.org/drawingml/2006/main"/>
           <a:p xmlns:a="http://schemas.openxmlformats.org/drawingml/2006/main">
             <a:pPr algn="l">
-              <a:defRPr sz="1650" b="0">
-                <a:solidFill>
-                  <a:srgbClr val="61718A"/>
-                </a:solidFill>
-                <a:latin typeface="Helvetica Neue"/>
-                <a:ea typeface="Helvetica Neue"/>
-                <a:cs typeface="Helvetica Neue"/>
-              </a:defRPr>
-            </a:pPr>
-            <a:r>
-              <a:rPr sz="1650" b="0">
-                <a:solidFill>
-                  <a:srgbClr val="61718A"/>
+              <a:defRPr sz="1575" b="0">
+                <a:solidFill>
+                  <a:srgbClr val="52677D"/>
+                </a:solidFill>
+                <a:latin typeface="Helvetica Neue"/>
+                <a:ea typeface="Helvetica Neue"/>
+                <a:cs typeface="Helvetica Neue"/>
+              </a:defRPr>
+            </a:pPr>
+            <a:r>
+              <a:rPr sz="1575" b="0">
+                <a:solidFill>
+                  <a:srgbClr val="52677D"/>
                 </a:solidFill>
                 <a:latin typeface="Helvetica Neue"/>
                 <a:ea typeface="Helvetica Neue"/>
@@ -2348,21 +2380,21 @@
       </p:sp>
       <p:sp>
         <p:nvSpPr>
-          <p:cNvPr id="9" name="">
-            <a:extLst xmlns:a="http://schemas.openxmlformats.org/drawingml/2006/main">
-              <a:ext uri="{FF2B5EF4-FFF2-40B4-BE49-F238E27FC236}">
-                <a16:creationId xmlns:a16="http://schemas.microsoft.com/office/drawing/2014/main" id="{B38CC33A-45C7-4980-BF83-6C697E24189D}"/>
-              </a:ext>
-            </a:extLst>
-          </p:cNvPr>
-          <p:cNvSpPr>
-            <a:spLocks xmlns:a="http://schemas.openxmlformats.org/drawingml/2006/main" noGrp="1"/>
-          </p:cNvSpPr>
-          <p:nvPr/>
-        </p:nvSpPr>
-        <p:spPr>
-          <a:xfrm xmlns:a="http://schemas.openxmlformats.org/drawingml/2006/main">
-            <a:off x="685800" y="5429250"/>
+          <p:cNvPr id="10" name="">
+            <a:extLst xmlns:a="http://schemas.openxmlformats.org/drawingml/2006/main">
+              <a:ext uri="{FF2B5EF4-FFF2-40B4-BE49-F238E27FC236}">
+                <a16:creationId xmlns:a16="http://schemas.microsoft.com/office/drawing/2014/main" id="{493039E6-9586-468E-A8DA-BEE0AE634370}"/>
+              </a:ext>
+            </a:extLst>
+          </p:cNvPr>
+          <p:cNvSpPr>
+            <a:spLocks xmlns:a="http://schemas.openxmlformats.org/drawingml/2006/main" noGrp="1"/>
+          </p:cNvSpPr>
+          <p:nvPr/>
+        </p:nvSpPr>
+        <p:spPr>
+          <a:xfrm xmlns:a="http://schemas.openxmlformats.org/drawingml/2006/main">
+            <a:off x="685800" y="5391150"/>
             <a:ext cx="2095500" cy="285750"/>
           </a:xfrm>
           <a:prstGeom xmlns:a="http://schemas.openxmlformats.org/drawingml/2006/main" prst="rect">
@@ -2380,19 +2412,19 @@
           <a:lstStyle xmlns:a="http://schemas.openxmlformats.org/drawingml/2006/main"/>
           <a:p xmlns:a="http://schemas.openxmlformats.org/drawingml/2006/main">
             <a:pPr algn="l">
-              <a:defRPr sz="1350" b="1">
-                <a:solidFill>
-                  <a:srgbClr val="092454"/>
-                </a:solidFill>
-                <a:latin typeface="Helvetica Neue"/>
-                <a:ea typeface="Helvetica Neue"/>
-                <a:cs typeface="Helvetica Neue"/>
-              </a:defRPr>
-            </a:pPr>
-            <a:r>
-              <a:rPr sz="1350" b="1">
-                <a:solidFill>
-                  <a:srgbClr val="092454"/>
+              <a:defRPr sz="1275" b="1">
+                <a:solidFill>
+                  <a:srgbClr val="1C2E4A"/>
+                </a:solidFill>
+                <a:latin typeface="Helvetica Neue"/>
+                <a:ea typeface="Helvetica Neue"/>
+                <a:cs typeface="Helvetica Neue"/>
+              </a:defRPr>
+            </a:pPr>
+            <a:r>
+              <a:rPr sz="1275" b="1">
+                <a:solidFill>
+                  <a:srgbClr val="1C2E4A"/>
                 </a:solidFill>
                 <a:latin typeface="Helvetica Neue"/>
                 <a:ea typeface="Helvetica Neue"/>
@@ -2405,22 +2437,22 @@
       </p:sp>
       <p:sp>
         <p:nvSpPr>
-          <p:cNvPr id="10" name="">
-            <a:extLst xmlns:a="http://schemas.openxmlformats.org/drawingml/2006/main">
-              <a:ext uri="{FF2B5EF4-FFF2-40B4-BE49-F238E27FC236}">
-                <a16:creationId xmlns:a16="http://schemas.microsoft.com/office/drawing/2014/main" id="{9F35DB56-E1D8-472B-91FA-3A3EDD8FBD0C}"/>
-              </a:ext>
-            </a:extLst>
-          </p:cNvPr>
-          <p:cNvSpPr>
-            <a:spLocks xmlns:a="http://schemas.openxmlformats.org/drawingml/2006/main" noGrp="1"/>
-          </p:cNvSpPr>
-          <p:nvPr/>
-        </p:nvSpPr>
-        <p:spPr>
-          <a:xfrm xmlns:a="http://schemas.openxmlformats.org/drawingml/2006/main">
-            <a:off x="685800" y="5810250"/>
-            <a:ext cx="3333750" cy="476250"/>
+          <p:cNvPr id="11" name="">
+            <a:extLst xmlns:a="http://schemas.openxmlformats.org/drawingml/2006/main">
+              <a:ext uri="{FF2B5EF4-FFF2-40B4-BE49-F238E27FC236}">
+                <a16:creationId xmlns:a16="http://schemas.microsoft.com/office/drawing/2014/main" id="{3538D848-692D-43FF-A7C8-541CB0EF4966}"/>
+              </a:ext>
+            </a:extLst>
+          </p:cNvPr>
+          <p:cNvSpPr>
+            <a:spLocks xmlns:a="http://schemas.openxmlformats.org/drawingml/2006/main" noGrp="1"/>
+          </p:cNvSpPr>
+          <p:nvPr/>
+        </p:nvSpPr>
+        <p:spPr>
+          <a:xfrm xmlns:a="http://schemas.openxmlformats.org/drawingml/2006/main">
+            <a:off x="685800" y="5772150"/>
+            <a:ext cx="3619500" cy="476250"/>
           </a:xfrm>
           <a:prstGeom xmlns:a="http://schemas.openxmlformats.org/drawingml/2006/main" prst="rect">
             <a:avLst/>
@@ -2437,19 +2469,19 @@
           <a:lstStyle xmlns:a="http://schemas.openxmlformats.org/drawingml/2006/main"/>
           <a:p xmlns:a="http://schemas.openxmlformats.org/drawingml/2006/main">
             <a:pPr algn="l">
-              <a:defRPr sz="1050" b="0">
-                <a:solidFill>
-                  <a:srgbClr val="61718A"/>
-                </a:solidFill>
-                <a:latin typeface="Helvetica Neue"/>
-                <a:ea typeface="Helvetica Neue"/>
-                <a:cs typeface="Helvetica Neue"/>
-              </a:defRPr>
-            </a:pPr>
-            <a:r>
-              <a:rPr sz="1050" b="0">
-                <a:solidFill>
-                  <a:srgbClr val="61718A"/>
+              <a:defRPr sz="975" b="0">
+                <a:solidFill>
+                  <a:srgbClr val="52677D"/>
+                </a:solidFill>
+                <a:latin typeface="Helvetica Neue"/>
+                <a:ea typeface="Helvetica Neue"/>
+                <a:cs typeface="Helvetica Neue"/>
+              </a:defRPr>
+            </a:pPr>
+            <a:r>
+              <a:rPr sz="975" b="0">
+                <a:solidFill>
+                  <a:srgbClr val="52677D"/>
                 </a:solidFill>
                 <a:latin typeface="Helvetica Neue"/>
                 <a:ea typeface="Helvetica Neue"/>
@@ -2460,19 +2492,19 @@
           </a:p>
           <a:p xmlns:a="http://schemas.openxmlformats.org/drawingml/2006/main">
             <a:pPr algn="l">
-              <a:defRPr sz="1050" b="0">
-                <a:solidFill>
-                  <a:srgbClr val="61718A"/>
-                </a:solidFill>
-                <a:latin typeface="Helvetica Neue"/>
-                <a:ea typeface="Helvetica Neue"/>
-                <a:cs typeface="Helvetica Neue"/>
-              </a:defRPr>
-            </a:pPr>
-            <a:r>
-              <a:rPr sz="1050" b="0">
-                <a:solidFill>
-                  <a:srgbClr val="61718A"/>
+              <a:defRPr sz="975" b="0">
+                <a:solidFill>
+                  <a:srgbClr val="52677D"/>
+                </a:solidFill>
+                <a:latin typeface="Helvetica Neue"/>
+                <a:ea typeface="Helvetica Neue"/>
+                <a:cs typeface="Helvetica Neue"/>
+              </a:defRPr>
+            </a:pPr>
+            <a:r>
+              <a:rPr sz="975" b="0">
+                <a:solidFill>
+                  <a:srgbClr val="52677D"/>
                 </a:solidFill>
                 <a:latin typeface="Helvetica Neue"/>
                 <a:ea typeface="Helvetica Neue"/>
@@ -2486,7 +2518,7 @@
     </p:spTree>
     <p:extLst>
       <p:ext uri="{BB962C8B-B14F-4D97-AF65-F5344CB8AC3E}">
-        <p14:creationId xmlns:p14="http://schemas.microsoft.com/office/powerpoint/2010/main" val="105030236"/>
+        <p14:creationId xmlns:p14="http://schemas.microsoft.com/office/powerpoint/2010/main" val="647916802"/>
       </p:ext>
     </p:extLst>
   </p:cSld>
@@ -2517,7 +2549,7 @@
           <p:cNvPr id="15" name="">
             <a:extLst xmlns:a="http://schemas.openxmlformats.org/drawingml/2006/main">
               <a:ext uri="{FF2B5EF4-FFF2-40B4-BE49-F238E27FC236}">
-                <a16:creationId xmlns:a16="http://schemas.microsoft.com/office/drawing/2014/main" id="{401906E1-C6F3-4A40-BD3B-D518164C63AF}"/>
+                <a16:creationId xmlns:a16="http://schemas.microsoft.com/office/drawing/2014/main" id="{18F080B4-A354-409B-8404-94605E9280E0}"/>
               </a:ext>
             </a:extLst>
           </p:cNvPr>
@@ -2548,7 +2580,7 @@
             <a:pPr algn="l">
               <a:defRPr sz="1125" b="1">
                 <a:solidFill>
-                  <a:srgbClr val="2563EB"/>
+                  <a:srgbClr val="52677D"/>
                 </a:solidFill>
                 <a:latin typeface="Helvetica Neue"/>
                 <a:ea typeface="Helvetica Neue"/>
@@ -2558,7 +2590,7 @@
             <a:r>
               <a:rPr sz="1125" b="1">
                 <a:solidFill>
-                  <a:srgbClr val="2563EB"/>
+                  <a:srgbClr val="52677D"/>
                 </a:solidFill>
                 <a:latin typeface="Helvetica Neue"/>
                 <a:ea typeface="Helvetica Neue"/>
@@ -2574,7 +2606,7 @@
           <p:cNvPr id="2" name="">
             <a:extLst xmlns:a="http://schemas.openxmlformats.org/drawingml/2006/main">
               <a:ext uri="{FF2B5EF4-FFF2-40B4-BE49-F238E27FC236}">
-                <a16:creationId xmlns:a16="http://schemas.microsoft.com/office/drawing/2014/main" id="{D96F7EF5-41AE-44B6-85A4-6A4492102450}"/>
+                <a16:creationId xmlns:a16="http://schemas.microsoft.com/office/drawing/2014/main" id="{0719525D-D973-4C6D-BA95-6FD6D015E663}"/>
               </a:ext>
             </a:extLst>
           </p:cNvPr>
@@ -2605,7 +2637,7 @@
             <a:pPr algn="l">
               <a:defRPr sz="2850" b="1">
                 <a:solidFill>
-                  <a:srgbClr val="092454"/>
+                  <a:srgbClr val="1C2E4A"/>
                 </a:solidFill>
                 <a:latin typeface="Helvetica Neue"/>
                 <a:ea typeface="Helvetica Neue"/>
@@ -2615,7 +2647,7 @@
             <a:r>
               <a:rPr sz="2850" b="1">
                 <a:solidFill>
-                  <a:srgbClr val="092454"/>
+                  <a:srgbClr val="1C2E4A"/>
                 </a:solidFill>
                 <a:latin typeface="Helvetica Neue"/>
                 <a:ea typeface="Helvetica Neue"/>
@@ -2631,7 +2663,7 @@
           <p:cNvPr id="3" name="">
             <a:extLst xmlns:a="http://schemas.openxmlformats.org/drawingml/2006/main">
               <a:ext uri="{FF2B5EF4-FFF2-40B4-BE49-F238E27FC236}">
-                <a16:creationId xmlns:a16="http://schemas.microsoft.com/office/drawing/2014/main" id="{55064B75-D679-456A-BDB4-C5C1A86F1B47}"/>
+                <a16:creationId xmlns:a16="http://schemas.microsoft.com/office/drawing/2014/main" id="{C1929228-F7A2-4930-BDDA-17A688A4371D}"/>
               </a:ext>
             </a:extLst>
           </p:cNvPr>
@@ -2651,7 +2683,7 @@
             </a:avLst>
           </a:prstGeom>
           <a:solidFill xmlns:a="http://schemas.openxmlformats.org/drawingml/2006/main">
-            <a:srgbClr val="EEF7FF"/>
+            <a:srgbClr val="D1CFC9"/>
           </a:solidFill>
           <a:ln xmlns:a="http://schemas.openxmlformats.org/drawingml/2006/main" w="0">
             <a:noFill/>
@@ -2663,7 +2695,7 @@
           <p:cNvPr id="4" name="">
             <a:extLst xmlns:a="http://schemas.openxmlformats.org/drawingml/2006/main">
               <a:ext uri="{FF2B5EF4-FFF2-40B4-BE49-F238E27FC236}">
-                <a16:creationId xmlns:a16="http://schemas.microsoft.com/office/drawing/2014/main" id="{9C9BE890-6F6B-409E-90A1-A71DFE9515A4}"/>
+                <a16:creationId xmlns:a16="http://schemas.microsoft.com/office/drawing/2014/main" id="{87DD955F-C6CA-4227-815C-5E21E2B4C66A}"/>
               </a:ext>
             </a:extLst>
           </p:cNvPr>
@@ -2694,7 +2726,7 @@
             <a:pPr algn="l">
               <a:defRPr sz="1125" b="1">
                 <a:solidFill>
-                  <a:srgbClr val="2563EB"/>
+                  <a:srgbClr val="52677D"/>
                 </a:solidFill>
                 <a:latin typeface="Helvetica Neue"/>
                 <a:ea typeface="Helvetica Neue"/>
@@ -2704,7 +2736,7 @@
             <a:r>
               <a:rPr sz="1125" b="1">
                 <a:solidFill>
-                  <a:srgbClr val="2563EB"/>
+                  <a:srgbClr val="52677D"/>
                 </a:solidFill>
                 <a:latin typeface="Helvetica Neue"/>
                 <a:ea typeface="Helvetica Neue"/>
@@ -2720,7 +2752,7 @@
           <p:cNvPr id="5" name="">
             <a:extLst xmlns:a="http://schemas.openxmlformats.org/drawingml/2006/main">
               <a:ext uri="{FF2B5EF4-FFF2-40B4-BE49-F238E27FC236}">
-                <a16:creationId xmlns:a16="http://schemas.microsoft.com/office/drawing/2014/main" id="{2A6D4F1D-6B81-445E-93A6-33BA03A3DBFC}"/>
+                <a16:creationId xmlns:a16="http://schemas.microsoft.com/office/drawing/2014/main" id="{2726078A-A056-4D28-A1AB-50B4E17F6033}"/>
               </a:ext>
             </a:extLst>
           </p:cNvPr>
@@ -2751,7 +2783,7 @@
             <a:pPr algn="l">
               <a:defRPr sz="1800" b="1">
                 <a:solidFill>
-                  <a:srgbClr val="092454"/>
+                  <a:srgbClr val="1C2E4A"/>
                 </a:solidFill>
                 <a:latin typeface="Helvetica Neue"/>
                 <a:ea typeface="Helvetica Neue"/>
@@ -2761,7 +2793,7 @@
             <a:r>
               <a:rPr sz="1800" b="1">
                 <a:solidFill>
-                  <a:srgbClr val="092454"/>
+                  <a:srgbClr val="1C2E4A"/>
                 </a:solidFill>
                 <a:latin typeface="Helvetica Neue"/>
                 <a:ea typeface="Helvetica Neue"/>
@@ -2777,7 +2809,7 @@
           <p:cNvPr id="6" name="">
             <a:extLst xmlns:a="http://schemas.openxmlformats.org/drawingml/2006/main">
               <a:ext uri="{FF2B5EF4-FFF2-40B4-BE49-F238E27FC236}">
-                <a16:creationId xmlns:a16="http://schemas.microsoft.com/office/drawing/2014/main" id="{10CC5005-2FAA-4104-8AB1-830B78127CCE}"/>
+                <a16:creationId xmlns:a16="http://schemas.microsoft.com/office/drawing/2014/main" id="{6FBABB20-1E49-4166-B069-B81C56F79966}"/>
               </a:ext>
             </a:extLst>
           </p:cNvPr>
@@ -2808,7 +2840,7 @@
             <a:pPr algn="l">
               <a:defRPr sz="1800" b="1">
                 <a:solidFill>
-                  <a:srgbClr val="092454"/>
+                  <a:srgbClr val="1C2E4A"/>
                 </a:solidFill>
                 <a:latin typeface="Helvetica Neue"/>
                 <a:ea typeface="Helvetica Neue"/>
@@ -2818,7 +2850,7 @@
             <a:r>
               <a:rPr sz="1800" b="1">
                 <a:solidFill>
-                  <a:srgbClr val="092454"/>
+                  <a:srgbClr val="1C2E4A"/>
                 </a:solidFill>
                 <a:latin typeface="Helvetica Neue"/>
                 <a:ea typeface="Helvetica Neue"/>
@@ -2834,7 +2866,7 @@
           <p:cNvPr id="7" name="">
             <a:extLst xmlns:a="http://schemas.openxmlformats.org/drawingml/2006/main">
               <a:ext uri="{FF2B5EF4-FFF2-40B4-BE49-F238E27FC236}">
-                <a16:creationId xmlns:a16="http://schemas.microsoft.com/office/drawing/2014/main" id="{F057CA49-5D77-4101-94B9-9816E09B0D0D}"/>
+                <a16:creationId xmlns:a16="http://schemas.microsoft.com/office/drawing/2014/main" id="{7B3D0D30-342D-4246-B4C2-D1CE810446CB}"/>
               </a:ext>
             </a:extLst>
           </p:cNvPr>
@@ -2865,7 +2897,7 @@
             <a:pPr algn="l">
               <a:defRPr sz="1800" b="1">
                 <a:solidFill>
-                  <a:srgbClr val="092454"/>
+                  <a:srgbClr val="1C2E4A"/>
                 </a:solidFill>
                 <a:latin typeface="Helvetica Neue"/>
                 <a:ea typeface="Helvetica Neue"/>
@@ -2875,7 +2907,7 @@
             <a:r>
               <a:rPr sz="1800" b="1">
                 <a:solidFill>
-                  <a:srgbClr val="092454"/>
+                  <a:srgbClr val="1C2E4A"/>
                 </a:solidFill>
                 <a:latin typeface="Helvetica Neue"/>
                 <a:ea typeface="Helvetica Neue"/>
@@ -2891,7 +2923,7 @@
           <p:cNvPr id="8" name="">
             <a:extLst xmlns:a="http://schemas.openxmlformats.org/drawingml/2006/main">
               <a:ext uri="{FF2B5EF4-FFF2-40B4-BE49-F238E27FC236}">
-                <a16:creationId xmlns:a16="http://schemas.microsoft.com/office/drawing/2014/main" id="{1BFC74DA-DBA3-41FF-A678-7D88CF9A3478}"/>
+                <a16:creationId xmlns:a16="http://schemas.microsoft.com/office/drawing/2014/main" id="{E7370634-11DE-42BC-B4AA-54832A140CDE}"/>
               </a:ext>
             </a:extLst>
           </p:cNvPr>
@@ -2911,7 +2943,7 @@
             </a:avLst>
           </a:prstGeom>
           <a:solidFill xmlns:a="http://schemas.openxmlformats.org/drawingml/2006/main">
-            <a:srgbClr val="FFD43B"/>
+            <a:srgbClr val="D1CFC9"/>
           </a:solidFill>
           <a:ln xmlns:a="http://schemas.openxmlformats.org/drawingml/2006/main" w="0">
             <a:noFill/>
@@ -2923,7 +2955,7 @@
           <p:cNvPr id="9" name="">
             <a:extLst xmlns:a="http://schemas.openxmlformats.org/drawingml/2006/main">
               <a:ext uri="{FF2B5EF4-FFF2-40B4-BE49-F238E27FC236}">
-                <a16:creationId xmlns:a16="http://schemas.microsoft.com/office/drawing/2014/main" id="{4405962F-B469-47A8-89F7-6AA8C9F6F8D5}"/>
+                <a16:creationId xmlns:a16="http://schemas.microsoft.com/office/drawing/2014/main" id="{B4CCA502-89E9-43C9-BBBF-6D5F8BEFF5C6}"/>
               </a:ext>
             </a:extLst>
           </p:cNvPr>
@@ -2954,7 +2986,7 @@
             <a:pPr algn="l">
               <a:defRPr sz="1125" b="1">
                 <a:solidFill>
-                  <a:srgbClr val="092454"/>
+                  <a:srgbClr val="1C2E4A"/>
                 </a:solidFill>
                 <a:latin typeface="Helvetica Neue"/>
                 <a:ea typeface="Helvetica Neue"/>
@@ -2964,7 +2996,7 @@
             <a:r>
               <a:rPr sz="1125" b="1">
                 <a:solidFill>
-                  <a:srgbClr val="092454"/>
+                  <a:srgbClr val="1C2E4A"/>
                 </a:solidFill>
                 <a:latin typeface="Helvetica Neue"/>
                 <a:ea typeface="Helvetica Neue"/>
@@ -2980,7 +3012,7 @@
           <p:cNvPr id="10" name="">
             <a:extLst xmlns:a="http://schemas.openxmlformats.org/drawingml/2006/main">
               <a:ext uri="{FF2B5EF4-FFF2-40B4-BE49-F238E27FC236}">
-                <a16:creationId xmlns:a16="http://schemas.microsoft.com/office/drawing/2014/main" id="{9738CC18-125A-43A0-B763-F2F8B1B628A9}"/>
+                <a16:creationId xmlns:a16="http://schemas.microsoft.com/office/drawing/2014/main" id="{C5602111-D899-4D1A-AEB6-72D925BB2633}"/>
               </a:ext>
             </a:extLst>
           </p:cNvPr>
@@ -3011,7 +3043,7 @@
             <a:pPr algn="l">
               <a:defRPr sz="2025" b="1">
                 <a:solidFill>
-                  <a:srgbClr val="092454"/>
+                  <a:srgbClr val="1C2E4A"/>
                 </a:solidFill>
                 <a:latin typeface="Helvetica Neue"/>
                 <a:ea typeface="Helvetica Neue"/>
@@ -3021,7 +3053,7 @@
             <a:r>
               <a:rPr sz="2025" b="1">
                 <a:solidFill>
-                  <a:srgbClr val="092454"/>
+                  <a:srgbClr val="1C2E4A"/>
                 </a:solidFill>
                 <a:latin typeface="Helvetica Neue"/>
                 <a:ea typeface="Helvetica Neue"/>
@@ -3037,7 +3069,7 @@
           <p:cNvPr id="11" name="">
             <a:extLst xmlns:a="http://schemas.openxmlformats.org/drawingml/2006/main">
               <a:ext uri="{FF2B5EF4-FFF2-40B4-BE49-F238E27FC236}">
-                <a16:creationId xmlns:a16="http://schemas.microsoft.com/office/drawing/2014/main" id="{808D576E-D0FD-40D1-B2A8-662EF0D2FC4C}"/>
+                <a16:creationId xmlns:a16="http://schemas.microsoft.com/office/drawing/2014/main" id="{1E809129-402E-4179-B0E0-05168C39FDE8}"/>
               </a:ext>
             </a:extLst>
           </p:cNvPr>
@@ -3068,7 +3100,7 @@
             <a:pPr algn="l">
               <a:defRPr sz="1650" b="0">
                 <a:solidFill>
-                  <a:srgbClr val="092454"/>
+                  <a:srgbClr val="1C2E4A"/>
                 </a:solidFill>
                 <a:latin typeface="Helvetica Neue"/>
                 <a:ea typeface="Helvetica Neue"/>
@@ -3078,7 +3110,7 @@
             <a:r>
               <a:rPr sz="1650" b="0">
                 <a:solidFill>
-                  <a:srgbClr val="092454"/>
+                  <a:srgbClr val="1C2E4A"/>
                 </a:solidFill>
                 <a:latin typeface="Helvetica Neue"/>
                 <a:ea typeface="Helvetica Neue"/>
@@ -3094,7 +3126,7 @@
           <p:cNvPr id="12" name="">
             <a:extLst xmlns:a="http://schemas.openxmlformats.org/drawingml/2006/main">
               <a:ext uri="{FF2B5EF4-FFF2-40B4-BE49-F238E27FC236}">
-                <a16:creationId xmlns:a16="http://schemas.microsoft.com/office/drawing/2014/main" id="{2FF3B9FF-62C9-4903-9C51-C8491B34BC69}"/>
+                <a16:creationId xmlns:a16="http://schemas.microsoft.com/office/drawing/2014/main" id="{DE2F6C50-028E-4B31-9224-646EB7EDBD47}"/>
               </a:ext>
             </a:extLst>
           </p:cNvPr>
@@ -3112,7 +3144,7 @@
             <a:avLst/>
           </a:prstGeom>
           <a:solidFill xmlns:a="http://schemas.openxmlformats.org/drawingml/2006/main">
-            <a:srgbClr val="D8E5F2"/>
+            <a:srgbClr val="BDC4D4"/>
           </a:solidFill>
           <a:ln xmlns:a="http://schemas.openxmlformats.org/drawingml/2006/main" w="0">
             <a:noFill/>
@@ -3124,7 +3156,7 @@
           <p:cNvPr id="13" name="">
             <a:extLst xmlns:a="http://schemas.openxmlformats.org/drawingml/2006/main">
               <a:ext uri="{FF2B5EF4-FFF2-40B4-BE49-F238E27FC236}">
-                <a16:creationId xmlns:a16="http://schemas.microsoft.com/office/drawing/2014/main" id="{B41D1B7F-8ADC-46C4-9508-F7BF8C71B466}"/>
+                <a16:creationId xmlns:a16="http://schemas.microsoft.com/office/drawing/2014/main" id="{6BDDEDA5-A812-477C-82F2-C68DD5F770ED}"/>
               </a:ext>
             </a:extLst>
           </p:cNvPr>
@@ -3155,7 +3187,7 @@
             <a:pPr algn="l">
               <a:defRPr sz="750" b="0">
                 <a:solidFill>
-                  <a:srgbClr val="61718A"/>
+                  <a:srgbClr val="52677D"/>
                 </a:solidFill>
                 <a:latin typeface="Helvetica Neue"/>
                 <a:ea typeface="Helvetica Neue"/>
@@ -3165,7 +3197,7 @@
             <a:r>
               <a:rPr sz="750" b="0">
                 <a:solidFill>
-                  <a:srgbClr val="61718A"/>
+                  <a:srgbClr val="52677D"/>
                 </a:solidFill>
                 <a:latin typeface="Helvetica Neue"/>
                 <a:ea typeface="Helvetica Neue"/>
@@ -3181,7 +3213,7 @@
           <p:cNvPr id="14" name="">
             <a:extLst xmlns:a="http://schemas.openxmlformats.org/drawingml/2006/main">
               <a:ext uri="{FF2B5EF4-FFF2-40B4-BE49-F238E27FC236}">
-                <a16:creationId xmlns:a16="http://schemas.microsoft.com/office/drawing/2014/main" id="{98A2816C-BDC5-4E6A-BC22-C24A7E20508C}"/>
+                <a16:creationId xmlns:a16="http://schemas.microsoft.com/office/drawing/2014/main" id="{F6BDC07C-C7C6-4DCC-8243-64BE8C7AF594}"/>
               </a:ext>
             </a:extLst>
           </p:cNvPr>
@@ -3212,7 +3244,7 @@
             <a:pPr algn="r">
               <a:defRPr sz="825" b="1">
                 <a:solidFill>
-                  <a:srgbClr val="2563EB"/>
+                  <a:srgbClr val="52677D"/>
                 </a:solidFill>
                 <a:latin typeface="Helvetica Neue"/>
                 <a:ea typeface="Helvetica Neue"/>
@@ -3222,7 +3254,7 @@
             <a:r>
               <a:rPr sz="825" b="1">
                 <a:solidFill>
-                  <a:srgbClr val="2563EB"/>
+                  <a:srgbClr val="52677D"/>
                 </a:solidFill>
                 <a:latin typeface="Helvetica Neue"/>
                 <a:ea typeface="Helvetica Neue"/>
@@ -3236,7 +3268,7 @@
     </p:spTree>
     <p:extLst>
       <p:ext uri="{BB962C8B-B14F-4D97-AF65-F5344CB8AC3E}">
-        <p14:creationId xmlns:p14="http://schemas.microsoft.com/office/powerpoint/2010/main" val="928007819"/>
+        <p14:creationId xmlns:p14="http://schemas.microsoft.com/office/powerpoint/2010/main" val="1702196018"/>
       </p:ext>
     </p:extLst>
   </p:cSld>
@@ -3249,7 +3281,7 @@
     <p:bg>
       <p:bgPr>
         <a:solidFill xmlns:a="http://schemas.openxmlformats.org/drawingml/2006/main">
-          <a:srgbClr val="EEF7FF"/>
+          <a:srgbClr val="D1CFC9"/>
         </a:solidFill>
       </p:bgPr>
     </p:bg>
@@ -3267,7 +3299,7 @@
           <p:cNvPr id="25" name="">
             <a:extLst xmlns:a="http://schemas.openxmlformats.org/drawingml/2006/main">
               <a:ext uri="{FF2B5EF4-FFF2-40B4-BE49-F238E27FC236}">
-                <a16:creationId xmlns:a16="http://schemas.microsoft.com/office/drawing/2014/main" id="{7D7F8EAE-0DB5-49E8-8A5D-48E6EA18DFA0}"/>
+                <a16:creationId xmlns:a16="http://schemas.microsoft.com/office/drawing/2014/main" id="{9B8014E8-6F6D-448E-8BF7-65C1A91977EE}"/>
               </a:ext>
             </a:extLst>
           </p:cNvPr>
@@ -3298,7 +3330,7 @@
             <a:pPr algn="l">
               <a:defRPr sz="1125" b="1">
                 <a:solidFill>
-                  <a:srgbClr val="2563EB"/>
+                  <a:srgbClr val="52677D"/>
                 </a:solidFill>
                 <a:latin typeface="Helvetica Neue"/>
                 <a:ea typeface="Helvetica Neue"/>
@@ -3308,7 +3340,7 @@
             <a:r>
               <a:rPr sz="1125" b="1">
                 <a:solidFill>
-                  <a:srgbClr val="2563EB"/>
+                  <a:srgbClr val="52677D"/>
                 </a:solidFill>
                 <a:latin typeface="Helvetica Neue"/>
                 <a:ea typeface="Helvetica Neue"/>
@@ -3324,7 +3356,7 @@
           <p:cNvPr id="2" name="">
             <a:extLst xmlns:a="http://schemas.openxmlformats.org/drawingml/2006/main">
               <a:ext uri="{FF2B5EF4-FFF2-40B4-BE49-F238E27FC236}">
-                <a16:creationId xmlns:a16="http://schemas.microsoft.com/office/drawing/2014/main" id="{A41ADF0F-B974-418E-A485-F7BC6CB51BFD}"/>
+                <a16:creationId xmlns:a16="http://schemas.microsoft.com/office/drawing/2014/main" id="{95FD55B0-3204-4CE0-8E9A-E2BB2920D554}"/>
               </a:ext>
             </a:extLst>
           </p:cNvPr>
@@ -3355,7 +3387,7 @@
             <a:pPr algn="l">
               <a:defRPr sz="2850" b="1">
                 <a:solidFill>
-                  <a:srgbClr val="092454"/>
+                  <a:srgbClr val="1C2E4A"/>
                 </a:solidFill>
                 <a:latin typeface="Helvetica Neue"/>
                 <a:ea typeface="Helvetica Neue"/>
@@ -3365,7 +3397,7 @@
             <a:r>
               <a:rPr sz="2850" b="1">
                 <a:solidFill>
-                  <a:srgbClr val="092454"/>
+                  <a:srgbClr val="1C2E4A"/>
                 </a:solidFill>
                 <a:latin typeface="Helvetica Neue"/>
                 <a:ea typeface="Helvetica Neue"/>
@@ -3381,7 +3413,7 @@
           <p:cNvPr id="3" name="">
             <a:extLst xmlns:a="http://schemas.openxmlformats.org/drawingml/2006/main">
               <a:ext uri="{FF2B5EF4-FFF2-40B4-BE49-F238E27FC236}">
-                <a16:creationId xmlns:a16="http://schemas.microsoft.com/office/drawing/2014/main" id="{DA723C4A-1529-49F8-AF0A-62E1E83008BC}"/>
+                <a16:creationId xmlns:a16="http://schemas.microsoft.com/office/drawing/2014/main" id="{08CB6009-3DDC-4389-90A1-247CD2F1C6AD}"/>
               </a:ext>
             </a:extLst>
           </p:cNvPr>
@@ -3412,7 +3444,7 @@
             <a:pPr algn="l">
               <a:defRPr sz="1425" b="0">
                 <a:solidFill>
-                  <a:srgbClr val="61718A"/>
+                  <a:srgbClr val="52677D"/>
                 </a:solidFill>
                 <a:latin typeface="Helvetica Neue"/>
                 <a:ea typeface="Helvetica Neue"/>
@@ -3422,7 +3454,7 @@
             <a:r>
               <a:rPr sz="1425" b="0">
                 <a:solidFill>
-                  <a:srgbClr val="61718A"/>
+                  <a:srgbClr val="52677D"/>
                 </a:solidFill>
                 <a:latin typeface="Helvetica Neue"/>
                 <a:ea typeface="Helvetica Neue"/>
@@ -3438,7 +3470,7 @@
           <p:cNvPr id="4" name="">
             <a:extLst xmlns:a="http://schemas.openxmlformats.org/drawingml/2006/main">
               <a:ext uri="{FF2B5EF4-FFF2-40B4-BE49-F238E27FC236}">
-                <a16:creationId xmlns:a16="http://schemas.microsoft.com/office/drawing/2014/main" id="{72406043-4392-4E20-88B8-51E919C8B2CF}"/>
+                <a16:creationId xmlns:a16="http://schemas.microsoft.com/office/drawing/2014/main" id="{2D6A29AC-A154-4816-9FEC-C048CEE978BD}"/>
               </a:ext>
             </a:extLst>
           </p:cNvPr>
@@ -3469,7 +3501,7 @@
             <a:pPr algn="l">
               <a:defRPr sz="1200" b="1">
                 <a:solidFill>
-                  <a:srgbClr val="2563EB"/>
+                  <a:srgbClr val="52677D"/>
                 </a:solidFill>
                 <a:latin typeface="Helvetica Neue"/>
                 <a:ea typeface="Helvetica Neue"/>
@@ -3479,7 +3511,7 @@
             <a:r>
               <a:rPr sz="1200" b="1">
                 <a:solidFill>
-                  <a:srgbClr val="2563EB"/>
+                  <a:srgbClr val="52677D"/>
                 </a:solidFill>
                 <a:latin typeface="Helvetica Neue"/>
                 <a:ea typeface="Helvetica Neue"/>
@@ -3495,7 +3527,7 @@
           <p:cNvPr id="5" name="">
             <a:extLst xmlns:a="http://schemas.openxmlformats.org/drawingml/2006/main">
               <a:ext uri="{FF2B5EF4-FFF2-40B4-BE49-F238E27FC236}">
-                <a16:creationId xmlns:a16="http://schemas.microsoft.com/office/drawing/2014/main" id="{D1162231-990A-4CAE-B32B-22026511B9B2}"/>
+                <a16:creationId xmlns:a16="http://schemas.microsoft.com/office/drawing/2014/main" id="{6E3A5862-F50C-46A2-8E4C-99AE76C1E181}"/>
               </a:ext>
             </a:extLst>
           </p:cNvPr>
@@ -3526,7 +3558,7 @@
             <a:pPr algn="l">
               <a:defRPr sz="1275" b="1">
                 <a:solidFill>
-                  <a:srgbClr val="092454"/>
+                  <a:srgbClr val="1C2E4A"/>
                 </a:solidFill>
                 <a:latin typeface="Helvetica Neue"/>
                 <a:ea typeface="Helvetica Neue"/>
@@ -3536,7 +3568,7 @@
             <a:r>
               <a:rPr sz="1275" b="1">
                 <a:solidFill>
-                  <a:srgbClr val="092454"/>
+                  <a:srgbClr val="1C2E4A"/>
                 </a:solidFill>
                 <a:latin typeface="Helvetica Neue"/>
                 <a:ea typeface="Helvetica Neue"/>
@@ -3552,7 +3584,7 @@
           <p:cNvPr id="6" name="">
             <a:extLst xmlns:a="http://schemas.openxmlformats.org/drawingml/2006/main">
               <a:ext uri="{FF2B5EF4-FFF2-40B4-BE49-F238E27FC236}">
-                <a16:creationId xmlns:a16="http://schemas.microsoft.com/office/drawing/2014/main" id="{BCBFAD88-B876-410C-A926-B411185E7B1E}"/>
+                <a16:creationId xmlns:a16="http://schemas.microsoft.com/office/drawing/2014/main" id="{2930918A-0BE3-46BF-88F9-60C7C5A5371A}"/>
               </a:ext>
             </a:extLst>
           </p:cNvPr>
@@ -3583,7 +3615,7 @@
             <a:pPr algn="l">
               <a:defRPr sz="900" b="0">
                 <a:solidFill>
-                  <a:srgbClr val="61718A"/>
+                  <a:srgbClr val="52677D"/>
                 </a:solidFill>
                 <a:latin typeface="Helvetica Neue"/>
                 <a:ea typeface="Helvetica Neue"/>
@@ -3593,7 +3625,7 @@
             <a:r>
               <a:rPr sz="900" b="0">
                 <a:solidFill>
-                  <a:srgbClr val="61718A"/>
+                  <a:srgbClr val="52677D"/>
                 </a:solidFill>
                 <a:latin typeface="Helvetica Neue"/>
                 <a:ea typeface="Helvetica Neue"/>
@@ -3609,7 +3641,7 @@
           <p:cNvPr id="7" name="">
             <a:extLst xmlns:a="http://schemas.openxmlformats.org/drawingml/2006/main">
               <a:ext uri="{FF2B5EF4-FFF2-40B4-BE49-F238E27FC236}">
-                <a16:creationId xmlns:a16="http://schemas.microsoft.com/office/drawing/2014/main" id="{03952088-A5DB-4F75-B5B6-83037212B927}"/>
+                <a16:creationId xmlns:a16="http://schemas.microsoft.com/office/drawing/2014/main" id="{693207DB-D7B1-44DF-B2ED-7D6AC256F4D8}"/>
               </a:ext>
             </a:extLst>
           </p:cNvPr>
@@ -3640,7 +3672,7 @@
             <a:pPr algn="l">
               <a:defRPr sz="1200" b="1">
                 <a:solidFill>
-                  <a:srgbClr val="2563EB"/>
+                  <a:srgbClr val="52677D"/>
                 </a:solidFill>
                 <a:latin typeface="Helvetica Neue"/>
                 <a:ea typeface="Helvetica Neue"/>
@@ -3650,7 +3682,7 @@
             <a:r>
               <a:rPr sz="1200" b="1">
                 <a:solidFill>
-                  <a:srgbClr val="2563EB"/>
+                  <a:srgbClr val="52677D"/>
                 </a:solidFill>
                 <a:latin typeface="Helvetica Neue"/>
                 <a:ea typeface="Helvetica Neue"/>
@@ -3666,7 +3698,7 @@
           <p:cNvPr id="8" name="">
             <a:extLst xmlns:a="http://schemas.openxmlformats.org/drawingml/2006/main">
               <a:ext uri="{FF2B5EF4-FFF2-40B4-BE49-F238E27FC236}">
-                <a16:creationId xmlns:a16="http://schemas.microsoft.com/office/drawing/2014/main" id="{2D2266A3-0AE4-4FA0-8457-D435D92C211D}"/>
+                <a16:creationId xmlns:a16="http://schemas.microsoft.com/office/drawing/2014/main" id="{29B54144-9581-40E3-B127-8B5F2DEA34BB}"/>
               </a:ext>
             </a:extLst>
           </p:cNvPr>
@@ -3697,7 +3729,7 @@
             <a:pPr algn="l">
               <a:defRPr sz="1275" b="1">
                 <a:solidFill>
-                  <a:srgbClr val="092454"/>
+                  <a:srgbClr val="1C2E4A"/>
                 </a:solidFill>
                 <a:latin typeface="Helvetica Neue"/>
                 <a:ea typeface="Helvetica Neue"/>
@@ -3707,7 +3739,7 @@
             <a:r>
               <a:rPr sz="1275" b="1">
                 <a:solidFill>
-                  <a:srgbClr val="092454"/>
+                  <a:srgbClr val="1C2E4A"/>
                 </a:solidFill>
                 <a:latin typeface="Helvetica Neue"/>
                 <a:ea typeface="Helvetica Neue"/>
@@ -3723,7 +3755,7 @@
           <p:cNvPr id="9" name="">
             <a:extLst xmlns:a="http://schemas.openxmlformats.org/drawingml/2006/main">
               <a:ext uri="{FF2B5EF4-FFF2-40B4-BE49-F238E27FC236}">
-                <a16:creationId xmlns:a16="http://schemas.microsoft.com/office/drawing/2014/main" id="{62C538B4-44B8-4316-9CA7-FB6C7717D312}"/>
+                <a16:creationId xmlns:a16="http://schemas.microsoft.com/office/drawing/2014/main" id="{00BA5B78-FF90-4F32-A897-AD191FA10ACC}"/>
               </a:ext>
             </a:extLst>
           </p:cNvPr>
@@ -3754,7 +3786,7 @@
             <a:pPr algn="l">
               <a:defRPr sz="900" b="0">
                 <a:solidFill>
-                  <a:srgbClr val="61718A"/>
+                  <a:srgbClr val="52677D"/>
                 </a:solidFill>
                 <a:latin typeface="Helvetica Neue"/>
                 <a:ea typeface="Helvetica Neue"/>
@@ -3764,7 +3796,7 @@
             <a:r>
               <a:rPr sz="900" b="0">
                 <a:solidFill>
-                  <a:srgbClr val="61718A"/>
+                  <a:srgbClr val="52677D"/>
                 </a:solidFill>
                 <a:latin typeface="Helvetica Neue"/>
                 <a:ea typeface="Helvetica Neue"/>
@@ -3780,7 +3812,7 @@
           <p:cNvPr id="10" name="">
             <a:extLst xmlns:a="http://schemas.openxmlformats.org/drawingml/2006/main">
               <a:ext uri="{FF2B5EF4-FFF2-40B4-BE49-F238E27FC236}">
-                <a16:creationId xmlns:a16="http://schemas.microsoft.com/office/drawing/2014/main" id="{A49FDDB2-909B-490D-A130-9719BFC704BF}"/>
+                <a16:creationId xmlns:a16="http://schemas.microsoft.com/office/drawing/2014/main" id="{D4C64CEE-FDB6-4D15-98EE-60AFC4B43D5B}"/>
               </a:ext>
             </a:extLst>
           </p:cNvPr>
@@ -3811,7 +3843,7 @@
             <a:pPr algn="l">
               <a:defRPr sz="1200" b="1">
                 <a:solidFill>
-                  <a:srgbClr val="2563EB"/>
+                  <a:srgbClr val="52677D"/>
                 </a:solidFill>
                 <a:latin typeface="Helvetica Neue"/>
                 <a:ea typeface="Helvetica Neue"/>
@@ -3821,7 +3853,7 @@
             <a:r>
               <a:rPr sz="1200" b="1">
                 <a:solidFill>
-                  <a:srgbClr val="2563EB"/>
+                  <a:srgbClr val="52677D"/>
                 </a:solidFill>
                 <a:latin typeface="Helvetica Neue"/>
                 <a:ea typeface="Helvetica Neue"/>
@@ -3837,7 +3869,7 @@
           <p:cNvPr id="11" name="">
             <a:extLst xmlns:a="http://schemas.openxmlformats.org/drawingml/2006/main">
               <a:ext uri="{FF2B5EF4-FFF2-40B4-BE49-F238E27FC236}">
-                <a16:creationId xmlns:a16="http://schemas.microsoft.com/office/drawing/2014/main" id="{14ADCA00-3829-47C6-A691-196CFE5210A8}"/>
+                <a16:creationId xmlns:a16="http://schemas.microsoft.com/office/drawing/2014/main" id="{84B9066E-169A-46EC-8FDE-17780199FCEC}"/>
               </a:ext>
             </a:extLst>
           </p:cNvPr>
@@ -3868,7 +3900,7 @@
             <a:pPr algn="l">
               <a:defRPr sz="1275" b="1">
                 <a:solidFill>
-                  <a:srgbClr val="092454"/>
+                  <a:srgbClr val="1C2E4A"/>
                 </a:solidFill>
                 <a:latin typeface="Helvetica Neue"/>
                 <a:ea typeface="Helvetica Neue"/>
@@ -3878,7 +3910,7 @@
             <a:r>
               <a:rPr sz="1275" b="1">
                 <a:solidFill>
-                  <a:srgbClr val="092454"/>
+                  <a:srgbClr val="1C2E4A"/>
                 </a:solidFill>
                 <a:latin typeface="Helvetica Neue"/>
                 <a:ea typeface="Helvetica Neue"/>
@@ -3894,7 +3926,7 @@
           <p:cNvPr id="12" name="">
             <a:extLst xmlns:a="http://schemas.openxmlformats.org/drawingml/2006/main">
               <a:ext uri="{FF2B5EF4-FFF2-40B4-BE49-F238E27FC236}">
-                <a16:creationId xmlns:a16="http://schemas.microsoft.com/office/drawing/2014/main" id="{AB04BB36-19FC-40C3-A52E-F6F4AB768F1B}"/>
+                <a16:creationId xmlns:a16="http://schemas.microsoft.com/office/drawing/2014/main" id="{18554B6D-AC35-4415-A7FF-9691880D7714}"/>
               </a:ext>
             </a:extLst>
           </p:cNvPr>
@@ -3925,7 +3957,7 @@
             <a:pPr algn="l">
               <a:defRPr sz="900" b="0">
                 <a:solidFill>
-                  <a:srgbClr val="61718A"/>
+                  <a:srgbClr val="52677D"/>
                 </a:solidFill>
                 <a:latin typeface="Helvetica Neue"/>
                 <a:ea typeface="Helvetica Neue"/>
@@ -3935,7 +3967,7 @@
             <a:r>
               <a:rPr sz="900" b="0">
                 <a:solidFill>
-                  <a:srgbClr val="61718A"/>
+                  <a:srgbClr val="52677D"/>
                 </a:solidFill>
                 <a:latin typeface="Helvetica Neue"/>
                 <a:ea typeface="Helvetica Neue"/>
@@ -3951,7 +3983,7 @@
           <p:cNvPr id="13" name="">
             <a:extLst xmlns:a="http://schemas.openxmlformats.org/drawingml/2006/main">
               <a:ext uri="{FF2B5EF4-FFF2-40B4-BE49-F238E27FC236}">
-                <a16:creationId xmlns:a16="http://schemas.microsoft.com/office/drawing/2014/main" id="{3E849FB0-627A-4789-81EB-D8B7E1D888D1}"/>
+                <a16:creationId xmlns:a16="http://schemas.microsoft.com/office/drawing/2014/main" id="{BADF85DC-7AC1-467C-9CAB-7D5C9C757963}"/>
               </a:ext>
             </a:extLst>
           </p:cNvPr>
@@ -3982,7 +4014,7 @@
             <a:pPr algn="l">
               <a:defRPr sz="1200" b="1">
                 <a:solidFill>
-                  <a:srgbClr val="2563EB"/>
+                  <a:srgbClr val="52677D"/>
                 </a:solidFill>
                 <a:latin typeface="Helvetica Neue"/>
                 <a:ea typeface="Helvetica Neue"/>
@@ -3992,7 +4024,7 @@
             <a:r>
               <a:rPr sz="1200" b="1">
                 <a:solidFill>
-                  <a:srgbClr val="2563EB"/>
+                  <a:srgbClr val="52677D"/>
                 </a:solidFill>
                 <a:latin typeface="Helvetica Neue"/>
                 <a:ea typeface="Helvetica Neue"/>
@@ -4008,7 +4040,7 @@
           <p:cNvPr id="14" name="">
             <a:extLst xmlns:a="http://schemas.openxmlformats.org/drawingml/2006/main">
               <a:ext uri="{FF2B5EF4-FFF2-40B4-BE49-F238E27FC236}">
-                <a16:creationId xmlns:a16="http://schemas.microsoft.com/office/drawing/2014/main" id="{B456995D-BBCF-4EF9-A801-03D7FE4015DB}"/>
+                <a16:creationId xmlns:a16="http://schemas.microsoft.com/office/drawing/2014/main" id="{143EEFF1-80B1-4CF8-8401-E96FAC385655}"/>
               </a:ext>
             </a:extLst>
           </p:cNvPr>
@@ -4039,7 +4071,7 @@
             <a:pPr algn="l">
               <a:defRPr sz="1275" b="1">
                 <a:solidFill>
-                  <a:srgbClr val="092454"/>
+                  <a:srgbClr val="1C2E4A"/>
                 </a:solidFill>
                 <a:latin typeface="Helvetica Neue"/>
                 <a:ea typeface="Helvetica Neue"/>
@@ -4049,7 +4081,7 @@
             <a:r>
               <a:rPr sz="1275" b="1">
                 <a:solidFill>
-                  <a:srgbClr val="092454"/>
+                  <a:srgbClr val="1C2E4A"/>
                 </a:solidFill>
                 <a:latin typeface="Helvetica Neue"/>
                 <a:ea typeface="Helvetica Neue"/>
@@ -4065,7 +4097,7 @@
           <p:cNvPr id="15" name="">
             <a:extLst xmlns:a="http://schemas.openxmlformats.org/drawingml/2006/main">
               <a:ext uri="{FF2B5EF4-FFF2-40B4-BE49-F238E27FC236}">
-                <a16:creationId xmlns:a16="http://schemas.microsoft.com/office/drawing/2014/main" id="{B55497E6-A704-4699-86DD-ABCCBBFA05AB}"/>
+                <a16:creationId xmlns:a16="http://schemas.microsoft.com/office/drawing/2014/main" id="{4F42604B-A619-42A5-91AC-030726BE4266}"/>
               </a:ext>
             </a:extLst>
           </p:cNvPr>
@@ -4096,7 +4128,7 @@
             <a:pPr algn="l">
               <a:defRPr sz="900" b="0">
                 <a:solidFill>
-                  <a:srgbClr val="61718A"/>
+                  <a:srgbClr val="52677D"/>
                 </a:solidFill>
                 <a:latin typeface="Helvetica Neue"/>
                 <a:ea typeface="Helvetica Neue"/>
@@ -4106,7 +4138,7 @@
             <a:r>
               <a:rPr sz="900" b="0">
                 <a:solidFill>
-                  <a:srgbClr val="61718A"/>
+                  <a:srgbClr val="52677D"/>
                 </a:solidFill>
                 <a:latin typeface="Helvetica Neue"/>
                 <a:ea typeface="Helvetica Neue"/>
@@ -4122,7 +4154,7 @@
           <p:cNvPr id="16" name="">
             <a:extLst xmlns:a="http://schemas.openxmlformats.org/drawingml/2006/main">
               <a:ext uri="{FF2B5EF4-FFF2-40B4-BE49-F238E27FC236}">
-                <a16:creationId xmlns:a16="http://schemas.microsoft.com/office/drawing/2014/main" id="{5E93EDE6-A821-492F-8729-D1EA3839EA63}"/>
+                <a16:creationId xmlns:a16="http://schemas.microsoft.com/office/drawing/2014/main" id="{C2687E3F-4B12-4924-9C59-33C2F73DC5EF}"/>
               </a:ext>
             </a:extLst>
           </p:cNvPr>
@@ -4153,7 +4185,7 @@
             <a:pPr algn="l">
               <a:defRPr sz="1200" b="1">
                 <a:solidFill>
-                  <a:srgbClr val="2563EB"/>
+                  <a:srgbClr val="52677D"/>
                 </a:solidFill>
                 <a:latin typeface="Helvetica Neue"/>
                 <a:ea typeface="Helvetica Neue"/>
@@ -4163,7 +4195,7 @@
             <a:r>
               <a:rPr sz="1200" b="1">
                 <a:solidFill>
-                  <a:srgbClr val="2563EB"/>
+                  <a:srgbClr val="52677D"/>
                 </a:solidFill>
                 <a:latin typeface="Helvetica Neue"/>
                 <a:ea typeface="Helvetica Neue"/>
@@ -4179,7 +4211,7 @@
           <p:cNvPr id="17" name="">
             <a:extLst xmlns:a="http://schemas.openxmlformats.org/drawingml/2006/main">
               <a:ext uri="{FF2B5EF4-FFF2-40B4-BE49-F238E27FC236}">
-                <a16:creationId xmlns:a16="http://schemas.microsoft.com/office/drawing/2014/main" id="{51E76ACB-673F-412F-838E-13FF2039236B}"/>
+                <a16:creationId xmlns:a16="http://schemas.microsoft.com/office/drawing/2014/main" id="{B9571268-4419-4607-A255-5964DC9C0F4F}"/>
               </a:ext>
             </a:extLst>
           </p:cNvPr>
@@ -4210,7 +4242,7 @@
             <a:pPr algn="l">
               <a:defRPr sz="1275" b="1">
                 <a:solidFill>
-                  <a:srgbClr val="092454"/>
+                  <a:srgbClr val="1C2E4A"/>
                 </a:solidFill>
                 <a:latin typeface="Helvetica Neue"/>
                 <a:ea typeface="Helvetica Neue"/>
@@ -4220,7 +4252,7 @@
             <a:r>
               <a:rPr sz="1275" b="1">
                 <a:solidFill>
-                  <a:srgbClr val="092454"/>
+                  <a:srgbClr val="1C2E4A"/>
                 </a:solidFill>
                 <a:latin typeface="Helvetica Neue"/>
                 <a:ea typeface="Helvetica Neue"/>
@@ -4236,7 +4268,7 @@
           <p:cNvPr id="18" name="">
             <a:extLst xmlns:a="http://schemas.openxmlformats.org/drawingml/2006/main">
               <a:ext uri="{FF2B5EF4-FFF2-40B4-BE49-F238E27FC236}">
-                <a16:creationId xmlns:a16="http://schemas.microsoft.com/office/drawing/2014/main" id="{69108D59-158C-43B8-970C-AC5D3D24973E}"/>
+                <a16:creationId xmlns:a16="http://schemas.microsoft.com/office/drawing/2014/main" id="{259F93D7-074F-41BD-8605-568E41DB6DD7}"/>
               </a:ext>
             </a:extLst>
           </p:cNvPr>
@@ -4267,7 +4299,7 @@
             <a:pPr algn="l">
               <a:defRPr sz="900" b="0">
                 <a:solidFill>
-                  <a:srgbClr val="61718A"/>
+                  <a:srgbClr val="52677D"/>
                 </a:solidFill>
                 <a:latin typeface="Helvetica Neue"/>
                 <a:ea typeface="Helvetica Neue"/>
@@ -4277,7 +4309,7 @@
             <a:r>
               <a:rPr sz="900" b="0">
                 <a:solidFill>
-                  <a:srgbClr val="61718A"/>
+                  <a:srgbClr val="52677D"/>
                 </a:solidFill>
                 <a:latin typeface="Helvetica Neue"/>
                 <a:ea typeface="Helvetica Neue"/>
@@ -4293,7 +4325,7 @@
           <p:cNvPr id="19" name="">
             <a:extLst xmlns:a="http://schemas.openxmlformats.org/drawingml/2006/main">
               <a:ext uri="{FF2B5EF4-FFF2-40B4-BE49-F238E27FC236}">
-                <a16:creationId xmlns:a16="http://schemas.microsoft.com/office/drawing/2014/main" id="{92F1BC81-81C1-4CC1-9C7A-668B13D3965D}"/>
+                <a16:creationId xmlns:a16="http://schemas.microsoft.com/office/drawing/2014/main" id="{DD58BCCD-B234-4AAD-B0E1-E79F7A29DDAD}"/>
               </a:ext>
             </a:extLst>
           </p:cNvPr>
@@ -4324,7 +4356,7 @@
             <a:pPr algn="l">
               <a:defRPr sz="1200" b="1">
                 <a:solidFill>
-                  <a:srgbClr val="2563EB"/>
+                  <a:srgbClr val="52677D"/>
                 </a:solidFill>
                 <a:latin typeface="Helvetica Neue"/>
                 <a:ea typeface="Helvetica Neue"/>
@@ -4334,7 +4366,7 @@
             <a:r>
               <a:rPr sz="1200" b="1">
                 <a:solidFill>
-                  <a:srgbClr val="2563EB"/>
+                  <a:srgbClr val="52677D"/>
                 </a:solidFill>
                 <a:latin typeface="Helvetica Neue"/>
                 <a:ea typeface="Helvetica Neue"/>
@@ -4350,7 +4382,7 @@
           <p:cNvPr id="20" name="">
             <a:extLst xmlns:a="http://schemas.openxmlformats.org/drawingml/2006/main">
               <a:ext uri="{FF2B5EF4-FFF2-40B4-BE49-F238E27FC236}">
-                <a16:creationId xmlns:a16="http://schemas.microsoft.com/office/drawing/2014/main" id="{0D30526E-1AA0-4445-B895-F1EF482B5CC3}"/>
+                <a16:creationId xmlns:a16="http://schemas.microsoft.com/office/drawing/2014/main" id="{2404F45A-5C33-46B5-9E7C-BB20545FDD19}"/>
               </a:ext>
             </a:extLst>
           </p:cNvPr>
@@ -4381,7 +4413,7 @@
             <a:pPr algn="l">
               <a:defRPr sz="1275" b="1">
                 <a:solidFill>
-                  <a:srgbClr val="092454"/>
+                  <a:srgbClr val="1C2E4A"/>
                 </a:solidFill>
                 <a:latin typeface="Helvetica Neue"/>
                 <a:ea typeface="Helvetica Neue"/>
@@ -4391,7 +4423,7 @@
             <a:r>
               <a:rPr sz="1275" b="1">
                 <a:solidFill>
-                  <a:srgbClr val="092454"/>
+                  <a:srgbClr val="1C2E4A"/>
                 </a:solidFill>
                 <a:latin typeface="Helvetica Neue"/>
                 <a:ea typeface="Helvetica Neue"/>
@@ -4407,7 +4439,7 @@
           <p:cNvPr id="21" name="">
             <a:extLst xmlns:a="http://schemas.openxmlformats.org/drawingml/2006/main">
               <a:ext uri="{FF2B5EF4-FFF2-40B4-BE49-F238E27FC236}">
-                <a16:creationId xmlns:a16="http://schemas.microsoft.com/office/drawing/2014/main" id="{3B5B1A6E-877B-4843-BEB7-9CFE50568021}"/>
+                <a16:creationId xmlns:a16="http://schemas.microsoft.com/office/drawing/2014/main" id="{42BB5105-89D5-40DA-853C-D1CB52EB33E6}"/>
               </a:ext>
             </a:extLst>
           </p:cNvPr>
@@ -4438,7 +4470,7 @@
             <a:pPr algn="l">
               <a:defRPr sz="900" b="0">
                 <a:solidFill>
-                  <a:srgbClr val="61718A"/>
+                  <a:srgbClr val="52677D"/>
                 </a:solidFill>
                 <a:latin typeface="Helvetica Neue"/>
                 <a:ea typeface="Helvetica Neue"/>
@@ -4448,7 +4480,7 @@
             <a:r>
               <a:rPr sz="900" b="0">
                 <a:solidFill>
-                  <a:srgbClr val="61718A"/>
+                  <a:srgbClr val="52677D"/>
                 </a:solidFill>
                 <a:latin typeface="Helvetica Neue"/>
                 <a:ea typeface="Helvetica Neue"/>
@@ -4464,7 +4496,7 @@
           <p:cNvPr id="22" name="">
             <a:extLst xmlns:a="http://schemas.openxmlformats.org/drawingml/2006/main">
               <a:ext uri="{FF2B5EF4-FFF2-40B4-BE49-F238E27FC236}">
-                <a16:creationId xmlns:a16="http://schemas.microsoft.com/office/drawing/2014/main" id="{1D33C3A6-A4FE-4AEB-B555-4FD7C57C5B34}"/>
+                <a16:creationId xmlns:a16="http://schemas.microsoft.com/office/drawing/2014/main" id="{C5E466CD-A11E-4A2E-A3AC-43510B31FD11}"/>
               </a:ext>
             </a:extLst>
           </p:cNvPr>
@@ -4482,7 +4514,7 @@
             <a:avLst/>
           </a:prstGeom>
           <a:solidFill xmlns:a="http://schemas.openxmlformats.org/drawingml/2006/main">
-            <a:srgbClr val="D8E5F2"/>
+            <a:srgbClr val="BDC4D4"/>
           </a:solidFill>
           <a:ln xmlns:a="http://schemas.openxmlformats.org/drawingml/2006/main" w="0">
             <a:noFill/>
@@ -4494,7 +4526,7 @@
           <p:cNvPr id="23" name="">
             <a:extLst xmlns:a="http://schemas.openxmlformats.org/drawingml/2006/main">
               <a:ext uri="{FF2B5EF4-FFF2-40B4-BE49-F238E27FC236}">
-                <a16:creationId xmlns:a16="http://schemas.microsoft.com/office/drawing/2014/main" id="{6BDDCDA3-141F-4038-877B-F9659C7E7D00}"/>
+                <a16:creationId xmlns:a16="http://schemas.microsoft.com/office/drawing/2014/main" id="{528903A5-7CDE-4C8A-B713-F2FE062562AD}"/>
               </a:ext>
             </a:extLst>
           </p:cNvPr>
@@ -4525,7 +4557,7 @@
             <a:pPr algn="l">
               <a:defRPr sz="750" b="0">
                 <a:solidFill>
-                  <a:srgbClr val="61718A"/>
+                  <a:srgbClr val="52677D"/>
                 </a:solidFill>
                 <a:latin typeface="Helvetica Neue"/>
                 <a:ea typeface="Helvetica Neue"/>
@@ -4535,7 +4567,7 @@
             <a:r>
               <a:rPr sz="750" b="0">
                 <a:solidFill>
-                  <a:srgbClr val="61718A"/>
+                  <a:srgbClr val="52677D"/>
                 </a:solidFill>
                 <a:latin typeface="Helvetica Neue"/>
                 <a:ea typeface="Helvetica Neue"/>
@@ -4551,7 +4583,7 @@
           <p:cNvPr id="24" name="">
             <a:extLst xmlns:a="http://schemas.openxmlformats.org/drawingml/2006/main">
               <a:ext uri="{FF2B5EF4-FFF2-40B4-BE49-F238E27FC236}">
-                <a16:creationId xmlns:a16="http://schemas.microsoft.com/office/drawing/2014/main" id="{9B25DB01-F9C0-4F9A-AE61-83253895EDAE}"/>
+                <a16:creationId xmlns:a16="http://schemas.microsoft.com/office/drawing/2014/main" id="{9EE72FBA-077D-40E5-8AB2-708A04574096}"/>
               </a:ext>
             </a:extLst>
           </p:cNvPr>
@@ -4582,7 +4614,7 @@
             <a:pPr algn="r">
               <a:defRPr sz="825" b="1">
                 <a:solidFill>
-                  <a:srgbClr val="2563EB"/>
+                  <a:srgbClr val="52677D"/>
                 </a:solidFill>
                 <a:latin typeface="Helvetica Neue"/>
                 <a:ea typeface="Helvetica Neue"/>
@@ -4592,7 +4624,7 @@
             <a:r>
               <a:rPr sz="825" b="1">
                 <a:solidFill>
-                  <a:srgbClr val="2563EB"/>
+                  <a:srgbClr val="52677D"/>
                 </a:solidFill>
                 <a:latin typeface="Helvetica Neue"/>
                 <a:ea typeface="Helvetica Neue"/>
@@ -4606,7 +4638,7 @@
     </p:spTree>
     <p:extLst>
       <p:ext uri="{BB962C8B-B14F-4D97-AF65-F5344CB8AC3E}">
-        <p14:creationId xmlns:p14="http://schemas.microsoft.com/office/powerpoint/2010/main" val="483721037"/>
+        <p14:creationId xmlns:p14="http://schemas.microsoft.com/office/powerpoint/2010/main" val="100470041"/>
       </p:ext>
     </p:extLst>
   </p:cSld>
@@ -4619,7 +4651,7 @@
     <p:bg>
       <p:bgPr>
         <a:solidFill xmlns:a="http://schemas.openxmlformats.org/drawingml/2006/main">
-          <a:srgbClr val="061A3A"/>
+          <a:srgbClr val="0F1A2B"/>
         </a:solidFill>
       </p:bgPr>
     </p:bg>
@@ -4637,7 +4669,7 @@
           <p:cNvPr id="10" name="">
             <a:extLst xmlns:a="http://schemas.openxmlformats.org/drawingml/2006/main">
               <a:ext uri="{FF2B5EF4-FFF2-40B4-BE49-F238E27FC236}">
-                <a16:creationId xmlns:a16="http://schemas.microsoft.com/office/drawing/2014/main" id="{B3F3C190-027F-497F-AFA0-961ADEE26373}"/>
+                <a16:creationId xmlns:a16="http://schemas.microsoft.com/office/drawing/2014/main" id="{6FAE461E-CDE1-4850-BCD2-467BAA43BD65}"/>
               </a:ext>
             </a:extLst>
           </p:cNvPr>
@@ -4668,7 +4700,7 @@
             <a:pPr algn="l">
               <a:defRPr sz="1125" b="1">
                 <a:solidFill>
-                  <a:srgbClr val="FFD43B"/>
+                  <a:srgbClr val="D1CFC9"/>
                 </a:solidFill>
                 <a:latin typeface="Helvetica Neue"/>
                 <a:ea typeface="Helvetica Neue"/>
@@ -4678,7 +4710,7 @@
             <a:r>
               <a:rPr sz="1125" b="1">
                 <a:solidFill>
-                  <a:srgbClr val="FFD43B"/>
+                  <a:srgbClr val="D1CFC9"/>
                 </a:solidFill>
                 <a:latin typeface="Helvetica Neue"/>
                 <a:ea typeface="Helvetica Neue"/>
@@ -4694,7 +4726,7 @@
           <p:cNvPr id="2" name="">
             <a:extLst xmlns:a="http://schemas.openxmlformats.org/drawingml/2006/main">
               <a:ext uri="{FF2B5EF4-FFF2-40B4-BE49-F238E27FC236}">
-                <a16:creationId xmlns:a16="http://schemas.microsoft.com/office/drawing/2014/main" id="{1E754229-38BE-4D45-9ECF-D518DCD8F1C8}"/>
+                <a16:creationId xmlns:a16="http://schemas.microsoft.com/office/drawing/2014/main" id="{AD5132EB-866C-45BA-9920-69275C7B5113}"/>
               </a:ext>
             </a:extLst>
           </p:cNvPr>
@@ -4751,7 +4783,7 @@
           <p:cNvPr id="3" name="">
             <a:extLst xmlns:a="http://schemas.openxmlformats.org/drawingml/2006/main">
               <a:ext uri="{FF2B5EF4-FFF2-40B4-BE49-F238E27FC236}">
-                <a16:creationId xmlns:a16="http://schemas.microsoft.com/office/drawing/2014/main" id="{6834D23B-918C-4CFA-A0D9-D1F505BA69C6}"/>
+                <a16:creationId xmlns:a16="http://schemas.microsoft.com/office/drawing/2014/main" id="{AC97B5E1-7609-4DD3-9EFB-988EB2EE7A79}"/>
               </a:ext>
             </a:extLst>
           </p:cNvPr>
@@ -4782,7 +4814,7 @@
             <a:pPr algn="l">
               <a:defRPr sz="8700" b="1">
                 <a:solidFill>
-                  <a:srgbClr val="FFD43B"/>
+                  <a:srgbClr val="D1CFC9"/>
                 </a:solidFill>
                 <a:latin typeface="Helvetica Neue"/>
                 <a:ea typeface="Helvetica Neue"/>
@@ -4792,7 +4824,7 @@
             <a:r>
               <a:rPr sz="8700" b="1">
                 <a:solidFill>
-                  <a:srgbClr val="FFD43B"/>
+                  <a:srgbClr val="D1CFC9"/>
                 </a:solidFill>
                 <a:latin typeface="Helvetica Neue"/>
                 <a:ea typeface="Helvetica Neue"/>
@@ -4808,7 +4840,7 @@
           <p:cNvPr id="4" name="">
             <a:extLst xmlns:a="http://schemas.openxmlformats.org/drawingml/2006/main">
               <a:ext uri="{FF2B5EF4-FFF2-40B4-BE49-F238E27FC236}">
-                <a16:creationId xmlns:a16="http://schemas.microsoft.com/office/drawing/2014/main" id="{AF1FB1EF-2F53-4C13-BC01-365E2EFCB7DD}"/>
+                <a16:creationId xmlns:a16="http://schemas.microsoft.com/office/drawing/2014/main" id="{5DA4AB4B-622C-4451-96B2-117BFAB94F53}"/>
               </a:ext>
             </a:extLst>
           </p:cNvPr>
@@ -4865,7 +4897,7 @@
           <p:cNvPr id="5" name="">
             <a:extLst xmlns:a="http://schemas.openxmlformats.org/drawingml/2006/main">
               <a:ext uri="{FF2B5EF4-FFF2-40B4-BE49-F238E27FC236}">
-                <a16:creationId xmlns:a16="http://schemas.microsoft.com/office/drawing/2014/main" id="{41010524-CC60-41B8-B30D-FF29B24889B7}"/>
+                <a16:creationId xmlns:a16="http://schemas.microsoft.com/office/drawing/2014/main" id="{544FAC5D-7856-4CA3-9678-0C71E8CA8482}"/>
               </a:ext>
             </a:extLst>
           </p:cNvPr>
@@ -4883,7 +4915,7 @@
             <a:avLst/>
           </a:prstGeom>
           <a:solidFill xmlns:a="http://schemas.openxmlformats.org/drawingml/2006/main">
-            <a:srgbClr val="31507E"/>
+            <a:srgbClr val="52677D"/>
           </a:solidFill>
           <a:ln xmlns:a="http://schemas.openxmlformats.org/drawingml/2006/main" w="0">
             <a:noFill/>
@@ -4895,7 +4927,7 @@
           <p:cNvPr id="6" name="">
             <a:extLst xmlns:a="http://schemas.openxmlformats.org/drawingml/2006/main">
               <a:ext uri="{FF2B5EF4-FFF2-40B4-BE49-F238E27FC236}">
-                <a16:creationId xmlns:a16="http://schemas.microsoft.com/office/drawing/2014/main" id="{012D0BFA-0C7D-463D-87E5-F301E9CCD12A}"/>
+                <a16:creationId xmlns:a16="http://schemas.microsoft.com/office/drawing/2014/main" id="{01E8DCFD-A2DB-4346-9B38-B8B8E1EC0A23}"/>
               </a:ext>
             </a:extLst>
           </p:cNvPr>
@@ -4926,7 +4958,7 @@
             <a:pPr algn="l">
               <a:defRPr sz="1800" b="0">
                 <a:solidFill>
-                  <a:srgbClr val="BFE6FF"/>
+                  <a:srgbClr val="BDC4D4"/>
                 </a:solidFill>
                 <a:latin typeface="Helvetica Neue"/>
                 <a:ea typeface="Helvetica Neue"/>
@@ -4936,7 +4968,7 @@
             <a:r>
               <a:rPr sz="1800" b="0">
                 <a:solidFill>
-                  <a:srgbClr val="BFE6FF"/>
+                  <a:srgbClr val="BDC4D4"/>
                 </a:solidFill>
                 <a:latin typeface="Helvetica Neue"/>
                 <a:ea typeface="Helvetica Neue"/>
@@ -4952,7 +4984,7 @@
           <p:cNvPr id="7" name="">
             <a:extLst xmlns:a="http://schemas.openxmlformats.org/drawingml/2006/main">
               <a:ext uri="{FF2B5EF4-FFF2-40B4-BE49-F238E27FC236}">
-                <a16:creationId xmlns:a16="http://schemas.microsoft.com/office/drawing/2014/main" id="{9E038F1F-A579-4278-A82F-49DA6796DE86}"/>
+                <a16:creationId xmlns:a16="http://schemas.microsoft.com/office/drawing/2014/main" id="{C14035A5-2BA2-4F1D-A64C-C15A71F9BB08}"/>
               </a:ext>
             </a:extLst>
           </p:cNvPr>
@@ -4970,7 +5002,7 @@
             <a:avLst/>
           </a:prstGeom>
           <a:solidFill xmlns:a="http://schemas.openxmlformats.org/drawingml/2006/main">
-            <a:srgbClr val="31507E"/>
+            <a:srgbClr val="52677D"/>
           </a:solidFill>
           <a:ln xmlns:a="http://schemas.openxmlformats.org/drawingml/2006/main" w="0">
             <a:noFill/>
@@ -4982,7 +5014,7 @@
           <p:cNvPr id="8" name="">
             <a:extLst xmlns:a="http://schemas.openxmlformats.org/drawingml/2006/main">
               <a:ext uri="{FF2B5EF4-FFF2-40B4-BE49-F238E27FC236}">
-                <a16:creationId xmlns:a16="http://schemas.microsoft.com/office/drawing/2014/main" id="{596B22D7-C807-44D8-909D-83A37C1D6500}"/>
+                <a16:creationId xmlns:a16="http://schemas.microsoft.com/office/drawing/2014/main" id="{5A4BC4BC-B7A7-49EA-8573-2F1CB299B08B}"/>
               </a:ext>
             </a:extLst>
           </p:cNvPr>
@@ -5013,7 +5045,7 @@
             <a:pPr algn="l">
               <a:defRPr sz="750" b="0">
                 <a:solidFill>
-                  <a:srgbClr val="BFE6FF"/>
+                  <a:srgbClr val="BDC4D4"/>
                 </a:solidFill>
                 <a:latin typeface="Helvetica Neue"/>
                 <a:ea typeface="Helvetica Neue"/>
@@ -5023,7 +5055,7 @@
             <a:r>
               <a:rPr sz="750" b="0">
                 <a:solidFill>
-                  <a:srgbClr val="BFE6FF"/>
+                  <a:srgbClr val="BDC4D4"/>
                 </a:solidFill>
                 <a:latin typeface="Helvetica Neue"/>
                 <a:ea typeface="Helvetica Neue"/>
@@ -5039,7 +5071,7 @@
           <p:cNvPr id="9" name="">
             <a:extLst xmlns:a="http://schemas.openxmlformats.org/drawingml/2006/main">
               <a:ext uri="{FF2B5EF4-FFF2-40B4-BE49-F238E27FC236}">
-                <a16:creationId xmlns:a16="http://schemas.microsoft.com/office/drawing/2014/main" id="{26447AED-31A3-4664-9F5C-DBDF5C12E3F5}"/>
+                <a16:creationId xmlns:a16="http://schemas.microsoft.com/office/drawing/2014/main" id="{9632190A-F7B6-4FAA-A3BA-0807484FD5E1}"/>
               </a:ext>
             </a:extLst>
           </p:cNvPr>
@@ -5070,7 +5102,7 @@
             <a:pPr algn="r">
               <a:defRPr sz="825" b="1">
                 <a:solidFill>
-                  <a:srgbClr val="FFD43B"/>
+                  <a:srgbClr val="D1CFC9"/>
                 </a:solidFill>
                 <a:latin typeface="Helvetica Neue"/>
                 <a:ea typeface="Helvetica Neue"/>
@@ -5080,7 +5112,7 @@
             <a:r>
               <a:rPr sz="825" b="1">
                 <a:solidFill>
-                  <a:srgbClr val="FFD43B"/>
+                  <a:srgbClr val="D1CFC9"/>
                 </a:solidFill>
                 <a:latin typeface="Helvetica Neue"/>
                 <a:ea typeface="Helvetica Neue"/>
@@ -5094,7 +5126,7 @@
     </p:spTree>
     <p:extLst>
       <p:ext uri="{BB962C8B-B14F-4D97-AF65-F5344CB8AC3E}">
-        <p14:creationId xmlns:p14="http://schemas.microsoft.com/office/powerpoint/2010/main" val="1969934405"/>
+        <p14:creationId xmlns:p14="http://schemas.microsoft.com/office/powerpoint/2010/main" val="280391187"/>
       </p:ext>
     </p:extLst>
   </p:cSld>
@@ -5125,7 +5157,7 @@
           <p:cNvPr id="24" name="">
             <a:extLst xmlns:a="http://schemas.openxmlformats.org/drawingml/2006/main">
               <a:ext uri="{FF2B5EF4-FFF2-40B4-BE49-F238E27FC236}">
-                <a16:creationId xmlns:a16="http://schemas.microsoft.com/office/drawing/2014/main" id="{64CE53F9-25AA-4284-84C7-365A127E02EC}"/>
+                <a16:creationId xmlns:a16="http://schemas.microsoft.com/office/drawing/2014/main" id="{C9EE05D4-A46B-4D4B-A500-AD5D71151BF2}"/>
               </a:ext>
             </a:extLst>
           </p:cNvPr>
@@ -5143,7 +5175,7 @@
             <a:avLst/>
           </a:prstGeom>
           <a:solidFill xmlns:a="http://schemas.openxmlformats.org/drawingml/2006/main">
-            <a:srgbClr val="2563EB"/>
+            <a:srgbClr val="1C2E4A"/>
           </a:solidFill>
           <a:ln xmlns:a="http://schemas.openxmlformats.org/drawingml/2006/main" w="0">
             <a:noFill/>
@@ -5155,7 +5187,7 @@
           <p:cNvPr id="2" name="">
             <a:extLst xmlns:a="http://schemas.openxmlformats.org/drawingml/2006/main">
               <a:ext uri="{FF2B5EF4-FFF2-40B4-BE49-F238E27FC236}">
-                <a16:creationId xmlns:a16="http://schemas.microsoft.com/office/drawing/2014/main" id="{55580315-958E-47E1-83A8-5985C0226E8B}"/>
+                <a16:creationId xmlns:a16="http://schemas.microsoft.com/office/drawing/2014/main" id="{69695515-4D0A-418D-9164-5BECF36DB08A}"/>
               </a:ext>
             </a:extLst>
           </p:cNvPr>
@@ -5186,7 +5218,7 @@
             <a:pPr algn="l">
               <a:defRPr sz="1125" b="1">
                 <a:solidFill>
-                  <a:srgbClr val="2563EB"/>
+                  <a:srgbClr val="52677D"/>
                 </a:solidFill>
                 <a:latin typeface="Helvetica Neue"/>
                 <a:ea typeface="Helvetica Neue"/>
@@ -5196,7 +5228,7 @@
             <a:r>
               <a:rPr sz="1125" b="1">
                 <a:solidFill>
-                  <a:srgbClr val="2563EB"/>
+                  <a:srgbClr val="52677D"/>
                 </a:solidFill>
                 <a:latin typeface="Helvetica Neue"/>
                 <a:ea typeface="Helvetica Neue"/>
@@ -5212,7 +5244,7 @@
           <p:cNvPr id="3" name="">
             <a:extLst xmlns:a="http://schemas.openxmlformats.org/drawingml/2006/main">
               <a:ext uri="{FF2B5EF4-FFF2-40B4-BE49-F238E27FC236}">
-                <a16:creationId xmlns:a16="http://schemas.microsoft.com/office/drawing/2014/main" id="{A4535807-F1FC-48EA-88AC-DEA02D305BA3}"/>
+                <a16:creationId xmlns:a16="http://schemas.microsoft.com/office/drawing/2014/main" id="{762B737C-A297-42D4-9BEB-24B995A61776}"/>
               </a:ext>
             </a:extLst>
           </p:cNvPr>
@@ -5232,7 +5264,7 @@
             </a:avLst>
           </a:prstGeom>
           <a:solidFill xmlns:a="http://schemas.openxmlformats.org/drawingml/2006/main">
-            <a:srgbClr val="FFD43B"/>
+            <a:srgbClr val="D1CFC9"/>
           </a:solidFill>
           <a:ln xmlns:a="http://schemas.openxmlformats.org/drawingml/2006/main" w="0">
             <a:noFill/>
@@ -5244,7 +5276,7 @@
           <p:cNvPr id="4" name="">
             <a:extLst xmlns:a="http://schemas.openxmlformats.org/drawingml/2006/main">
               <a:ext uri="{FF2B5EF4-FFF2-40B4-BE49-F238E27FC236}">
-                <a16:creationId xmlns:a16="http://schemas.microsoft.com/office/drawing/2014/main" id="{9A85F3CF-D46C-4DA2-8F52-7863F17933BE}"/>
+                <a16:creationId xmlns:a16="http://schemas.microsoft.com/office/drawing/2014/main" id="{45DBFF7F-3169-4E34-AAF6-AB6079B23339}"/>
               </a:ext>
             </a:extLst>
           </p:cNvPr>
@@ -5275,7 +5307,7 @@
             <a:pPr algn="ctr">
               <a:defRPr sz="1275" b="1">
                 <a:solidFill>
-                  <a:srgbClr val="092454"/>
+                  <a:srgbClr val="1C2E4A"/>
                 </a:solidFill>
                 <a:latin typeface="Helvetica Neue"/>
                 <a:ea typeface="Helvetica Neue"/>
@@ -5285,7 +5317,7 @@
             <a:r>
               <a:rPr sz="1275" b="1">
                 <a:solidFill>
-                  <a:srgbClr val="092454"/>
+                  <a:srgbClr val="1C2E4A"/>
                 </a:solidFill>
                 <a:latin typeface="Helvetica Neue"/>
                 <a:ea typeface="Helvetica Neue"/>
@@ -5301,7 +5333,7 @@
           <p:cNvPr id="5" name="">
             <a:extLst xmlns:a="http://schemas.openxmlformats.org/drawingml/2006/main">
               <a:ext uri="{FF2B5EF4-FFF2-40B4-BE49-F238E27FC236}">
-                <a16:creationId xmlns:a16="http://schemas.microsoft.com/office/drawing/2014/main" id="{B36AC984-75C8-47B8-BA2B-0CBF69B0A746}"/>
+                <a16:creationId xmlns:a16="http://schemas.microsoft.com/office/drawing/2014/main" id="{E607CA8F-70EA-4875-AD34-F5EECDC08E5D}"/>
               </a:ext>
             </a:extLst>
           </p:cNvPr>
@@ -5332,7 +5364,7 @@
             <a:pPr algn="l">
               <a:defRPr sz="2850" b="1">
                 <a:solidFill>
-                  <a:srgbClr val="092454"/>
+                  <a:srgbClr val="1C2E4A"/>
                 </a:solidFill>
                 <a:latin typeface="Helvetica Neue"/>
                 <a:ea typeface="Helvetica Neue"/>
@@ -5342,7 +5374,7 @@
             <a:r>
               <a:rPr sz="2850" b="1">
                 <a:solidFill>
-                  <a:srgbClr val="092454"/>
+                  <a:srgbClr val="1C2E4A"/>
                 </a:solidFill>
                 <a:latin typeface="Helvetica Neue"/>
                 <a:ea typeface="Helvetica Neue"/>
@@ -5358,7 +5390,7 @@
           <p:cNvPr id="6" name="">
             <a:extLst xmlns:a="http://schemas.openxmlformats.org/drawingml/2006/main">
               <a:ext uri="{FF2B5EF4-FFF2-40B4-BE49-F238E27FC236}">
-                <a16:creationId xmlns:a16="http://schemas.microsoft.com/office/drawing/2014/main" id="{9C482CE1-433C-4814-A425-C2B5ACD2A888}"/>
+                <a16:creationId xmlns:a16="http://schemas.microsoft.com/office/drawing/2014/main" id="{034A9704-0061-4152-80F3-F055CA5C4266}"/>
               </a:ext>
             </a:extLst>
           </p:cNvPr>
@@ -5378,7 +5410,7 @@
             </a:avLst>
           </a:prstGeom>
           <a:solidFill xmlns:a="http://schemas.openxmlformats.org/drawingml/2006/main">
-            <a:srgbClr val="EEF7FF"/>
+            <a:srgbClr val="D1CFC9"/>
           </a:solidFill>
           <a:ln xmlns:a="http://schemas.openxmlformats.org/drawingml/2006/main" w="0">
             <a:noFill/>
@@ -5390,7 +5422,7 @@
           <p:cNvPr id="7" name="">
             <a:extLst xmlns:a="http://schemas.openxmlformats.org/drawingml/2006/main">
               <a:ext uri="{FF2B5EF4-FFF2-40B4-BE49-F238E27FC236}">
-                <a16:creationId xmlns:a16="http://schemas.microsoft.com/office/drawing/2014/main" id="{E0F37ABA-9F29-4C54-BD4C-6FC7D385151B}"/>
+                <a16:creationId xmlns:a16="http://schemas.microsoft.com/office/drawing/2014/main" id="{E30C2204-D702-440F-99E3-171A71C94ABD}"/>
               </a:ext>
             </a:extLst>
           </p:cNvPr>
@@ -5421,7 +5453,7 @@
             <a:pPr algn="ctr">
               <a:defRPr sz="1350" b="1">
                 <a:solidFill>
-                  <a:srgbClr val="2563EB"/>
+                  <a:srgbClr val="52677D"/>
                 </a:solidFill>
                 <a:latin typeface="Helvetica Neue"/>
                 <a:ea typeface="Helvetica Neue"/>
@@ -5431,7 +5463,7 @@
             <a:r>
               <a:rPr sz="1350" b="1">
                 <a:solidFill>
-                  <a:srgbClr val="2563EB"/>
+                  <a:srgbClr val="52677D"/>
                 </a:solidFill>
                 <a:latin typeface="Helvetica Neue"/>
                 <a:ea typeface="Helvetica Neue"/>
@@ -5447,7 +5479,7 @@
           <p:cNvPr id="8" name="">
             <a:extLst xmlns:a="http://schemas.openxmlformats.org/drawingml/2006/main">
               <a:ext uri="{FF2B5EF4-FFF2-40B4-BE49-F238E27FC236}">
-                <a16:creationId xmlns:a16="http://schemas.microsoft.com/office/drawing/2014/main" id="{FFD89FED-B69E-4A4F-AEFB-64BE0117C95F}"/>
+                <a16:creationId xmlns:a16="http://schemas.microsoft.com/office/drawing/2014/main" id="{5FCEBFE2-C7E7-47EC-B182-CD93CA4F0EB3}"/>
               </a:ext>
             </a:extLst>
           </p:cNvPr>
@@ -5478,7 +5510,7 @@
             <a:pPr algn="l">
               <a:defRPr sz="1575" b="0">
                 <a:solidFill>
-                  <a:srgbClr val="10213D"/>
+                  <a:srgbClr val="0F1A2B"/>
                 </a:solidFill>
                 <a:latin typeface="Helvetica Neue"/>
                 <a:ea typeface="Helvetica Neue"/>
@@ -5488,7 +5520,7 @@
             <a:r>
               <a:rPr sz="1575" b="0">
                 <a:solidFill>
-                  <a:srgbClr val="10213D"/>
+                  <a:srgbClr val="0F1A2B"/>
                 </a:solidFill>
                 <a:latin typeface="Helvetica Neue"/>
                 <a:ea typeface="Helvetica Neue"/>
@@ -5504,7 +5536,7 @@
           <p:cNvPr id="9" name="">
             <a:extLst xmlns:a="http://schemas.openxmlformats.org/drawingml/2006/main">
               <a:ext uri="{FF2B5EF4-FFF2-40B4-BE49-F238E27FC236}">
-                <a16:creationId xmlns:a16="http://schemas.microsoft.com/office/drawing/2014/main" id="{410D7724-18C1-4250-AF88-9FC064BB73F7}"/>
+                <a16:creationId xmlns:a16="http://schemas.microsoft.com/office/drawing/2014/main" id="{85C58562-1604-4099-BB8C-788408EE1FBD}"/>
               </a:ext>
             </a:extLst>
           </p:cNvPr>
@@ -5524,7 +5556,7 @@
             </a:avLst>
           </a:prstGeom>
           <a:solidFill xmlns:a="http://schemas.openxmlformats.org/drawingml/2006/main">
-            <a:srgbClr val="EEF7FF"/>
+            <a:srgbClr val="D1CFC9"/>
           </a:solidFill>
           <a:ln xmlns:a="http://schemas.openxmlformats.org/drawingml/2006/main" w="0">
             <a:noFill/>
@@ -5536,7 +5568,7 @@
           <p:cNvPr id="10" name="">
             <a:extLst xmlns:a="http://schemas.openxmlformats.org/drawingml/2006/main">
               <a:ext uri="{FF2B5EF4-FFF2-40B4-BE49-F238E27FC236}">
-                <a16:creationId xmlns:a16="http://schemas.microsoft.com/office/drawing/2014/main" id="{86B96767-3B70-4D5C-9F55-136DD83E86C2}"/>
+                <a16:creationId xmlns:a16="http://schemas.microsoft.com/office/drawing/2014/main" id="{132EC8B4-B454-40A1-9F49-27E0687DF153}"/>
               </a:ext>
             </a:extLst>
           </p:cNvPr>
@@ -5567,7 +5599,7 @@
             <a:pPr algn="ctr">
               <a:defRPr sz="1350" b="1">
                 <a:solidFill>
-                  <a:srgbClr val="2563EB"/>
+                  <a:srgbClr val="52677D"/>
                 </a:solidFill>
                 <a:latin typeface="Helvetica Neue"/>
                 <a:ea typeface="Helvetica Neue"/>
@@ -5577,7 +5609,7 @@
             <a:r>
               <a:rPr sz="1350" b="1">
                 <a:solidFill>
-                  <a:srgbClr val="2563EB"/>
+                  <a:srgbClr val="52677D"/>
                 </a:solidFill>
                 <a:latin typeface="Helvetica Neue"/>
                 <a:ea typeface="Helvetica Neue"/>
@@ -5593,7 +5625,7 @@
           <p:cNvPr id="11" name="">
             <a:extLst xmlns:a="http://schemas.openxmlformats.org/drawingml/2006/main">
               <a:ext uri="{FF2B5EF4-FFF2-40B4-BE49-F238E27FC236}">
-                <a16:creationId xmlns:a16="http://schemas.microsoft.com/office/drawing/2014/main" id="{C96A7BD4-3FC1-4F6D-8F74-34B5170E2B5A}"/>
+                <a16:creationId xmlns:a16="http://schemas.microsoft.com/office/drawing/2014/main" id="{DEA5BFDE-B7AB-44CD-8CF2-A030A05B33E4}"/>
               </a:ext>
             </a:extLst>
           </p:cNvPr>
@@ -5624,7 +5656,7 @@
             <a:pPr algn="l">
               <a:defRPr sz="1575" b="0">
                 <a:solidFill>
-                  <a:srgbClr val="10213D"/>
+                  <a:srgbClr val="0F1A2B"/>
                 </a:solidFill>
                 <a:latin typeface="Helvetica Neue"/>
                 <a:ea typeface="Helvetica Neue"/>
@@ -5634,7 +5666,7 @@
             <a:r>
               <a:rPr sz="1575" b="0">
                 <a:solidFill>
-                  <a:srgbClr val="10213D"/>
+                  <a:srgbClr val="0F1A2B"/>
                 </a:solidFill>
                 <a:latin typeface="Helvetica Neue"/>
                 <a:ea typeface="Helvetica Neue"/>
@@ -5650,7 +5682,7 @@
           <p:cNvPr id="12" name="">
             <a:extLst xmlns:a="http://schemas.openxmlformats.org/drawingml/2006/main">
               <a:ext uri="{FF2B5EF4-FFF2-40B4-BE49-F238E27FC236}">
-                <a16:creationId xmlns:a16="http://schemas.microsoft.com/office/drawing/2014/main" id="{DBD86507-31C3-4097-BCB0-334434A1B4AB}"/>
+                <a16:creationId xmlns:a16="http://schemas.microsoft.com/office/drawing/2014/main" id="{8D0A3052-B2CF-47A9-9356-4B1B389331A5}"/>
               </a:ext>
             </a:extLst>
           </p:cNvPr>
@@ -5670,7 +5702,7 @@
             </a:avLst>
           </a:prstGeom>
           <a:solidFill xmlns:a="http://schemas.openxmlformats.org/drawingml/2006/main">
-            <a:srgbClr val="EEF7FF"/>
+            <a:srgbClr val="D1CFC9"/>
           </a:solidFill>
           <a:ln xmlns:a="http://schemas.openxmlformats.org/drawingml/2006/main" w="0">
             <a:noFill/>
@@ -5682,7 +5714,7 @@
           <p:cNvPr id="13" name="">
             <a:extLst xmlns:a="http://schemas.openxmlformats.org/drawingml/2006/main">
               <a:ext uri="{FF2B5EF4-FFF2-40B4-BE49-F238E27FC236}">
-                <a16:creationId xmlns:a16="http://schemas.microsoft.com/office/drawing/2014/main" id="{6CAE3F58-57F0-4435-9026-FAA9FCDC967B}"/>
+                <a16:creationId xmlns:a16="http://schemas.microsoft.com/office/drawing/2014/main" id="{A0CE1497-8ED3-4DDD-8CF3-7303DA40CCE6}"/>
               </a:ext>
             </a:extLst>
           </p:cNvPr>
@@ -5713,7 +5745,7 @@
             <a:pPr algn="ctr">
               <a:defRPr sz="1350" b="1">
                 <a:solidFill>
-                  <a:srgbClr val="2563EB"/>
+                  <a:srgbClr val="52677D"/>
                 </a:solidFill>
                 <a:latin typeface="Helvetica Neue"/>
                 <a:ea typeface="Helvetica Neue"/>
@@ -5723,7 +5755,7 @@
             <a:r>
               <a:rPr sz="1350" b="1">
                 <a:solidFill>
-                  <a:srgbClr val="2563EB"/>
+                  <a:srgbClr val="52677D"/>
                 </a:solidFill>
                 <a:latin typeface="Helvetica Neue"/>
                 <a:ea typeface="Helvetica Neue"/>
@@ -5739,7 +5771,7 @@
           <p:cNvPr id="14" name="">
             <a:extLst xmlns:a="http://schemas.openxmlformats.org/drawingml/2006/main">
               <a:ext uri="{FF2B5EF4-FFF2-40B4-BE49-F238E27FC236}">
-                <a16:creationId xmlns:a16="http://schemas.microsoft.com/office/drawing/2014/main" id="{A1ECE164-D002-4343-A5CD-E4566A0DDA62}"/>
+                <a16:creationId xmlns:a16="http://schemas.microsoft.com/office/drawing/2014/main" id="{9821B027-6C25-43E8-8981-071202D826F7}"/>
               </a:ext>
             </a:extLst>
           </p:cNvPr>
@@ -5770,7 +5802,7 @@
             <a:pPr algn="l">
               <a:defRPr sz="1575" b="0">
                 <a:solidFill>
-                  <a:srgbClr val="10213D"/>
+                  <a:srgbClr val="0F1A2B"/>
                 </a:solidFill>
                 <a:latin typeface="Helvetica Neue"/>
                 <a:ea typeface="Helvetica Neue"/>
@@ -5780,7 +5812,7 @@
             <a:r>
               <a:rPr sz="1575" b="0">
                 <a:solidFill>
-                  <a:srgbClr val="10213D"/>
+                  <a:srgbClr val="0F1A2B"/>
                 </a:solidFill>
                 <a:latin typeface="Helvetica Neue"/>
                 <a:ea typeface="Helvetica Neue"/>
@@ -5796,7 +5828,7 @@
           <p:cNvPr id="15" name="">
             <a:extLst xmlns:a="http://schemas.openxmlformats.org/drawingml/2006/main">
               <a:ext uri="{FF2B5EF4-FFF2-40B4-BE49-F238E27FC236}">
-                <a16:creationId xmlns:a16="http://schemas.microsoft.com/office/drawing/2014/main" id="{08761DF5-0DD3-4ACB-8C80-EE403B8EBD17}"/>
+                <a16:creationId xmlns:a16="http://schemas.microsoft.com/office/drawing/2014/main" id="{AF87A480-1DD3-4F2E-B7FB-31A468F85595}"/>
               </a:ext>
             </a:extLst>
           </p:cNvPr>
@@ -5816,7 +5848,7 @@
             </a:avLst>
           </a:prstGeom>
           <a:solidFill xmlns:a="http://schemas.openxmlformats.org/drawingml/2006/main">
-            <a:srgbClr val="EEF7FF"/>
+            <a:srgbClr val="D1CFC9"/>
           </a:solidFill>
           <a:ln xmlns:a="http://schemas.openxmlformats.org/drawingml/2006/main" w="0">
             <a:noFill/>
@@ -5828,7 +5860,7 @@
           <p:cNvPr id="16" name="">
             <a:extLst xmlns:a="http://schemas.openxmlformats.org/drawingml/2006/main">
               <a:ext uri="{FF2B5EF4-FFF2-40B4-BE49-F238E27FC236}">
-                <a16:creationId xmlns:a16="http://schemas.microsoft.com/office/drawing/2014/main" id="{FDC9FD0C-861A-43A7-8E74-D231F7BBBDDC}"/>
+                <a16:creationId xmlns:a16="http://schemas.microsoft.com/office/drawing/2014/main" id="{186B4EE8-1945-4037-9F6A-54FF434AFE55}"/>
               </a:ext>
             </a:extLst>
           </p:cNvPr>
@@ -5859,7 +5891,7 @@
             <a:pPr algn="l">
               <a:defRPr sz="1125" b="0">
                 <a:solidFill>
-                  <a:srgbClr val="092454"/>
+                  <a:srgbClr val="1C2E4A"/>
                 </a:solidFill>
                 <a:latin typeface="Helvetica Neue"/>
                 <a:ea typeface="Helvetica Neue"/>
@@ -5869,7 +5901,7 @@
             <a:r>
               <a:rPr sz="1125" b="0">
                 <a:solidFill>
-                  <a:srgbClr val="092454"/>
+                  <a:srgbClr val="1C2E4A"/>
                 </a:solidFill>
                 <a:latin typeface="Helvetica Neue"/>
                 <a:ea typeface="Helvetica Neue"/>
@@ -5885,7 +5917,7 @@
           <p:cNvPr id="17" name="">
             <a:extLst xmlns:a="http://schemas.openxmlformats.org/drawingml/2006/main">
               <a:ext uri="{FF2B5EF4-FFF2-40B4-BE49-F238E27FC236}">
-                <a16:creationId xmlns:a16="http://schemas.microsoft.com/office/drawing/2014/main" id="{66442FE3-3A78-43C8-8B9A-D222274CAF71}"/>
+                <a16:creationId xmlns:a16="http://schemas.microsoft.com/office/drawing/2014/main" id="{A80BC692-ADA8-45C2-B070-8B7B75DAE642}"/>
               </a:ext>
             </a:extLst>
           </p:cNvPr>
@@ -5905,7 +5937,7 @@
             </a:avLst>
           </a:prstGeom>
           <a:solidFill xmlns:a="http://schemas.openxmlformats.org/drawingml/2006/main">
-            <a:srgbClr val="092454"/>
+            <a:srgbClr val="1C2E4A"/>
           </a:solidFill>
           <a:ln xmlns:a="http://schemas.openxmlformats.org/drawingml/2006/main" w="0">
             <a:noFill/>
@@ -5917,7 +5949,7 @@
           <p:cNvPr id="18" name="">
             <a:extLst xmlns:a="http://schemas.openxmlformats.org/drawingml/2006/main">
               <a:ext uri="{FF2B5EF4-FFF2-40B4-BE49-F238E27FC236}">
-                <a16:creationId xmlns:a16="http://schemas.microsoft.com/office/drawing/2014/main" id="{AE32DD00-1138-48C7-A482-6F3E45FC2E48}"/>
+                <a16:creationId xmlns:a16="http://schemas.microsoft.com/office/drawing/2014/main" id="{C2717678-5D33-42A8-BA68-47C7545DFC92}"/>
               </a:ext>
             </a:extLst>
           </p:cNvPr>
@@ -5948,7 +5980,7 @@
             <a:pPr algn="l">
               <a:defRPr sz="1050" b="1">
                 <a:solidFill>
-                  <a:srgbClr val="FFD43B"/>
+                  <a:srgbClr val="D1CFC9"/>
                 </a:solidFill>
                 <a:latin typeface="Helvetica Neue"/>
                 <a:ea typeface="Helvetica Neue"/>
@@ -5958,7 +5990,7 @@
             <a:r>
               <a:rPr sz="1050" b="1">
                 <a:solidFill>
-                  <a:srgbClr val="FFD43B"/>
+                  <a:srgbClr val="D1CFC9"/>
                 </a:solidFill>
                 <a:latin typeface="Helvetica Neue"/>
                 <a:ea typeface="Helvetica Neue"/>
@@ -5974,7 +6006,7 @@
           <p:cNvPr id="19" name="">
             <a:extLst xmlns:a="http://schemas.openxmlformats.org/drawingml/2006/main">
               <a:ext uri="{FF2B5EF4-FFF2-40B4-BE49-F238E27FC236}">
-                <a16:creationId xmlns:a16="http://schemas.microsoft.com/office/drawing/2014/main" id="{205FFD81-7701-41C1-A828-7F3CB56D322E}"/>
+                <a16:creationId xmlns:a16="http://schemas.microsoft.com/office/drawing/2014/main" id="{D8B560C4-C2E4-4B53-B40D-4F2416C32B67}"/>
               </a:ext>
             </a:extLst>
           </p:cNvPr>
@@ -6031,7 +6063,7 @@
           <p:cNvPr id="20" name="">
             <a:extLst xmlns:a="http://schemas.openxmlformats.org/drawingml/2006/main">
               <a:ext uri="{FF2B5EF4-FFF2-40B4-BE49-F238E27FC236}">
-                <a16:creationId xmlns:a16="http://schemas.microsoft.com/office/drawing/2014/main" id="{E1B2014A-1808-4152-9E56-B9ACEE1387ED}"/>
+                <a16:creationId xmlns:a16="http://schemas.microsoft.com/office/drawing/2014/main" id="{78FAB750-E15F-4EF0-ABB2-936DD9FA345B}"/>
               </a:ext>
             </a:extLst>
           </p:cNvPr>
@@ -6062,7 +6094,7 @@
             <a:pPr algn="l">
               <a:defRPr sz="1125" b="0">
                 <a:solidFill>
-                  <a:srgbClr val="BFE6FF"/>
+                  <a:srgbClr val="BDC4D4"/>
                 </a:solidFill>
                 <a:latin typeface="Helvetica Neue"/>
                 <a:ea typeface="Helvetica Neue"/>
@@ -6072,7 +6104,7 @@
             <a:r>
               <a:rPr sz="1125" b="0">
                 <a:solidFill>
-                  <a:srgbClr val="BFE6FF"/>
+                  <a:srgbClr val="BDC4D4"/>
                 </a:solidFill>
                 <a:latin typeface="Helvetica Neue"/>
                 <a:ea typeface="Helvetica Neue"/>
@@ -6088,7 +6120,7 @@
           <p:cNvPr id="21" name="">
             <a:extLst xmlns:a="http://schemas.openxmlformats.org/drawingml/2006/main">
               <a:ext uri="{FF2B5EF4-FFF2-40B4-BE49-F238E27FC236}">
-                <a16:creationId xmlns:a16="http://schemas.microsoft.com/office/drawing/2014/main" id="{8CABAE30-CCA1-4B14-B541-FFA74EE280D2}"/>
+                <a16:creationId xmlns:a16="http://schemas.microsoft.com/office/drawing/2014/main" id="{7B0AC7B5-2BD5-40A8-94B8-F93A3F918746}"/>
               </a:ext>
             </a:extLst>
           </p:cNvPr>
@@ -6106,7 +6138,7 @@
             <a:avLst/>
           </a:prstGeom>
           <a:solidFill xmlns:a="http://schemas.openxmlformats.org/drawingml/2006/main">
-            <a:srgbClr val="D8E5F2"/>
+            <a:srgbClr val="BDC4D4"/>
           </a:solidFill>
           <a:ln xmlns:a="http://schemas.openxmlformats.org/drawingml/2006/main" w="0">
             <a:noFill/>
@@ -6118,7 +6150,7 @@
           <p:cNvPr id="22" name="">
             <a:extLst xmlns:a="http://schemas.openxmlformats.org/drawingml/2006/main">
               <a:ext uri="{FF2B5EF4-FFF2-40B4-BE49-F238E27FC236}">
-                <a16:creationId xmlns:a16="http://schemas.microsoft.com/office/drawing/2014/main" id="{B973420B-BEF7-42AB-B049-47FD8106ED95}"/>
+                <a16:creationId xmlns:a16="http://schemas.microsoft.com/office/drawing/2014/main" id="{4E9CEB5B-9144-4783-9098-CACCE83C31BC}"/>
               </a:ext>
             </a:extLst>
           </p:cNvPr>
@@ -6149,7 +6181,7 @@
             <a:pPr algn="l">
               <a:defRPr sz="750" b="0">
                 <a:solidFill>
-                  <a:srgbClr val="61718A"/>
+                  <a:srgbClr val="52677D"/>
                 </a:solidFill>
                 <a:latin typeface="Helvetica Neue"/>
                 <a:ea typeface="Helvetica Neue"/>
@@ -6159,7 +6191,7 @@
             <a:r>
               <a:rPr sz="750" b="0">
                 <a:solidFill>
-                  <a:srgbClr val="61718A"/>
+                  <a:srgbClr val="52677D"/>
                 </a:solidFill>
                 <a:latin typeface="Helvetica Neue"/>
                 <a:ea typeface="Helvetica Neue"/>
@@ -6175,7 +6207,7 @@
           <p:cNvPr id="23" name="">
             <a:extLst xmlns:a="http://schemas.openxmlformats.org/drawingml/2006/main">
               <a:ext uri="{FF2B5EF4-FFF2-40B4-BE49-F238E27FC236}">
-                <a16:creationId xmlns:a16="http://schemas.microsoft.com/office/drawing/2014/main" id="{BCE6F41E-42AC-4429-9C93-7B986A923F28}"/>
+                <a16:creationId xmlns:a16="http://schemas.microsoft.com/office/drawing/2014/main" id="{657E76A0-F989-4CF4-92DC-60864115502F}"/>
               </a:ext>
             </a:extLst>
           </p:cNvPr>
@@ -6206,7 +6238,7 @@
             <a:pPr algn="r">
               <a:defRPr sz="825" b="1">
                 <a:solidFill>
-                  <a:srgbClr val="2563EB"/>
+                  <a:srgbClr val="52677D"/>
                 </a:solidFill>
                 <a:latin typeface="Helvetica Neue"/>
                 <a:ea typeface="Helvetica Neue"/>
@@ -6216,7 +6248,7 @@
             <a:r>
               <a:rPr sz="825" b="1">
                 <a:solidFill>
-                  <a:srgbClr val="2563EB"/>
+                  <a:srgbClr val="52677D"/>
                 </a:solidFill>
                 <a:latin typeface="Helvetica Neue"/>
                 <a:ea typeface="Helvetica Neue"/>
@@ -6230,7 +6262,7 @@
     </p:spTree>
     <p:extLst>
       <p:ext uri="{BB962C8B-B14F-4D97-AF65-F5344CB8AC3E}">
-        <p14:creationId xmlns:p14="http://schemas.microsoft.com/office/powerpoint/2010/main" val="336172440"/>
+        <p14:creationId xmlns:p14="http://schemas.microsoft.com/office/powerpoint/2010/main" val="688800581"/>
       </p:ext>
     </p:extLst>
   </p:cSld>
@@ -6261,7 +6293,7 @@
           <p:cNvPr id="24" name="">
             <a:extLst xmlns:a="http://schemas.openxmlformats.org/drawingml/2006/main">
               <a:ext uri="{FF2B5EF4-FFF2-40B4-BE49-F238E27FC236}">
-                <a16:creationId xmlns:a16="http://schemas.microsoft.com/office/drawing/2014/main" id="{3718D1C6-3A36-4C9D-A94A-5CBA489B8A3F}"/>
+                <a16:creationId xmlns:a16="http://schemas.microsoft.com/office/drawing/2014/main" id="{B0B5748F-2196-4B14-B461-48F6A724A0E4}"/>
               </a:ext>
             </a:extLst>
           </p:cNvPr>
@@ -6279,7 +6311,7 @@
             <a:avLst/>
           </a:prstGeom>
           <a:solidFill xmlns:a="http://schemas.openxmlformats.org/drawingml/2006/main">
-            <a:srgbClr val="FF7C70"/>
+            <a:srgbClr val="1C2E4A"/>
           </a:solidFill>
           <a:ln xmlns:a="http://schemas.openxmlformats.org/drawingml/2006/main" w="0">
             <a:noFill/>
@@ -6291,7 +6323,7 @@
           <p:cNvPr id="2" name="">
             <a:extLst xmlns:a="http://schemas.openxmlformats.org/drawingml/2006/main">
               <a:ext uri="{FF2B5EF4-FFF2-40B4-BE49-F238E27FC236}">
-                <a16:creationId xmlns:a16="http://schemas.microsoft.com/office/drawing/2014/main" id="{691D33F1-F6FB-4F84-A454-1F48EA639DB3}"/>
+                <a16:creationId xmlns:a16="http://schemas.microsoft.com/office/drawing/2014/main" id="{01F5B971-3633-4E29-B672-37099704E42C}"/>
               </a:ext>
             </a:extLst>
           </p:cNvPr>
@@ -6322,7 +6354,7 @@
             <a:pPr algn="l">
               <a:defRPr sz="1125" b="1">
                 <a:solidFill>
-                  <a:srgbClr val="2563EB"/>
+                  <a:srgbClr val="52677D"/>
                 </a:solidFill>
                 <a:latin typeface="Helvetica Neue"/>
                 <a:ea typeface="Helvetica Neue"/>
@@ -6332,7 +6364,7 @@
             <a:r>
               <a:rPr sz="1125" b="1">
                 <a:solidFill>
-                  <a:srgbClr val="2563EB"/>
+                  <a:srgbClr val="52677D"/>
                 </a:solidFill>
                 <a:latin typeface="Helvetica Neue"/>
                 <a:ea typeface="Helvetica Neue"/>
@@ -6348,7 +6380,7 @@
           <p:cNvPr id="3" name="">
             <a:extLst xmlns:a="http://schemas.openxmlformats.org/drawingml/2006/main">
               <a:ext uri="{FF2B5EF4-FFF2-40B4-BE49-F238E27FC236}">
-                <a16:creationId xmlns:a16="http://schemas.microsoft.com/office/drawing/2014/main" id="{9230251E-54A4-482A-8FDA-30869017DF6C}"/>
+                <a16:creationId xmlns:a16="http://schemas.microsoft.com/office/drawing/2014/main" id="{54D2E05E-1489-4557-8E1C-AA1DE05B7A0C}"/>
               </a:ext>
             </a:extLst>
           </p:cNvPr>
@@ -6368,7 +6400,7 @@
             </a:avLst>
           </a:prstGeom>
           <a:solidFill xmlns:a="http://schemas.openxmlformats.org/drawingml/2006/main">
-            <a:srgbClr val="FFD43B"/>
+            <a:srgbClr val="D1CFC9"/>
           </a:solidFill>
           <a:ln xmlns:a="http://schemas.openxmlformats.org/drawingml/2006/main" w="0">
             <a:noFill/>
@@ -6380,7 +6412,7 @@
           <p:cNvPr id="4" name="">
             <a:extLst xmlns:a="http://schemas.openxmlformats.org/drawingml/2006/main">
               <a:ext uri="{FF2B5EF4-FFF2-40B4-BE49-F238E27FC236}">
-                <a16:creationId xmlns:a16="http://schemas.microsoft.com/office/drawing/2014/main" id="{CD8995DA-1456-4882-B8D8-C7B3C7DEC453}"/>
+                <a16:creationId xmlns:a16="http://schemas.microsoft.com/office/drawing/2014/main" id="{CB236DC5-AC09-45E7-AAC0-6388A25FEF36}"/>
               </a:ext>
             </a:extLst>
           </p:cNvPr>
@@ -6411,7 +6443,7 @@
             <a:pPr algn="ctr">
               <a:defRPr sz="1275" b="1">
                 <a:solidFill>
-                  <a:srgbClr val="092454"/>
+                  <a:srgbClr val="1C2E4A"/>
                 </a:solidFill>
                 <a:latin typeface="Helvetica Neue"/>
                 <a:ea typeface="Helvetica Neue"/>
@@ -6421,7 +6453,7 @@
             <a:r>
               <a:rPr sz="1275" b="1">
                 <a:solidFill>
-                  <a:srgbClr val="092454"/>
+                  <a:srgbClr val="1C2E4A"/>
                 </a:solidFill>
                 <a:latin typeface="Helvetica Neue"/>
                 <a:ea typeface="Helvetica Neue"/>
@@ -6437,7 +6469,7 @@
           <p:cNvPr id="5" name="">
             <a:extLst xmlns:a="http://schemas.openxmlformats.org/drawingml/2006/main">
               <a:ext uri="{FF2B5EF4-FFF2-40B4-BE49-F238E27FC236}">
-                <a16:creationId xmlns:a16="http://schemas.microsoft.com/office/drawing/2014/main" id="{C0C8FC4D-611D-4D62-AB2B-27D1B5C0200A}"/>
+                <a16:creationId xmlns:a16="http://schemas.microsoft.com/office/drawing/2014/main" id="{C88B5815-C614-414B-8281-EBA23437EFAF}"/>
               </a:ext>
             </a:extLst>
           </p:cNvPr>
@@ -6468,7 +6500,7 @@
             <a:pPr algn="l">
               <a:defRPr sz="2250" b="1">
                 <a:solidFill>
-                  <a:srgbClr val="092454"/>
+                  <a:srgbClr val="1C2E4A"/>
                 </a:solidFill>
                 <a:latin typeface="Helvetica Neue"/>
                 <a:ea typeface="Helvetica Neue"/>
@@ -6478,7 +6510,7 @@
             <a:r>
               <a:rPr sz="2250" b="1">
                 <a:solidFill>
-                  <a:srgbClr val="092454"/>
+                  <a:srgbClr val="1C2E4A"/>
                 </a:solidFill>
                 <a:latin typeface="Helvetica Neue"/>
                 <a:ea typeface="Helvetica Neue"/>
@@ -6494,7 +6526,7 @@
           <p:cNvPr id="6" name="">
             <a:extLst xmlns:a="http://schemas.openxmlformats.org/drawingml/2006/main">
               <a:ext uri="{FF2B5EF4-FFF2-40B4-BE49-F238E27FC236}">
-                <a16:creationId xmlns:a16="http://schemas.microsoft.com/office/drawing/2014/main" id="{1243B126-30A6-4A4A-A548-766A221DCE32}"/>
+                <a16:creationId xmlns:a16="http://schemas.microsoft.com/office/drawing/2014/main" id="{C93D9D8E-7E24-4D02-AF82-2781D38B698D}"/>
               </a:ext>
             </a:extLst>
           </p:cNvPr>
@@ -6514,7 +6546,7 @@
             </a:avLst>
           </a:prstGeom>
           <a:solidFill xmlns:a="http://schemas.openxmlformats.org/drawingml/2006/main">
-            <a:srgbClr val="EEF7FF"/>
+            <a:srgbClr val="D1CFC9"/>
           </a:solidFill>
           <a:ln xmlns:a="http://schemas.openxmlformats.org/drawingml/2006/main" w="0">
             <a:noFill/>
@@ -6526,7 +6558,7 @@
           <p:cNvPr id="7" name="">
             <a:extLst xmlns:a="http://schemas.openxmlformats.org/drawingml/2006/main">
               <a:ext uri="{FF2B5EF4-FFF2-40B4-BE49-F238E27FC236}">
-                <a16:creationId xmlns:a16="http://schemas.microsoft.com/office/drawing/2014/main" id="{6D67B21E-09A5-49AD-A495-BCAE025748B0}"/>
+                <a16:creationId xmlns:a16="http://schemas.microsoft.com/office/drawing/2014/main" id="{BDA45142-BECA-4DC0-BAD1-C77E8A30A461}"/>
               </a:ext>
             </a:extLst>
           </p:cNvPr>
@@ -6557,7 +6589,7 @@
             <a:pPr algn="ctr">
               <a:defRPr sz="1350" b="1">
                 <a:solidFill>
-                  <a:srgbClr val="2563EB"/>
+                  <a:srgbClr val="52677D"/>
                 </a:solidFill>
                 <a:latin typeface="Helvetica Neue"/>
                 <a:ea typeface="Helvetica Neue"/>
@@ -6567,7 +6599,7 @@
             <a:r>
               <a:rPr sz="1350" b="1">
                 <a:solidFill>
-                  <a:srgbClr val="2563EB"/>
+                  <a:srgbClr val="52677D"/>
                 </a:solidFill>
                 <a:latin typeface="Helvetica Neue"/>
                 <a:ea typeface="Helvetica Neue"/>
@@ -6583,7 +6615,7 @@
           <p:cNvPr id="8" name="">
             <a:extLst xmlns:a="http://schemas.openxmlformats.org/drawingml/2006/main">
               <a:ext uri="{FF2B5EF4-FFF2-40B4-BE49-F238E27FC236}">
-                <a16:creationId xmlns:a16="http://schemas.microsoft.com/office/drawing/2014/main" id="{8F951551-E281-42C1-A05A-CBA5DFDEED5B}"/>
+                <a16:creationId xmlns:a16="http://schemas.microsoft.com/office/drawing/2014/main" id="{502907C2-DFE1-49E9-8A06-613392AF0623}"/>
               </a:ext>
             </a:extLst>
           </p:cNvPr>
@@ -6614,7 +6646,7 @@
             <a:pPr algn="l">
               <a:defRPr sz="1575" b="0">
                 <a:solidFill>
-                  <a:srgbClr val="10213D"/>
+                  <a:srgbClr val="0F1A2B"/>
                 </a:solidFill>
                 <a:latin typeface="Helvetica Neue"/>
                 <a:ea typeface="Helvetica Neue"/>
@@ -6624,7 +6656,7 @@
             <a:r>
               <a:rPr sz="1575" b="0">
                 <a:solidFill>
-                  <a:srgbClr val="10213D"/>
+                  <a:srgbClr val="0F1A2B"/>
                 </a:solidFill>
                 <a:latin typeface="Helvetica Neue"/>
                 <a:ea typeface="Helvetica Neue"/>
@@ -6640,7 +6672,7 @@
           <p:cNvPr id="9" name="">
             <a:extLst xmlns:a="http://schemas.openxmlformats.org/drawingml/2006/main">
               <a:ext uri="{FF2B5EF4-FFF2-40B4-BE49-F238E27FC236}">
-                <a16:creationId xmlns:a16="http://schemas.microsoft.com/office/drawing/2014/main" id="{9D1EFC42-0DE3-4021-80F4-0EF6EBB6B01B}"/>
+                <a16:creationId xmlns:a16="http://schemas.microsoft.com/office/drawing/2014/main" id="{0246F8A2-70DE-4AEF-8CCD-3F6379518D4A}"/>
               </a:ext>
             </a:extLst>
           </p:cNvPr>
@@ -6660,7 +6692,7 @@
             </a:avLst>
           </a:prstGeom>
           <a:solidFill xmlns:a="http://schemas.openxmlformats.org/drawingml/2006/main">
-            <a:srgbClr val="EEF7FF"/>
+            <a:srgbClr val="D1CFC9"/>
           </a:solidFill>
           <a:ln xmlns:a="http://schemas.openxmlformats.org/drawingml/2006/main" w="0">
             <a:noFill/>
@@ -6672,7 +6704,7 @@
           <p:cNvPr id="10" name="">
             <a:extLst xmlns:a="http://schemas.openxmlformats.org/drawingml/2006/main">
               <a:ext uri="{FF2B5EF4-FFF2-40B4-BE49-F238E27FC236}">
-                <a16:creationId xmlns:a16="http://schemas.microsoft.com/office/drawing/2014/main" id="{0460AD1F-6901-49B8-9BC1-C2846FC711FC}"/>
+                <a16:creationId xmlns:a16="http://schemas.microsoft.com/office/drawing/2014/main" id="{CB45F422-43B5-4EE7-A5A9-0F9322D9FB38}"/>
               </a:ext>
             </a:extLst>
           </p:cNvPr>
@@ -6703,7 +6735,7 @@
             <a:pPr algn="ctr">
               <a:defRPr sz="1350" b="1">
                 <a:solidFill>
-                  <a:srgbClr val="2563EB"/>
+                  <a:srgbClr val="52677D"/>
                 </a:solidFill>
                 <a:latin typeface="Helvetica Neue"/>
                 <a:ea typeface="Helvetica Neue"/>
@@ -6713,7 +6745,7 @@
             <a:r>
               <a:rPr sz="1350" b="1">
                 <a:solidFill>
-                  <a:srgbClr val="2563EB"/>
+                  <a:srgbClr val="52677D"/>
                 </a:solidFill>
                 <a:latin typeface="Helvetica Neue"/>
                 <a:ea typeface="Helvetica Neue"/>
@@ -6729,7 +6761,7 @@
           <p:cNvPr id="11" name="">
             <a:extLst xmlns:a="http://schemas.openxmlformats.org/drawingml/2006/main">
               <a:ext uri="{FF2B5EF4-FFF2-40B4-BE49-F238E27FC236}">
-                <a16:creationId xmlns:a16="http://schemas.microsoft.com/office/drawing/2014/main" id="{FA001E78-25B8-46BC-BFDA-AD8EA227FD2B}"/>
+                <a16:creationId xmlns:a16="http://schemas.microsoft.com/office/drawing/2014/main" id="{2ADCC4CB-65EB-4EDC-9016-1EC801A0F07B}"/>
               </a:ext>
             </a:extLst>
           </p:cNvPr>
@@ -6760,7 +6792,7 @@
             <a:pPr algn="l">
               <a:defRPr sz="1575" b="0">
                 <a:solidFill>
-                  <a:srgbClr val="10213D"/>
+                  <a:srgbClr val="0F1A2B"/>
                 </a:solidFill>
                 <a:latin typeface="Helvetica Neue"/>
                 <a:ea typeface="Helvetica Neue"/>
@@ -6770,7 +6802,7 @@
             <a:r>
               <a:rPr sz="1575" b="0">
                 <a:solidFill>
-                  <a:srgbClr val="10213D"/>
+                  <a:srgbClr val="0F1A2B"/>
                 </a:solidFill>
                 <a:latin typeface="Helvetica Neue"/>
                 <a:ea typeface="Helvetica Neue"/>
@@ -6786,7 +6818,7 @@
           <p:cNvPr id="12" name="">
             <a:extLst xmlns:a="http://schemas.openxmlformats.org/drawingml/2006/main">
               <a:ext uri="{FF2B5EF4-FFF2-40B4-BE49-F238E27FC236}">
-                <a16:creationId xmlns:a16="http://schemas.microsoft.com/office/drawing/2014/main" id="{896E9507-4199-4CAB-B247-FB9AC687DF97}"/>
+                <a16:creationId xmlns:a16="http://schemas.microsoft.com/office/drawing/2014/main" id="{4AE41E8D-7D60-48A4-9D81-62A0721CBC6B}"/>
               </a:ext>
             </a:extLst>
           </p:cNvPr>
@@ -6806,7 +6838,7 @@
             </a:avLst>
           </a:prstGeom>
           <a:solidFill xmlns:a="http://schemas.openxmlformats.org/drawingml/2006/main">
-            <a:srgbClr val="EEF7FF"/>
+            <a:srgbClr val="D1CFC9"/>
           </a:solidFill>
           <a:ln xmlns:a="http://schemas.openxmlformats.org/drawingml/2006/main" w="0">
             <a:noFill/>
@@ -6818,7 +6850,7 @@
           <p:cNvPr id="13" name="">
             <a:extLst xmlns:a="http://schemas.openxmlformats.org/drawingml/2006/main">
               <a:ext uri="{FF2B5EF4-FFF2-40B4-BE49-F238E27FC236}">
-                <a16:creationId xmlns:a16="http://schemas.microsoft.com/office/drawing/2014/main" id="{87498178-9320-4FC6-9B28-ABEBA291ACC3}"/>
+                <a16:creationId xmlns:a16="http://schemas.microsoft.com/office/drawing/2014/main" id="{9E877EFC-44F8-4D43-BA59-1553EA9C7329}"/>
               </a:ext>
             </a:extLst>
           </p:cNvPr>
@@ -6849,7 +6881,7 @@
             <a:pPr algn="ctr">
               <a:defRPr sz="1350" b="1">
                 <a:solidFill>
-                  <a:srgbClr val="2563EB"/>
+                  <a:srgbClr val="52677D"/>
                 </a:solidFill>
                 <a:latin typeface="Helvetica Neue"/>
                 <a:ea typeface="Helvetica Neue"/>
@@ -6859,7 +6891,7 @@
             <a:r>
               <a:rPr sz="1350" b="1">
                 <a:solidFill>
-                  <a:srgbClr val="2563EB"/>
+                  <a:srgbClr val="52677D"/>
                 </a:solidFill>
                 <a:latin typeface="Helvetica Neue"/>
                 <a:ea typeface="Helvetica Neue"/>
@@ -6875,7 +6907,7 @@
           <p:cNvPr id="14" name="">
             <a:extLst xmlns:a="http://schemas.openxmlformats.org/drawingml/2006/main">
               <a:ext uri="{FF2B5EF4-FFF2-40B4-BE49-F238E27FC236}">
-                <a16:creationId xmlns:a16="http://schemas.microsoft.com/office/drawing/2014/main" id="{F76BFAE3-CDAC-4475-95B4-CE3E5C4BAAA2}"/>
+                <a16:creationId xmlns:a16="http://schemas.microsoft.com/office/drawing/2014/main" id="{42B34800-E3A0-4F89-ACF6-0C703B78CABF}"/>
               </a:ext>
             </a:extLst>
           </p:cNvPr>
@@ -6906,7 +6938,7 @@
             <a:pPr algn="l">
               <a:defRPr sz="1575" b="0">
                 <a:solidFill>
-                  <a:srgbClr val="10213D"/>
+                  <a:srgbClr val="0F1A2B"/>
                 </a:solidFill>
                 <a:latin typeface="Helvetica Neue"/>
                 <a:ea typeface="Helvetica Neue"/>
@@ -6916,7 +6948,7 @@
             <a:r>
               <a:rPr sz="1575" b="0">
                 <a:solidFill>
-                  <a:srgbClr val="10213D"/>
+                  <a:srgbClr val="0F1A2B"/>
                 </a:solidFill>
                 <a:latin typeface="Helvetica Neue"/>
                 <a:ea typeface="Helvetica Neue"/>
@@ -6932,7 +6964,7 @@
           <p:cNvPr id="15" name="">
             <a:extLst xmlns:a="http://schemas.openxmlformats.org/drawingml/2006/main">
               <a:ext uri="{FF2B5EF4-FFF2-40B4-BE49-F238E27FC236}">
-                <a16:creationId xmlns:a16="http://schemas.microsoft.com/office/drawing/2014/main" id="{625B7652-1862-4B31-9AE9-EC11171D7B4E}"/>
+                <a16:creationId xmlns:a16="http://schemas.microsoft.com/office/drawing/2014/main" id="{FE214582-F477-4543-8692-A4F0A03B6F0C}"/>
               </a:ext>
             </a:extLst>
           </p:cNvPr>
@@ -6952,7 +6984,7 @@
             </a:avLst>
           </a:prstGeom>
           <a:solidFill xmlns:a="http://schemas.openxmlformats.org/drawingml/2006/main">
-            <a:srgbClr val="EEF7FF"/>
+            <a:srgbClr val="D1CFC9"/>
           </a:solidFill>
           <a:ln xmlns:a="http://schemas.openxmlformats.org/drawingml/2006/main" w="0">
             <a:noFill/>
@@ -6964,7 +6996,7 @@
           <p:cNvPr id="16" name="">
             <a:extLst xmlns:a="http://schemas.openxmlformats.org/drawingml/2006/main">
               <a:ext uri="{FF2B5EF4-FFF2-40B4-BE49-F238E27FC236}">
-                <a16:creationId xmlns:a16="http://schemas.microsoft.com/office/drawing/2014/main" id="{081E67D0-DB85-49A3-A15A-5D933E87C767}"/>
+                <a16:creationId xmlns:a16="http://schemas.microsoft.com/office/drawing/2014/main" id="{F1215453-C62D-477C-BF22-BB7868533A61}"/>
               </a:ext>
             </a:extLst>
           </p:cNvPr>
@@ -6995,7 +7027,7 @@
             <a:pPr algn="l">
               <a:defRPr sz="1125" b="0">
                 <a:solidFill>
-                  <a:srgbClr val="092454"/>
+                  <a:srgbClr val="1C2E4A"/>
                 </a:solidFill>
                 <a:latin typeface="Helvetica Neue"/>
                 <a:ea typeface="Helvetica Neue"/>
@@ -7005,7 +7037,7 @@
             <a:r>
               <a:rPr sz="1125" b="0">
                 <a:solidFill>
-                  <a:srgbClr val="092454"/>
+                  <a:srgbClr val="1C2E4A"/>
                 </a:solidFill>
                 <a:latin typeface="Helvetica Neue"/>
                 <a:ea typeface="Helvetica Neue"/>
@@ -7021,7 +7053,7 @@
           <p:cNvPr id="17" name="">
             <a:extLst xmlns:a="http://schemas.openxmlformats.org/drawingml/2006/main">
               <a:ext uri="{FF2B5EF4-FFF2-40B4-BE49-F238E27FC236}">
-                <a16:creationId xmlns:a16="http://schemas.microsoft.com/office/drawing/2014/main" id="{26BEAA77-7AB6-4501-BB80-AA5517B01B32}"/>
+                <a16:creationId xmlns:a16="http://schemas.microsoft.com/office/drawing/2014/main" id="{77FD1D97-029D-40EC-8F00-588203680793}"/>
               </a:ext>
             </a:extLst>
           </p:cNvPr>
@@ -7041,7 +7073,7 @@
             </a:avLst>
           </a:prstGeom>
           <a:solidFill xmlns:a="http://schemas.openxmlformats.org/drawingml/2006/main">
-            <a:srgbClr val="092454"/>
+            <a:srgbClr val="1C2E4A"/>
           </a:solidFill>
           <a:ln xmlns:a="http://schemas.openxmlformats.org/drawingml/2006/main" w="0">
             <a:noFill/>
@@ -7053,7 +7085,7 @@
           <p:cNvPr id="18" name="">
             <a:extLst xmlns:a="http://schemas.openxmlformats.org/drawingml/2006/main">
               <a:ext uri="{FF2B5EF4-FFF2-40B4-BE49-F238E27FC236}">
-                <a16:creationId xmlns:a16="http://schemas.microsoft.com/office/drawing/2014/main" id="{0B339DB2-74A8-4096-B258-C27FE46B398C}"/>
+                <a16:creationId xmlns:a16="http://schemas.microsoft.com/office/drawing/2014/main" id="{2DAB7D68-6953-4E02-9733-78DCFC557FF0}"/>
               </a:ext>
             </a:extLst>
           </p:cNvPr>
@@ -7084,7 +7116,7 @@
             <a:pPr algn="l">
               <a:defRPr sz="1050" b="1">
                 <a:solidFill>
-                  <a:srgbClr val="FFD43B"/>
+                  <a:srgbClr val="D1CFC9"/>
                 </a:solidFill>
                 <a:latin typeface="Helvetica Neue"/>
                 <a:ea typeface="Helvetica Neue"/>
@@ -7094,7 +7126,7 @@
             <a:r>
               <a:rPr sz="1050" b="1">
                 <a:solidFill>
-                  <a:srgbClr val="FFD43B"/>
+                  <a:srgbClr val="D1CFC9"/>
                 </a:solidFill>
                 <a:latin typeface="Helvetica Neue"/>
                 <a:ea typeface="Helvetica Neue"/>
@@ -7110,7 +7142,7 @@
           <p:cNvPr id="19" name="">
             <a:extLst xmlns:a="http://schemas.openxmlformats.org/drawingml/2006/main">
               <a:ext uri="{FF2B5EF4-FFF2-40B4-BE49-F238E27FC236}">
-                <a16:creationId xmlns:a16="http://schemas.microsoft.com/office/drawing/2014/main" id="{220A8B2D-AC93-4C65-BBE3-C6C459663027}"/>
+                <a16:creationId xmlns:a16="http://schemas.microsoft.com/office/drawing/2014/main" id="{4D11366A-9DF9-435F-80BC-077BEEF19E61}"/>
               </a:ext>
             </a:extLst>
           </p:cNvPr>
@@ -7167,7 +7199,7 @@
           <p:cNvPr id="20" name="">
             <a:extLst xmlns:a="http://schemas.openxmlformats.org/drawingml/2006/main">
               <a:ext uri="{FF2B5EF4-FFF2-40B4-BE49-F238E27FC236}">
-                <a16:creationId xmlns:a16="http://schemas.microsoft.com/office/drawing/2014/main" id="{44DA9F8E-1086-491B-BD14-342EC752F393}"/>
+                <a16:creationId xmlns:a16="http://schemas.microsoft.com/office/drawing/2014/main" id="{93AEEA2E-B47E-426E-A7A6-72D11850C563}"/>
               </a:ext>
             </a:extLst>
           </p:cNvPr>
@@ -7198,7 +7230,7 @@
             <a:pPr algn="l">
               <a:defRPr sz="1125" b="0">
                 <a:solidFill>
-                  <a:srgbClr val="BFE6FF"/>
+                  <a:srgbClr val="BDC4D4"/>
                 </a:solidFill>
                 <a:latin typeface="Helvetica Neue"/>
                 <a:ea typeface="Helvetica Neue"/>
@@ -7208,7 +7240,7 @@
             <a:r>
               <a:rPr sz="1125" b="0">
                 <a:solidFill>
-                  <a:srgbClr val="BFE6FF"/>
+                  <a:srgbClr val="BDC4D4"/>
                 </a:solidFill>
                 <a:latin typeface="Helvetica Neue"/>
                 <a:ea typeface="Helvetica Neue"/>
@@ -7224,7 +7256,7 @@
           <p:cNvPr id="21" name="">
             <a:extLst xmlns:a="http://schemas.openxmlformats.org/drawingml/2006/main">
               <a:ext uri="{FF2B5EF4-FFF2-40B4-BE49-F238E27FC236}">
-                <a16:creationId xmlns:a16="http://schemas.microsoft.com/office/drawing/2014/main" id="{BE00CE8A-F99A-4555-9C1E-933A318313EE}"/>
+                <a16:creationId xmlns:a16="http://schemas.microsoft.com/office/drawing/2014/main" id="{55F9206F-BC77-4C68-963F-D89F253F465C}"/>
               </a:ext>
             </a:extLst>
           </p:cNvPr>
@@ -7242,7 +7274,7 @@
             <a:avLst/>
           </a:prstGeom>
           <a:solidFill xmlns:a="http://schemas.openxmlformats.org/drawingml/2006/main">
-            <a:srgbClr val="D8E5F2"/>
+            <a:srgbClr val="BDC4D4"/>
           </a:solidFill>
           <a:ln xmlns:a="http://schemas.openxmlformats.org/drawingml/2006/main" w="0">
             <a:noFill/>
@@ -7254,7 +7286,7 @@
           <p:cNvPr id="22" name="">
             <a:extLst xmlns:a="http://schemas.openxmlformats.org/drawingml/2006/main">
               <a:ext uri="{FF2B5EF4-FFF2-40B4-BE49-F238E27FC236}">
-                <a16:creationId xmlns:a16="http://schemas.microsoft.com/office/drawing/2014/main" id="{0D869E8E-AA09-4B8A-BA6A-8E530227EB2F}"/>
+                <a16:creationId xmlns:a16="http://schemas.microsoft.com/office/drawing/2014/main" id="{FA3BDDFC-755F-414B-B14B-92DB0CEDEFE4}"/>
               </a:ext>
             </a:extLst>
           </p:cNvPr>
@@ -7285,7 +7317,7 @@
             <a:pPr algn="l">
               <a:defRPr sz="750" b="0">
                 <a:solidFill>
-                  <a:srgbClr val="61718A"/>
+                  <a:srgbClr val="52677D"/>
                 </a:solidFill>
                 <a:latin typeface="Helvetica Neue"/>
                 <a:ea typeface="Helvetica Neue"/>
@@ -7295,7 +7327,7 @@
             <a:r>
               <a:rPr sz="750" b="0">
                 <a:solidFill>
-                  <a:srgbClr val="61718A"/>
+                  <a:srgbClr val="52677D"/>
                 </a:solidFill>
                 <a:latin typeface="Helvetica Neue"/>
                 <a:ea typeface="Helvetica Neue"/>
@@ -7311,7 +7343,7 @@
           <p:cNvPr id="23" name="">
             <a:extLst xmlns:a="http://schemas.openxmlformats.org/drawingml/2006/main">
               <a:ext uri="{FF2B5EF4-FFF2-40B4-BE49-F238E27FC236}">
-                <a16:creationId xmlns:a16="http://schemas.microsoft.com/office/drawing/2014/main" id="{E6626305-2C71-4486-958A-E0D2581EF8F7}"/>
+                <a16:creationId xmlns:a16="http://schemas.microsoft.com/office/drawing/2014/main" id="{FB7D7800-29D8-40E8-95EF-5908793C6BC6}"/>
               </a:ext>
             </a:extLst>
           </p:cNvPr>
@@ -7342,7 +7374,7 @@
             <a:pPr algn="r">
               <a:defRPr sz="825" b="1">
                 <a:solidFill>
-                  <a:srgbClr val="2563EB"/>
+                  <a:srgbClr val="52677D"/>
                 </a:solidFill>
                 <a:latin typeface="Helvetica Neue"/>
                 <a:ea typeface="Helvetica Neue"/>
@@ -7352,7 +7384,7 @@
             <a:r>
               <a:rPr sz="825" b="1">
                 <a:solidFill>
-                  <a:srgbClr val="2563EB"/>
+                  <a:srgbClr val="52677D"/>
                 </a:solidFill>
                 <a:latin typeface="Helvetica Neue"/>
                 <a:ea typeface="Helvetica Neue"/>
@@ -7366,7 +7398,7 @@
     </p:spTree>
     <p:extLst>
       <p:ext uri="{BB962C8B-B14F-4D97-AF65-F5344CB8AC3E}">
-        <p14:creationId xmlns:p14="http://schemas.microsoft.com/office/powerpoint/2010/main" val="990113846"/>
+        <p14:creationId xmlns:p14="http://schemas.microsoft.com/office/powerpoint/2010/main" val="151670049"/>
       </p:ext>
     </p:extLst>
   </p:cSld>
@@ -7397,7 +7429,7 @@
           <p:cNvPr id="24" name="">
             <a:extLst xmlns:a="http://schemas.openxmlformats.org/drawingml/2006/main">
               <a:ext uri="{FF2B5EF4-FFF2-40B4-BE49-F238E27FC236}">
-                <a16:creationId xmlns:a16="http://schemas.microsoft.com/office/drawing/2014/main" id="{7F9927DC-27B4-455D-B1EB-4B1CAFA0BBF6}"/>
+                <a16:creationId xmlns:a16="http://schemas.microsoft.com/office/drawing/2014/main" id="{0A4C079A-CE94-4705-9CCD-2F433A174B4C}"/>
               </a:ext>
             </a:extLst>
           </p:cNvPr>
@@ -7415,7 +7447,7 @@
             <a:avLst/>
           </a:prstGeom>
           <a:solidFill xmlns:a="http://schemas.openxmlformats.org/drawingml/2006/main">
-            <a:srgbClr val="6C5CE7"/>
+            <a:srgbClr val="1C2E4A"/>
           </a:solidFill>
           <a:ln xmlns:a="http://schemas.openxmlformats.org/drawingml/2006/main" w="0">
             <a:noFill/>
@@ -7427,7 +7459,7 @@
           <p:cNvPr id="2" name="">
             <a:extLst xmlns:a="http://schemas.openxmlformats.org/drawingml/2006/main">
               <a:ext uri="{FF2B5EF4-FFF2-40B4-BE49-F238E27FC236}">
-                <a16:creationId xmlns:a16="http://schemas.microsoft.com/office/drawing/2014/main" id="{51C02CA2-839B-4B6B-8937-5CDA03B66C8E}"/>
+                <a16:creationId xmlns:a16="http://schemas.microsoft.com/office/drawing/2014/main" id="{4347A430-FBA0-45F8-9EF9-5CEA9DC4ECA8}"/>
               </a:ext>
             </a:extLst>
           </p:cNvPr>
@@ -7458,7 +7490,7 @@
             <a:pPr algn="l">
               <a:defRPr sz="1125" b="1">
                 <a:solidFill>
-                  <a:srgbClr val="2563EB"/>
+                  <a:srgbClr val="52677D"/>
                 </a:solidFill>
                 <a:latin typeface="Helvetica Neue"/>
                 <a:ea typeface="Helvetica Neue"/>
@@ -7468,7 +7500,7 @@
             <a:r>
               <a:rPr sz="1125" b="1">
                 <a:solidFill>
-                  <a:srgbClr val="2563EB"/>
+                  <a:srgbClr val="52677D"/>
                 </a:solidFill>
                 <a:latin typeface="Helvetica Neue"/>
                 <a:ea typeface="Helvetica Neue"/>
@@ -7484,7 +7516,7 @@
           <p:cNvPr id="3" name="">
             <a:extLst xmlns:a="http://schemas.openxmlformats.org/drawingml/2006/main">
               <a:ext uri="{FF2B5EF4-FFF2-40B4-BE49-F238E27FC236}">
-                <a16:creationId xmlns:a16="http://schemas.microsoft.com/office/drawing/2014/main" id="{58711D81-2223-4256-8B78-BE30C237E666}"/>
+                <a16:creationId xmlns:a16="http://schemas.microsoft.com/office/drawing/2014/main" id="{10ACE228-2F2E-45A5-AE14-BD576E83609A}"/>
               </a:ext>
             </a:extLst>
           </p:cNvPr>
@@ -7504,7 +7536,7 @@
             </a:avLst>
           </a:prstGeom>
           <a:solidFill xmlns:a="http://schemas.openxmlformats.org/drawingml/2006/main">
-            <a:srgbClr val="FFD43B"/>
+            <a:srgbClr val="D1CFC9"/>
           </a:solidFill>
           <a:ln xmlns:a="http://schemas.openxmlformats.org/drawingml/2006/main" w="0">
             <a:noFill/>
@@ -7516,7 +7548,7 @@
           <p:cNvPr id="4" name="">
             <a:extLst xmlns:a="http://schemas.openxmlformats.org/drawingml/2006/main">
               <a:ext uri="{FF2B5EF4-FFF2-40B4-BE49-F238E27FC236}">
-                <a16:creationId xmlns:a16="http://schemas.microsoft.com/office/drawing/2014/main" id="{590EE767-780D-4C7D-88BD-7F012FA54E70}"/>
+                <a16:creationId xmlns:a16="http://schemas.microsoft.com/office/drawing/2014/main" id="{601CB8D5-1472-4F44-AC6D-B0121DA8957F}"/>
               </a:ext>
             </a:extLst>
           </p:cNvPr>
@@ -7547,7 +7579,7 @@
             <a:pPr algn="ctr">
               <a:defRPr sz="1275" b="1">
                 <a:solidFill>
-                  <a:srgbClr val="092454"/>
+                  <a:srgbClr val="1C2E4A"/>
                 </a:solidFill>
                 <a:latin typeface="Helvetica Neue"/>
                 <a:ea typeface="Helvetica Neue"/>
@@ -7557,7 +7589,7 @@
             <a:r>
               <a:rPr sz="1275" b="1">
                 <a:solidFill>
-                  <a:srgbClr val="092454"/>
+                  <a:srgbClr val="1C2E4A"/>
                 </a:solidFill>
                 <a:latin typeface="Helvetica Neue"/>
                 <a:ea typeface="Helvetica Neue"/>
@@ -7573,7 +7605,7 @@
           <p:cNvPr id="5" name="">
             <a:extLst xmlns:a="http://schemas.openxmlformats.org/drawingml/2006/main">
               <a:ext uri="{FF2B5EF4-FFF2-40B4-BE49-F238E27FC236}">
-                <a16:creationId xmlns:a16="http://schemas.microsoft.com/office/drawing/2014/main" id="{C19FD0B1-FD8A-48F9-B293-D4D086E37A76}"/>
+                <a16:creationId xmlns:a16="http://schemas.microsoft.com/office/drawing/2014/main" id="{EE990529-0761-48B6-BB9D-A1ED3E11FE37}"/>
               </a:ext>
             </a:extLst>
           </p:cNvPr>
@@ -7604,7 +7636,7 @@
             <a:pPr algn="l">
               <a:defRPr sz="2550" b="1">
                 <a:solidFill>
-                  <a:srgbClr val="092454"/>
+                  <a:srgbClr val="1C2E4A"/>
                 </a:solidFill>
                 <a:latin typeface="Helvetica Neue"/>
                 <a:ea typeface="Helvetica Neue"/>
@@ -7614,7 +7646,7 @@
             <a:r>
               <a:rPr sz="2550" b="1">
                 <a:solidFill>
-                  <a:srgbClr val="092454"/>
+                  <a:srgbClr val="1C2E4A"/>
                 </a:solidFill>
                 <a:latin typeface="Helvetica Neue"/>
                 <a:ea typeface="Helvetica Neue"/>
@@ -7630,7 +7662,7 @@
           <p:cNvPr id="6" name="">
             <a:extLst xmlns:a="http://schemas.openxmlformats.org/drawingml/2006/main">
               <a:ext uri="{FF2B5EF4-FFF2-40B4-BE49-F238E27FC236}">
-                <a16:creationId xmlns:a16="http://schemas.microsoft.com/office/drawing/2014/main" id="{92D6CBFE-35D0-4277-8031-DFFCF21F7A9C}"/>
+                <a16:creationId xmlns:a16="http://schemas.microsoft.com/office/drawing/2014/main" id="{0FB72C43-6B71-46BC-8607-4987FD732372}"/>
               </a:ext>
             </a:extLst>
           </p:cNvPr>
@@ -7650,7 +7682,7 @@
             </a:avLst>
           </a:prstGeom>
           <a:solidFill xmlns:a="http://schemas.openxmlformats.org/drawingml/2006/main">
-            <a:srgbClr val="EEF7FF"/>
+            <a:srgbClr val="D1CFC9"/>
           </a:solidFill>
           <a:ln xmlns:a="http://schemas.openxmlformats.org/drawingml/2006/main" w="0">
             <a:noFill/>
@@ -7662,7 +7694,7 @@
           <p:cNvPr id="7" name="">
             <a:extLst xmlns:a="http://schemas.openxmlformats.org/drawingml/2006/main">
               <a:ext uri="{FF2B5EF4-FFF2-40B4-BE49-F238E27FC236}">
-                <a16:creationId xmlns:a16="http://schemas.microsoft.com/office/drawing/2014/main" id="{6DBE18D9-A19B-42AB-802E-00D55324A086}"/>
+                <a16:creationId xmlns:a16="http://schemas.microsoft.com/office/drawing/2014/main" id="{F8157CF5-3847-40B1-A5EF-67B8380EDCF2}"/>
               </a:ext>
             </a:extLst>
           </p:cNvPr>
@@ -7693,7 +7725,7 @@
             <a:pPr algn="ctr">
               <a:defRPr sz="1350" b="1">
                 <a:solidFill>
-                  <a:srgbClr val="2563EB"/>
+                  <a:srgbClr val="52677D"/>
                 </a:solidFill>
                 <a:latin typeface="Helvetica Neue"/>
                 <a:ea typeface="Helvetica Neue"/>
@@ -7703,7 +7735,7 @@
             <a:r>
               <a:rPr sz="1350" b="1">
                 <a:solidFill>
-                  <a:srgbClr val="2563EB"/>
+                  <a:srgbClr val="52677D"/>
                 </a:solidFill>
                 <a:latin typeface="Helvetica Neue"/>
                 <a:ea typeface="Helvetica Neue"/>
@@ -7719,7 +7751,7 @@
           <p:cNvPr id="8" name="">
             <a:extLst xmlns:a="http://schemas.openxmlformats.org/drawingml/2006/main">
               <a:ext uri="{FF2B5EF4-FFF2-40B4-BE49-F238E27FC236}">
-                <a16:creationId xmlns:a16="http://schemas.microsoft.com/office/drawing/2014/main" id="{8FD54D94-CE80-4D17-AAEC-2C77679C2C65}"/>
+                <a16:creationId xmlns:a16="http://schemas.microsoft.com/office/drawing/2014/main" id="{4B073FEB-7081-477A-B5C5-5F697227A960}"/>
               </a:ext>
             </a:extLst>
           </p:cNvPr>
@@ -7750,7 +7782,7 @@
             <a:pPr algn="l">
               <a:defRPr sz="1575" b="0">
                 <a:solidFill>
-                  <a:srgbClr val="10213D"/>
+                  <a:srgbClr val="0F1A2B"/>
                 </a:solidFill>
                 <a:latin typeface="Helvetica Neue"/>
                 <a:ea typeface="Helvetica Neue"/>
@@ -7760,7 +7792,7 @@
             <a:r>
               <a:rPr sz="1575" b="0">
                 <a:solidFill>
-                  <a:srgbClr val="10213D"/>
+                  <a:srgbClr val="0F1A2B"/>
                 </a:solidFill>
                 <a:latin typeface="Helvetica Neue"/>
                 <a:ea typeface="Helvetica Neue"/>
@@ -7776,7 +7808,7 @@
           <p:cNvPr id="9" name="">
             <a:extLst xmlns:a="http://schemas.openxmlformats.org/drawingml/2006/main">
               <a:ext uri="{FF2B5EF4-FFF2-40B4-BE49-F238E27FC236}">
-                <a16:creationId xmlns:a16="http://schemas.microsoft.com/office/drawing/2014/main" id="{5B0663CB-4C29-4CB8-A767-626994539C72}"/>
+                <a16:creationId xmlns:a16="http://schemas.microsoft.com/office/drawing/2014/main" id="{0F69CCF1-71A5-4E84-B21C-37D63200BB13}"/>
               </a:ext>
             </a:extLst>
           </p:cNvPr>
@@ -7796,7 +7828,7 @@
             </a:avLst>
           </a:prstGeom>
           <a:solidFill xmlns:a="http://schemas.openxmlformats.org/drawingml/2006/main">
-            <a:srgbClr val="EEF7FF"/>
+            <a:srgbClr val="D1CFC9"/>
           </a:solidFill>
           <a:ln xmlns:a="http://schemas.openxmlformats.org/drawingml/2006/main" w="0">
             <a:noFill/>
@@ -7808,7 +7840,7 @@
           <p:cNvPr id="10" name="">
             <a:extLst xmlns:a="http://schemas.openxmlformats.org/drawingml/2006/main">
               <a:ext uri="{FF2B5EF4-FFF2-40B4-BE49-F238E27FC236}">
-                <a16:creationId xmlns:a16="http://schemas.microsoft.com/office/drawing/2014/main" id="{42B24A12-5E37-4733-B9EE-E64214074AF0}"/>
+                <a16:creationId xmlns:a16="http://schemas.microsoft.com/office/drawing/2014/main" id="{46BCA80D-56FB-4648-9FC3-7FB4DF7298E4}"/>
               </a:ext>
             </a:extLst>
           </p:cNvPr>
@@ -7839,7 +7871,7 @@
             <a:pPr algn="ctr">
               <a:defRPr sz="1350" b="1">
                 <a:solidFill>
-                  <a:srgbClr val="2563EB"/>
+                  <a:srgbClr val="52677D"/>
                 </a:solidFill>
                 <a:latin typeface="Helvetica Neue"/>
                 <a:ea typeface="Helvetica Neue"/>
@@ -7849,7 +7881,7 @@
             <a:r>
               <a:rPr sz="1350" b="1">
                 <a:solidFill>
-                  <a:srgbClr val="2563EB"/>
+                  <a:srgbClr val="52677D"/>
                 </a:solidFill>
                 <a:latin typeface="Helvetica Neue"/>
                 <a:ea typeface="Helvetica Neue"/>
@@ -7865,7 +7897,7 @@
           <p:cNvPr id="11" name="">
             <a:extLst xmlns:a="http://schemas.openxmlformats.org/drawingml/2006/main">
               <a:ext uri="{FF2B5EF4-FFF2-40B4-BE49-F238E27FC236}">
-                <a16:creationId xmlns:a16="http://schemas.microsoft.com/office/drawing/2014/main" id="{D9D40EE4-A6B2-4443-837F-067156997F11}"/>
+                <a16:creationId xmlns:a16="http://schemas.microsoft.com/office/drawing/2014/main" id="{B7CCDF20-ACA9-4F41-8A58-61D57EBE0BFA}"/>
               </a:ext>
             </a:extLst>
           </p:cNvPr>
@@ -7896,7 +7928,7 @@
             <a:pPr algn="l">
               <a:defRPr sz="1575" b="0">
                 <a:solidFill>
-                  <a:srgbClr val="10213D"/>
+                  <a:srgbClr val="0F1A2B"/>
                 </a:solidFill>
                 <a:latin typeface="Helvetica Neue"/>
                 <a:ea typeface="Helvetica Neue"/>
@@ -7906,7 +7938,7 @@
             <a:r>
               <a:rPr sz="1575" b="0">
                 <a:solidFill>
-                  <a:srgbClr val="10213D"/>
+                  <a:srgbClr val="0F1A2B"/>
                 </a:solidFill>
                 <a:latin typeface="Helvetica Neue"/>
                 <a:ea typeface="Helvetica Neue"/>
@@ -7922,7 +7954,7 @@
           <p:cNvPr id="12" name="">
             <a:extLst xmlns:a="http://schemas.openxmlformats.org/drawingml/2006/main">
               <a:ext uri="{FF2B5EF4-FFF2-40B4-BE49-F238E27FC236}">
-                <a16:creationId xmlns:a16="http://schemas.microsoft.com/office/drawing/2014/main" id="{E9A41CE7-CF26-4A1B-A55C-F1309E4F4350}"/>
+                <a16:creationId xmlns:a16="http://schemas.microsoft.com/office/drawing/2014/main" id="{9E3A6B3D-3405-442A-ACC5-D1A3271E2A51}"/>
               </a:ext>
             </a:extLst>
           </p:cNvPr>
@@ -7942,7 +7974,7 @@
             </a:avLst>
           </a:prstGeom>
           <a:solidFill xmlns:a="http://schemas.openxmlformats.org/drawingml/2006/main">
-            <a:srgbClr val="EEF7FF"/>
+            <a:srgbClr val="D1CFC9"/>
           </a:solidFill>
           <a:ln xmlns:a="http://schemas.openxmlformats.org/drawingml/2006/main" w="0">
             <a:noFill/>
@@ -7954,7 +7986,7 @@
           <p:cNvPr id="13" name="">
             <a:extLst xmlns:a="http://schemas.openxmlformats.org/drawingml/2006/main">
               <a:ext uri="{FF2B5EF4-FFF2-40B4-BE49-F238E27FC236}">
-                <a16:creationId xmlns:a16="http://schemas.microsoft.com/office/drawing/2014/main" id="{FB747F0E-1DEE-494E-9970-38004F91F4F8}"/>
+                <a16:creationId xmlns:a16="http://schemas.microsoft.com/office/drawing/2014/main" id="{A41C5CD4-8529-4426-95EE-F0F4DEF2371D}"/>
               </a:ext>
             </a:extLst>
           </p:cNvPr>
@@ -7985,7 +8017,7 @@
             <a:pPr algn="ctr">
               <a:defRPr sz="1350" b="1">
                 <a:solidFill>
-                  <a:srgbClr val="2563EB"/>
+                  <a:srgbClr val="52677D"/>
                 </a:solidFill>
                 <a:latin typeface="Helvetica Neue"/>
                 <a:ea typeface="Helvetica Neue"/>
@@ -7995,7 +8027,7 @@
             <a:r>
               <a:rPr sz="1350" b="1">
                 <a:solidFill>
-                  <a:srgbClr val="2563EB"/>
+                  <a:srgbClr val="52677D"/>
                 </a:solidFill>
                 <a:latin typeface="Helvetica Neue"/>
                 <a:ea typeface="Helvetica Neue"/>
@@ -8011,7 +8043,7 @@
           <p:cNvPr id="14" name="">
             <a:extLst xmlns:a="http://schemas.openxmlformats.org/drawingml/2006/main">
               <a:ext uri="{FF2B5EF4-FFF2-40B4-BE49-F238E27FC236}">
-                <a16:creationId xmlns:a16="http://schemas.microsoft.com/office/drawing/2014/main" id="{C9B2007E-A311-4034-B4EA-1550334CA760}"/>
+                <a16:creationId xmlns:a16="http://schemas.microsoft.com/office/drawing/2014/main" id="{DF6A7924-BBAE-4BB5-9B51-E72449173FA2}"/>
               </a:ext>
             </a:extLst>
           </p:cNvPr>
@@ -8042,7 +8074,7 @@
             <a:pPr algn="l">
               <a:defRPr sz="1575" b="0">
                 <a:solidFill>
-                  <a:srgbClr val="10213D"/>
+                  <a:srgbClr val="0F1A2B"/>
                 </a:solidFill>
                 <a:latin typeface="Helvetica Neue"/>
                 <a:ea typeface="Helvetica Neue"/>
@@ -8052,7 +8084,7 @@
             <a:r>
               <a:rPr sz="1575" b="0">
                 <a:solidFill>
-                  <a:srgbClr val="10213D"/>
+                  <a:srgbClr val="0F1A2B"/>
                 </a:solidFill>
                 <a:latin typeface="Helvetica Neue"/>
                 <a:ea typeface="Helvetica Neue"/>
@@ -8068,7 +8100,7 @@
           <p:cNvPr id="15" name="">
             <a:extLst xmlns:a="http://schemas.openxmlformats.org/drawingml/2006/main">
               <a:ext uri="{FF2B5EF4-FFF2-40B4-BE49-F238E27FC236}">
-                <a16:creationId xmlns:a16="http://schemas.microsoft.com/office/drawing/2014/main" id="{CA211A50-F430-4AA9-9F90-589E126DFC6F}"/>
+                <a16:creationId xmlns:a16="http://schemas.microsoft.com/office/drawing/2014/main" id="{F543DC54-80A7-4238-8DE1-7CF32817BEEE}"/>
               </a:ext>
             </a:extLst>
           </p:cNvPr>
@@ -8088,7 +8120,7 @@
             </a:avLst>
           </a:prstGeom>
           <a:solidFill xmlns:a="http://schemas.openxmlformats.org/drawingml/2006/main">
-            <a:srgbClr val="EEF7FF"/>
+            <a:srgbClr val="D1CFC9"/>
           </a:solidFill>
           <a:ln xmlns:a="http://schemas.openxmlformats.org/drawingml/2006/main" w="0">
             <a:noFill/>
@@ -8100,7 +8132,7 @@
           <p:cNvPr id="16" name="">
             <a:extLst xmlns:a="http://schemas.openxmlformats.org/drawingml/2006/main">
               <a:ext uri="{FF2B5EF4-FFF2-40B4-BE49-F238E27FC236}">
-                <a16:creationId xmlns:a16="http://schemas.microsoft.com/office/drawing/2014/main" id="{230D3C3D-64C1-4A0A-9963-5FB799891421}"/>
+                <a16:creationId xmlns:a16="http://schemas.microsoft.com/office/drawing/2014/main" id="{F97AD711-45BD-4A25-B6D5-DF0E13E3883B}"/>
               </a:ext>
             </a:extLst>
           </p:cNvPr>
@@ -8131,7 +8163,7 @@
             <a:pPr algn="l">
               <a:defRPr sz="1125" b="0">
                 <a:solidFill>
-                  <a:srgbClr val="092454"/>
+                  <a:srgbClr val="1C2E4A"/>
                 </a:solidFill>
                 <a:latin typeface="Helvetica Neue"/>
                 <a:ea typeface="Helvetica Neue"/>
@@ -8141,7 +8173,7 @@
             <a:r>
               <a:rPr sz="1125" b="0">
                 <a:solidFill>
-                  <a:srgbClr val="092454"/>
+                  <a:srgbClr val="1C2E4A"/>
                 </a:solidFill>
                 <a:latin typeface="Helvetica Neue"/>
                 <a:ea typeface="Helvetica Neue"/>
@@ -8157,7 +8189,7 @@
           <p:cNvPr id="17" name="">
             <a:extLst xmlns:a="http://schemas.openxmlformats.org/drawingml/2006/main">
               <a:ext uri="{FF2B5EF4-FFF2-40B4-BE49-F238E27FC236}">
-                <a16:creationId xmlns:a16="http://schemas.microsoft.com/office/drawing/2014/main" id="{EE5E9019-271F-4B76-B75C-3A6940108CC4}"/>
+                <a16:creationId xmlns:a16="http://schemas.microsoft.com/office/drawing/2014/main" id="{24B0AC5E-0933-4784-8F4B-1A84A17ED5A7}"/>
               </a:ext>
             </a:extLst>
           </p:cNvPr>
@@ -8177,7 +8209,7 @@
             </a:avLst>
           </a:prstGeom>
           <a:solidFill xmlns:a="http://schemas.openxmlformats.org/drawingml/2006/main">
-            <a:srgbClr val="092454"/>
+            <a:srgbClr val="1C2E4A"/>
           </a:solidFill>
           <a:ln xmlns:a="http://schemas.openxmlformats.org/drawingml/2006/main" w="0">
             <a:noFill/>
@@ -8189,7 +8221,7 @@
           <p:cNvPr id="18" name="">
             <a:extLst xmlns:a="http://schemas.openxmlformats.org/drawingml/2006/main">
               <a:ext uri="{FF2B5EF4-FFF2-40B4-BE49-F238E27FC236}">
-                <a16:creationId xmlns:a16="http://schemas.microsoft.com/office/drawing/2014/main" id="{1253FEFF-E5B1-4073-94DF-688BC28A4D5C}"/>
+                <a16:creationId xmlns:a16="http://schemas.microsoft.com/office/drawing/2014/main" id="{6364B4A6-67EA-430F-AD4C-A82E72824A34}"/>
               </a:ext>
             </a:extLst>
           </p:cNvPr>
@@ -8220,7 +8252,7 @@
             <a:pPr algn="l">
               <a:defRPr sz="1050" b="1">
                 <a:solidFill>
-                  <a:srgbClr val="FFD43B"/>
+                  <a:srgbClr val="D1CFC9"/>
                 </a:solidFill>
                 <a:latin typeface="Helvetica Neue"/>
                 <a:ea typeface="Helvetica Neue"/>
@@ -8230,7 +8262,7 @@
             <a:r>
               <a:rPr sz="1050" b="1">
                 <a:solidFill>
-                  <a:srgbClr val="FFD43B"/>
+                  <a:srgbClr val="D1CFC9"/>
                 </a:solidFill>
                 <a:latin typeface="Helvetica Neue"/>
                 <a:ea typeface="Helvetica Neue"/>
@@ -8246,7 +8278,7 @@
           <p:cNvPr id="19" name="">
             <a:extLst xmlns:a="http://schemas.openxmlformats.org/drawingml/2006/main">
               <a:ext uri="{FF2B5EF4-FFF2-40B4-BE49-F238E27FC236}">
-                <a16:creationId xmlns:a16="http://schemas.microsoft.com/office/drawing/2014/main" id="{0130976F-396B-403E-9DAA-349AB2927FC2}"/>
+                <a16:creationId xmlns:a16="http://schemas.microsoft.com/office/drawing/2014/main" id="{5403A486-A338-4753-9436-0056767327CE}"/>
               </a:ext>
             </a:extLst>
           </p:cNvPr>
@@ -8303,7 +8335,7 @@
           <p:cNvPr id="20" name="">
             <a:extLst xmlns:a="http://schemas.openxmlformats.org/drawingml/2006/main">
               <a:ext uri="{FF2B5EF4-FFF2-40B4-BE49-F238E27FC236}">
-                <a16:creationId xmlns:a16="http://schemas.microsoft.com/office/drawing/2014/main" id="{4222220F-86E8-4BC6-989A-0BA8B915714F}"/>
+                <a16:creationId xmlns:a16="http://schemas.microsoft.com/office/drawing/2014/main" id="{C9189ADD-5C30-48DC-95AE-E773B58CB7D3}"/>
               </a:ext>
             </a:extLst>
           </p:cNvPr>
@@ -8334,7 +8366,7 @@
             <a:pPr algn="l">
               <a:defRPr sz="1125" b="0">
                 <a:solidFill>
-                  <a:srgbClr val="BFE6FF"/>
+                  <a:srgbClr val="BDC4D4"/>
                 </a:solidFill>
                 <a:latin typeface="Helvetica Neue"/>
                 <a:ea typeface="Helvetica Neue"/>
@@ -8344,7 +8376,7 @@
             <a:r>
               <a:rPr sz="1125" b="0">
                 <a:solidFill>
-                  <a:srgbClr val="BFE6FF"/>
+                  <a:srgbClr val="BDC4D4"/>
                 </a:solidFill>
                 <a:latin typeface="Helvetica Neue"/>
                 <a:ea typeface="Helvetica Neue"/>
@@ -8360,7 +8392,7 @@
           <p:cNvPr id="21" name="">
             <a:extLst xmlns:a="http://schemas.openxmlformats.org/drawingml/2006/main">
               <a:ext uri="{FF2B5EF4-FFF2-40B4-BE49-F238E27FC236}">
-                <a16:creationId xmlns:a16="http://schemas.microsoft.com/office/drawing/2014/main" id="{663D77B7-B1AD-4DA6-B5D9-70F0C6D6367B}"/>
+                <a16:creationId xmlns:a16="http://schemas.microsoft.com/office/drawing/2014/main" id="{B4876838-21E0-4F4B-92B6-7931347F4020}"/>
               </a:ext>
             </a:extLst>
           </p:cNvPr>
@@ -8378,7 +8410,7 @@
             <a:avLst/>
           </a:prstGeom>
           <a:solidFill xmlns:a="http://schemas.openxmlformats.org/drawingml/2006/main">
-            <a:srgbClr val="D8E5F2"/>
+            <a:srgbClr val="BDC4D4"/>
           </a:solidFill>
           <a:ln xmlns:a="http://schemas.openxmlformats.org/drawingml/2006/main" w="0">
             <a:noFill/>
@@ -8390,7 +8422,7 @@
           <p:cNvPr id="22" name="">
             <a:extLst xmlns:a="http://schemas.openxmlformats.org/drawingml/2006/main">
               <a:ext uri="{FF2B5EF4-FFF2-40B4-BE49-F238E27FC236}">
-                <a16:creationId xmlns:a16="http://schemas.microsoft.com/office/drawing/2014/main" id="{1AB97B14-832A-4257-A088-03C8A0CDBD78}"/>
+                <a16:creationId xmlns:a16="http://schemas.microsoft.com/office/drawing/2014/main" id="{36833A7A-CE2C-4C67-9A81-FB154914B84B}"/>
               </a:ext>
             </a:extLst>
           </p:cNvPr>
@@ -8421,7 +8453,7 @@
             <a:pPr algn="l">
               <a:defRPr sz="750" b="0">
                 <a:solidFill>
-                  <a:srgbClr val="61718A"/>
+                  <a:srgbClr val="52677D"/>
                 </a:solidFill>
                 <a:latin typeface="Helvetica Neue"/>
                 <a:ea typeface="Helvetica Neue"/>
@@ -8431,7 +8463,7 @@
             <a:r>
               <a:rPr sz="750" b="0">
                 <a:solidFill>
-                  <a:srgbClr val="61718A"/>
+                  <a:srgbClr val="52677D"/>
                 </a:solidFill>
                 <a:latin typeface="Helvetica Neue"/>
                 <a:ea typeface="Helvetica Neue"/>
@@ -8447,7 +8479,7 @@
           <p:cNvPr id="23" name="">
             <a:extLst xmlns:a="http://schemas.openxmlformats.org/drawingml/2006/main">
               <a:ext uri="{FF2B5EF4-FFF2-40B4-BE49-F238E27FC236}">
-                <a16:creationId xmlns:a16="http://schemas.microsoft.com/office/drawing/2014/main" id="{5D7CF53A-A5A9-4577-9799-209E8064A2FE}"/>
+                <a16:creationId xmlns:a16="http://schemas.microsoft.com/office/drawing/2014/main" id="{83BCC70F-14AE-40B1-9EF5-5814854F0C44}"/>
               </a:ext>
             </a:extLst>
           </p:cNvPr>
@@ -8478,7 +8510,7 @@
             <a:pPr algn="r">
               <a:defRPr sz="825" b="1">
                 <a:solidFill>
-                  <a:srgbClr val="2563EB"/>
+                  <a:srgbClr val="52677D"/>
                 </a:solidFill>
                 <a:latin typeface="Helvetica Neue"/>
                 <a:ea typeface="Helvetica Neue"/>
@@ -8488,7 +8520,7 @@
             <a:r>
               <a:rPr sz="825" b="1">
                 <a:solidFill>
-                  <a:srgbClr val="2563EB"/>
+                  <a:srgbClr val="52677D"/>
                 </a:solidFill>
                 <a:latin typeface="Helvetica Neue"/>
                 <a:ea typeface="Helvetica Neue"/>
@@ -8502,7 +8534,7 @@
     </p:spTree>
     <p:extLst>
       <p:ext uri="{BB962C8B-B14F-4D97-AF65-F5344CB8AC3E}">
-        <p14:creationId xmlns:p14="http://schemas.microsoft.com/office/powerpoint/2010/main" val="1694623867"/>
+        <p14:creationId xmlns:p14="http://schemas.microsoft.com/office/powerpoint/2010/main" val="870062967"/>
       </p:ext>
     </p:extLst>
   </p:cSld>
@@ -8533,7 +8565,7 @@
           <p:cNvPr id="27" name="">
             <a:extLst xmlns:a="http://schemas.openxmlformats.org/drawingml/2006/main">
               <a:ext uri="{FF2B5EF4-FFF2-40B4-BE49-F238E27FC236}">
-                <a16:creationId xmlns:a16="http://schemas.microsoft.com/office/drawing/2014/main" id="{E5328F2E-932E-456A-8CAE-16B893498F87}"/>
+                <a16:creationId xmlns:a16="http://schemas.microsoft.com/office/drawing/2014/main" id="{3782D420-1A34-48B6-8574-2A060A2B20F2}"/>
               </a:ext>
             </a:extLst>
           </p:cNvPr>
@@ -8551,7 +8583,7 @@
             <a:avLst/>
           </a:prstGeom>
           <a:solidFill xmlns:a="http://schemas.openxmlformats.org/drawingml/2006/main">
-            <a:srgbClr val="00A7A0"/>
+            <a:srgbClr val="1C2E4A"/>
           </a:solidFill>
           <a:ln xmlns:a="http://schemas.openxmlformats.org/drawingml/2006/main" w="0">
             <a:noFill/>
@@ -8563,7 +8595,7 @@
           <p:cNvPr id="2" name="">
             <a:extLst xmlns:a="http://schemas.openxmlformats.org/drawingml/2006/main">
               <a:ext uri="{FF2B5EF4-FFF2-40B4-BE49-F238E27FC236}">
-                <a16:creationId xmlns:a16="http://schemas.microsoft.com/office/drawing/2014/main" id="{9307A1F5-68A4-4CED-86ED-07855F0C969D}"/>
+                <a16:creationId xmlns:a16="http://schemas.microsoft.com/office/drawing/2014/main" id="{2938A489-AA8A-4BF6-8F05-FDB8083F9283}"/>
               </a:ext>
             </a:extLst>
           </p:cNvPr>
@@ -8594,7 +8626,7 @@
             <a:pPr algn="l">
               <a:defRPr sz="1125" b="1">
                 <a:solidFill>
-                  <a:srgbClr val="2563EB"/>
+                  <a:srgbClr val="52677D"/>
                 </a:solidFill>
                 <a:latin typeface="Helvetica Neue"/>
                 <a:ea typeface="Helvetica Neue"/>
@@ -8604,7 +8636,7 @@
             <a:r>
               <a:rPr sz="1125" b="1">
                 <a:solidFill>
-                  <a:srgbClr val="2563EB"/>
+                  <a:srgbClr val="52677D"/>
                 </a:solidFill>
                 <a:latin typeface="Helvetica Neue"/>
                 <a:ea typeface="Helvetica Neue"/>
@@ -8620,7 +8652,7 @@
           <p:cNvPr id="3" name="">
             <a:extLst xmlns:a="http://schemas.openxmlformats.org/drawingml/2006/main">
               <a:ext uri="{FF2B5EF4-FFF2-40B4-BE49-F238E27FC236}">
-                <a16:creationId xmlns:a16="http://schemas.microsoft.com/office/drawing/2014/main" id="{C4247D90-10EC-47E6-A3EF-C39EDDCEF41C}"/>
+                <a16:creationId xmlns:a16="http://schemas.microsoft.com/office/drawing/2014/main" id="{F894FDE0-F192-4FA5-B6D0-88D0FC16E17C}"/>
               </a:ext>
             </a:extLst>
           </p:cNvPr>
@@ -8640,7 +8672,7 @@
             </a:avLst>
           </a:prstGeom>
           <a:solidFill xmlns:a="http://schemas.openxmlformats.org/drawingml/2006/main">
-            <a:srgbClr val="FFD43B"/>
+            <a:srgbClr val="D1CFC9"/>
           </a:solidFill>
           <a:ln xmlns:a="http://schemas.openxmlformats.org/drawingml/2006/main" w="0">
             <a:noFill/>
@@ -8652,7 +8684,7 @@
           <p:cNvPr id="4" name="">
             <a:extLst xmlns:a="http://schemas.openxmlformats.org/drawingml/2006/main">
               <a:ext uri="{FF2B5EF4-FFF2-40B4-BE49-F238E27FC236}">
-                <a16:creationId xmlns:a16="http://schemas.microsoft.com/office/drawing/2014/main" id="{2E17627A-B2AA-4DD3-B895-289F94951AB7}"/>
+                <a16:creationId xmlns:a16="http://schemas.microsoft.com/office/drawing/2014/main" id="{8CF05BE1-D96C-47D1-B3BC-0216DE7289C2}"/>
               </a:ext>
             </a:extLst>
           </p:cNvPr>
@@ -8683,7 +8715,7 @@
             <a:pPr algn="ctr">
               <a:defRPr sz="1275" b="1">
                 <a:solidFill>
-                  <a:srgbClr val="092454"/>
+                  <a:srgbClr val="1C2E4A"/>
                 </a:solidFill>
                 <a:latin typeface="Helvetica Neue"/>
                 <a:ea typeface="Helvetica Neue"/>
@@ -8693,7 +8725,7 @@
             <a:r>
               <a:rPr sz="1275" b="1">
                 <a:solidFill>
-                  <a:srgbClr val="092454"/>
+                  <a:srgbClr val="1C2E4A"/>
                 </a:solidFill>
                 <a:latin typeface="Helvetica Neue"/>
                 <a:ea typeface="Helvetica Neue"/>
@@ -8709,7 +8741,7 @@
           <p:cNvPr id="5" name="">
             <a:extLst xmlns:a="http://schemas.openxmlformats.org/drawingml/2006/main">
               <a:ext uri="{FF2B5EF4-FFF2-40B4-BE49-F238E27FC236}">
-                <a16:creationId xmlns:a16="http://schemas.microsoft.com/office/drawing/2014/main" id="{E1EB0B6D-AFD0-4C23-8B2D-66E68B4F44CD}"/>
+                <a16:creationId xmlns:a16="http://schemas.microsoft.com/office/drawing/2014/main" id="{8317BCF2-8C68-470C-8DE8-14F086D0B1AB}"/>
               </a:ext>
             </a:extLst>
           </p:cNvPr>
@@ -8740,7 +8772,7 @@
             <a:pPr algn="l">
               <a:defRPr sz="2850" b="1">
                 <a:solidFill>
-                  <a:srgbClr val="092454"/>
+                  <a:srgbClr val="1C2E4A"/>
                 </a:solidFill>
                 <a:latin typeface="Helvetica Neue"/>
                 <a:ea typeface="Helvetica Neue"/>
@@ -8750,7 +8782,7 @@
             <a:r>
               <a:rPr sz="2850" b="1">
                 <a:solidFill>
-                  <a:srgbClr val="092454"/>
+                  <a:srgbClr val="1C2E4A"/>
                 </a:solidFill>
                 <a:latin typeface="Helvetica Neue"/>
                 <a:ea typeface="Helvetica Neue"/>
@@ -8766,7 +8798,7 @@
           <p:cNvPr id="6" name="">
             <a:extLst xmlns:a="http://schemas.openxmlformats.org/drawingml/2006/main">
               <a:ext uri="{FF2B5EF4-FFF2-40B4-BE49-F238E27FC236}">
-                <a16:creationId xmlns:a16="http://schemas.microsoft.com/office/drawing/2014/main" id="{C12F714E-83CE-4714-BB84-443489FB8B23}"/>
+                <a16:creationId xmlns:a16="http://schemas.microsoft.com/office/drawing/2014/main" id="{F1019F18-AC2F-4320-A030-3D5E6D68FF88}"/>
               </a:ext>
             </a:extLst>
           </p:cNvPr>
@@ -8786,7 +8818,7 @@
             </a:avLst>
           </a:prstGeom>
           <a:solidFill xmlns:a="http://schemas.openxmlformats.org/drawingml/2006/main">
-            <a:srgbClr val="EEF7FF"/>
+            <a:srgbClr val="D1CFC9"/>
           </a:solidFill>
           <a:ln xmlns:a="http://schemas.openxmlformats.org/drawingml/2006/main" w="0">
             <a:noFill/>
@@ -8798,7 +8830,7 @@
           <p:cNvPr id="7" name="">
             <a:extLst xmlns:a="http://schemas.openxmlformats.org/drawingml/2006/main">
               <a:ext uri="{FF2B5EF4-FFF2-40B4-BE49-F238E27FC236}">
-                <a16:creationId xmlns:a16="http://schemas.microsoft.com/office/drawing/2014/main" id="{064D3514-10E1-4A51-9A16-93B563731635}"/>
+                <a16:creationId xmlns:a16="http://schemas.microsoft.com/office/drawing/2014/main" id="{3D89BDE9-5E64-4314-93E6-C29D8820B9E4}"/>
               </a:ext>
             </a:extLst>
           </p:cNvPr>
@@ -8829,7 +8861,7 @@
             <a:pPr algn="ctr">
               <a:defRPr sz="1350" b="1">
                 <a:solidFill>
-                  <a:srgbClr val="2563EB"/>
+                  <a:srgbClr val="52677D"/>
                 </a:solidFill>
                 <a:latin typeface="Helvetica Neue"/>
                 <a:ea typeface="Helvetica Neue"/>
@@ -8839,7 +8871,7 @@
             <a:r>
               <a:rPr sz="1350" b="1">
                 <a:solidFill>
-                  <a:srgbClr val="2563EB"/>
+                  <a:srgbClr val="52677D"/>
                 </a:solidFill>
                 <a:latin typeface="Helvetica Neue"/>
                 <a:ea typeface="Helvetica Neue"/>
@@ -8855,7 +8887,7 @@
           <p:cNvPr id="8" name="">
             <a:extLst xmlns:a="http://schemas.openxmlformats.org/drawingml/2006/main">
               <a:ext uri="{FF2B5EF4-FFF2-40B4-BE49-F238E27FC236}">
-                <a16:creationId xmlns:a16="http://schemas.microsoft.com/office/drawing/2014/main" id="{F3ACCA7F-5410-40F1-965A-9DB3A00A4B64}"/>
+                <a16:creationId xmlns:a16="http://schemas.microsoft.com/office/drawing/2014/main" id="{328319FE-CAD3-4BCF-8FDB-6E40C83B7230}"/>
               </a:ext>
             </a:extLst>
           </p:cNvPr>
@@ -8886,7 +8918,7 @@
             <a:pPr algn="l">
               <a:defRPr sz="1575" b="0">
                 <a:solidFill>
-                  <a:srgbClr val="10213D"/>
+                  <a:srgbClr val="0F1A2B"/>
                 </a:solidFill>
                 <a:latin typeface="Helvetica Neue"/>
                 <a:ea typeface="Helvetica Neue"/>
@@ -8896,7 +8928,7 @@
             <a:r>
               <a:rPr sz="1575" b="0">
                 <a:solidFill>
-                  <a:srgbClr val="10213D"/>
+                  <a:srgbClr val="0F1A2B"/>
                 </a:solidFill>
                 <a:latin typeface="Helvetica Neue"/>
                 <a:ea typeface="Helvetica Neue"/>
@@ -8912,7 +8944,7 @@
           <p:cNvPr id="9" name="">
             <a:extLst xmlns:a="http://schemas.openxmlformats.org/drawingml/2006/main">
               <a:ext uri="{FF2B5EF4-FFF2-40B4-BE49-F238E27FC236}">
-                <a16:creationId xmlns:a16="http://schemas.microsoft.com/office/drawing/2014/main" id="{6496C57E-F3E9-4391-9A8B-7FD4256E2039}"/>
+                <a16:creationId xmlns:a16="http://schemas.microsoft.com/office/drawing/2014/main" id="{FAC40D03-B164-499A-99F4-0B602B21FC65}"/>
               </a:ext>
             </a:extLst>
           </p:cNvPr>
@@ -8932,7 +8964,7 @@
             </a:avLst>
           </a:prstGeom>
           <a:solidFill xmlns:a="http://schemas.openxmlformats.org/drawingml/2006/main">
-            <a:srgbClr val="EEF7FF"/>
+            <a:srgbClr val="D1CFC9"/>
           </a:solidFill>
           <a:ln xmlns:a="http://schemas.openxmlformats.org/drawingml/2006/main" w="0">
             <a:noFill/>
@@ -8944,7 +8976,7 @@
           <p:cNvPr id="10" name="">
             <a:extLst xmlns:a="http://schemas.openxmlformats.org/drawingml/2006/main">
               <a:ext uri="{FF2B5EF4-FFF2-40B4-BE49-F238E27FC236}">
-                <a16:creationId xmlns:a16="http://schemas.microsoft.com/office/drawing/2014/main" id="{5C76DA6B-D943-48F4-9051-C92DD087B6E4}"/>
+                <a16:creationId xmlns:a16="http://schemas.microsoft.com/office/drawing/2014/main" id="{E191B92A-49E1-4BA1-B106-96A3512E302F}"/>
               </a:ext>
             </a:extLst>
           </p:cNvPr>
@@ -8975,7 +9007,7 @@
             <a:pPr algn="ctr">
               <a:defRPr sz="1350" b="1">
                 <a:solidFill>
-                  <a:srgbClr val="2563EB"/>
+                  <a:srgbClr val="52677D"/>
                 </a:solidFill>
                 <a:latin typeface="Helvetica Neue"/>
                 <a:ea typeface="Helvetica Neue"/>
@@ -8985,7 +9017,7 @@
             <a:r>
               <a:rPr sz="1350" b="1">
                 <a:solidFill>
-                  <a:srgbClr val="2563EB"/>
+                  <a:srgbClr val="52677D"/>
                 </a:solidFill>
                 <a:latin typeface="Helvetica Neue"/>
                 <a:ea typeface="Helvetica Neue"/>
@@ -9001,7 +9033,7 @@
           <p:cNvPr id="11" name="">
             <a:extLst xmlns:a="http://schemas.openxmlformats.org/drawingml/2006/main">
               <a:ext uri="{FF2B5EF4-FFF2-40B4-BE49-F238E27FC236}">
-                <a16:creationId xmlns:a16="http://schemas.microsoft.com/office/drawing/2014/main" id="{D1BB7E4C-EC9B-4F0B-ADF0-74051075CEFE}"/>
+                <a16:creationId xmlns:a16="http://schemas.microsoft.com/office/drawing/2014/main" id="{067CD386-EFB2-4234-8A22-14F4BFD4DE9B}"/>
               </a:ext>
             </a:extLst>
           </p:cNvPr>
@@ -9032,7 +9064,7 @@
             <a:pPr algn="l">
               <a:defRPr sz="1575" b="0">
                 <a:solidFill>
-                  <a:srgbClr val="10213D"/>
+                  <a:srgbClr val="0F1A2B"/>
                 </a:solidFill>
                 <a:latin typeface="Helvetica Neue"/>
                 <a:ea typeface="Helvetica Neue"/>
@@ -9042,7 +9074,7 @@
             <a:r>
               <a:rPr sz="1575" b="0">
                 <a:solidFill>
-                  <a:srgbClr val="10213D"/>
+                  <a:srgbClr val="0F1A2B"/>
                 </a:solidFill>
                 <a:latin typeface="Helvetica Neue"/>
                 <a:ea typeface="Helvetica Neue"/>
@@ -9058,7 +9090,7 @@
           <p:cNvPr id="12" name="">
             <a:extLst xmlns:a="http://schemas.openxmlformats.org/drawingml/2006/main">
               <a:ext uri="{FF2B5EF4-FFF2-40B4-BE49-F238E27FC236}">
-                <a16:creationId xmlns:a16="http://schemas.microsoft.com/office/drawing/2014/main" id="{F46BE76D-3DB2-456A-AC5A-C48E928ED958}"/>
+                <a16:creationId xmlns:a16="http://schemas.microsoft.com/office/drawing/2014/main" id="{C0A6E576-A71B-49A6-85CB-9A49846CAB4E}"/>
               </a:ext>
             </a:extLst>
           </p:cNvPr>
@@ -9078,7 +9110,7 @@
             </a:avLst>
           </a:prstGeom>
           <a:solidFill xmlns:a="http://schemas.openxmlformats.org/drawingml/2006/main">
-            <a:srgbClr val="EEF7FF"/>
+            <a:srgbClr val="D1CFC9"/>
           </a:solidFill>
           <a:ln xmlns:a="http://schemas.openxmlformats.org/drawingml/2006/main" w="0">
             <a:noFill/>
@@ -9090,7 +9122,7 @@
           <p:cNvPr id="13" name="">
             <a:extLst xmlns:a="http://schemas.openxmlformats.org/drawingml/2006/main">
               <a:ext uri="{FF2B5EF4-FFF2-40B4-BE49-F238E27FC236}">
-                <a16:creationId xmlns:a16="http://schemas.microsoft.com/office/drawing/2014/main" id="{16D1AEF5-393C-48CE-B7F5-E14BD1B64089}"/>
+                <a16:creationId xmlns:a16="http://schemas.microsoft.com/office/drawing/2014/main" id="{F3530EF7-6A44-43E2-908F-35E5920B2002}"/>
               </a:ext>
             </a:extLst>
           </p:cNvPr>
@@ -9121,7 +9153,7 @@
             <a:pPr algn="ctr">
               <a:defRPr sz="1350" b="1">
                 <a:solidFill>
-                  <a:srgbClr val="2563EB"/>
+                  <a:srgbClr val="52677D"/>
                 </a:solidFill>
                 <a:latin typeface="Helvetica Neue"/>
                 <a:ea typeface="Helvetica Neue"/>
@@ -9131,7 +9163,7 @@
             <a:r>
               <a:rPr sz="1350" b="1">
                 <a:solidFill>
-                  <a:srgbClr val="2563EB"/>
+                  <a:srgbClr val="52677D"/>
                 </a:solidFill>
                 <a:latin typeface="Helvetica Neue"/>
                 <a:ea typeface="Helvetica Neue"/>
@@ -9147,7 +9179,7 @@
           <p:cNvPr id="14" name="">
             <a:extLst xmlns:a="http://schemas.openxmlformats.org/drawingml/2006/main">
               <a:ext uri="{FF2B5EF4-FFF2-40B4-BE49-F238E27FC236}">
-                <a16:creationId xmlns:a16="http://schemas.microsoft.com/office/drawing/2014/main" id="{8E0F9A97-C286-4B1B-B9C9-FB0DFEC19231}"/>
+                <a16:creationId xmlns:a16="http://schemas.microsoft.com/office/drawing/2014/main" id="{0A3EE938-424E-4DC2-A861-1C4402292EA7}"/>
               </a:ext>
             </a:extLst>
           </p:cNvPr>
@@ -9178,7 +9210,7 @@
             <a:pPr algn="l">
               <a:defRPr sz="1575" b="0">
                 <a:solidFill>
-                  <a:srgbClr val="10213D"/>
+                  <a:srgbClr val="0F1A2B"/>
                 </a:solidFill>
                 <a:latin typeface="Helvetica Neue"/>
                 <a:ea typeface="Helvetica Neue"/>
@@ -9188,7 +9220,7 @@
             <a:r>
               <a:rPr sz="1575" b="0">
                 <a:solidFill>
-                  <a:srgbClr val="10213D"/>
+                  <a:srgbClr val="0F1A2B"/>
                 </a:solidFill>
                 <a:latin typeface="Helvetica Neue"/>
                 <a:ea typeface="Helvetica Neue"/>
@@ -9204,7 +9236,7 @@
           <p:cNvPr id="15" name="">
             <a:extLst xmlns:a="http://schemas.openxmlformats.org/drawingml/2006/main">
               <a:ext uri="{FF2B5EF4-FFF2-40B4-BE49-F238E27FC236}">
-                <a16:creationId xmlns:a16="http://schemas.microsoft.com/office/drawing/2014/main" id="{EF8F7133-33E8-424E-B9C2-BFE42630EC46}"/>
+                <a16:creationId xmlns:a16="http://schemas.microsoft.com/office/drawing/2014/main" id="{B34089BE-C981-41C4-94DA-DC79C85DEE0A}"/>
               </a:ext>
             </a:extLst>
           </p:cNvPr>
@@ -9224,7 +9256,7 @@
             </a:avLst>
           </a:prstGeom>
           <a:solidFill xmlns:a="http://schemas.openxmlformats.org/drawingml/2006/main">
-            <a:srgbClr val="EEF7FF"/>
+            <a:srgbClr val="D1CFC9"/>
           </a:solidFill>
           <a:ln xmlns:a="http://schemas.openxmlformats.org/drawingml/2006/main" w="0">
             <a:noFill/>
@@ -9236,7 +9268,7 @@
           <p:cNvPr id="16" name="">
             <a:extLst xmlns:a="http://schemas.openxmlformats.org/drawingml/2006/main">
               <a:ext uri="{FF2B5EF4-FFF2-40B4-BE49-F238E27FC236}">
-                <a16:creationId xmlns:a16="http://schemas.microsoft.com/office/drawing/2014/main" id="{9CA5BDD4-8A2C-4BC0-BF39-CE0B7215D473}"/>
+                <a16:creationId xmlns:a16="http://schemas.microsoft.com/office/drawing/2014/main" id="{F9013684-7A25-4C7F-ACCB-EE4381532142}"/>
               </a:ext>
             </a:extLst>
           </p:cNvPr>
@@ -9267,7 +9299,7 @@
             <a:pPr algn="ctr">
               <a:defRPr sz="1350" b="1">
                 <a:solidFill>
-                  <a:srgbClr val="2563EB"/>
+                  <a:srgbClr val="52677D"/>
                 </a:solidFill>
                 <a:latin typeface="Helvetica Neue"/>
                 <a:ea typeface="Helvetica Neue"/>
@@ -9277,7 +9309,7 @@
             <a:r>
               <a:rPr sz="1350" b="1">
                 <a:solidFill>
-                  <a:srgbClr val="2563EB"/>
+                  <a:srgbClr val="52677D"/>
                 </a:solidFill>
                 <a:latin typeface="Helvetica Neue"/>
                 <a:ea typeface="Helvetica Neue"/>
@@ -9293,7 +9325,7 @@
           <p:cNvPr id="17" name="">
             <a:extLst xmlns:a="http://schemas.openxmlformats.org/drawingml/2006/main">
               <a:ext uri="{FF2B5EF4-FFF2-40B4-BE49-F238E27FC236}">
-                <a16:creationId xmlns:a16="http://schemas.microsoft.com/office/drawing/2014/main" id="{314048CD-1972-403A-B627-462E1D9C16A6}"/>
+                <a16:creationId xmlns:a16="http://schemas.microsoft.com/office/drawing/2014/main" id="{51815ED8-0483-4269-B317-49462F9CA9E6}"/>
               </a:ext>
             </a:extLst>
           </p:cNvPr>
@@ -9324,7 +9356,7 @@
             <a:pPr algn="l">
               <a:defRPr sz="1575" b="0">
                 <a:solidFill>
-                  <a:srgbClr val="10213D"/>
+                  <a:srgbClr val="0F1A2B"/>
                 </a:solidFill>
                 <a:latin typeface="Helvetica Neue"/>
                 <a:ea typeface="Helvetica Neue"/>
@@ -9334,7 +9366,7 @@
             <a:r>
               <a:rPr sz="1575" b="0">
                 <a:solidFill>
-                  <a:srgbClr val="10213D"/>
+                  <a:srgbClr val="0F1A2B"/>
                 </a:solidFill>
                 <a:latin typeface="Helvetica Neue"/>
                 <a:ea typeface="Helvetica Neue"/>
@@ -9350,7 +9382,7 @@
           <p:cNvPr id="18" name="">
             <a:extLst xmlns:a="http://schemas.openxmlformats.org/drawingml/2006/main">
               <a:ext uri="{FF2B5EF4-FFF2-40B4-BE49-F238E27FC236}">
-                <a16:creationId xmlns:a16="http://schemas.microsoft.com/office/drawing/2014/main" id="{72F2895F-CAF5-44C9-A3DB-304E98687FA5}"/>
+                <a16:creationId xmlns:a16="http://schemas.microsoft.com/office/drawing/2014/main" id="{5A276E57-27D4-4B7B-AD2F-00FC9C837851}"/>
               </a:ext>
             </a:extLst>
           </p:cNvPr>
@@ -9370,7 +9402,7 @@
             </a:avLst>
           </a:prstGeom>
           <a:solidFill xmlns:a="http://schemas.openxmlformats.org/drawingml/2006/main">
-            <a:srgbClr val="EEF7FF"/>
+            <a:srgbClr val="D1CFC9"/>
           </a:solidFill>
           <a:ln xmlns:a="http://schemas.openxmlformats.org/drawingml/2006/main" w="0">
             <a:noFill/>
@@ -9382,7 +9414,7 @@
           <p:cNvPr id="19" name="">
             <a:extLst xmlns:a="http://schemas.openxmlformats.org/drawingml/2006/main">
               <a:ext uri="{FF2B5EF4-FFF2-40B4-BE49-F238E27FC236}">
-                <a16:creationId xmlns:a16="http://schemas.microsoft.com/office/drawing/2014/main" id="{95ABACAB-EF5C-4AA4-8C7F-31F6386549BE}"/>
+                <a16:creationId xmlns:a16="http://schemas.microsoft.com/office/drawing/2014/main" id="{26E9BDD0-50E0-414F-9A6A-ADB70DC55E14}"/>
               </a:ext>
             </a:extLst>
           </p:cNvPr>
@@ -9413,7 +9445,7 @@
             <a:pPr algn="l">
               <a:defRPr sz="1125" b="0">
                 <a:solidFill>
-                  <a:srgbClr val="092454"/>
+                  <a:srgbClr val="1C2E4A"/>
                 </a:solidFill>
                 <a:latin typeface="Helvetica Neue"/>
                 <a:ea typeface="Helvetica Neue"/>
@@ -9423,7 +9455,7 @@
             <a:r>
               <a:rPr sz="1125" b="0">
                 <a:solidFill>
-                  <a:srgbClr val="092454"/>
+                  <a:srgbClr val="1C2E4A"/>
                 </a:solidFill>
                 <a:latin typeface="Helvetica Neue"/>
                 <a:ea typeface="Helvetica Neue"/>
@@ -9439,7 +9471,7 @@
           <p:cNvPr id="20" name="">
             <a:extLst xmlns:a="http://schemas.openxmlformats.org/drawingml/2006/main">
               <a:ext uri="{FF2B5EF4-FFF2-40B4-BE49-F238E27FC236}">
-                <a16:creationId xmlns:a16="http://schemas.microsoft.com/office/drawing/2014/main" id="{95B8DB73-19AF-4C83-B320-D3F94CB95CA0}"/>
+                <a16:creationId xmlns:a16="http://schemas.microsoft.com/office/drawing/2014/main" id="{E6EBB401-C0C5-465B-B594-CE44B3064A82}"/>
               </a:ext>
             </a:extLst>
           </p:cNvPr>
@@ -9459,7 +9491,7 @@
             </a:avLst>
           </a:prstGeom>
           <a:solidFill xmlns:a="http://schemas.openxmlformats.org/drawingml/2006/main">
-            <a:srgbClr val="092454"/>
+            <a:srgbClr val="1C2E4A"/>
           </a:solidFill>
           <a:ln xmlns:a="http://schemas.openxmlformats.org/drawingml/2006/main" w="0">
             <a:noFill/>
@@ -9471,7 +9503,7 @@
           <p:cNvPr id="21" name="">
             <a:extLst xmlns:a="http://schemas.openxmlformats.org/drawingml/2006/main">
               <a:ext uri="{FF2B5EF4-FFF2-40B4-BE49-F238E27FC236}">
-                <a16:creationId xmlns:a16="http://schemas.microsoft.com/office/drawing/2014/main" id="{8DE9751B-AB0B-44B1-9800-47188F9650F5}"/>
+                <a16:creationId xmlns:a16="http://schemas.microsoft.com/office/drawing/2014/main" id="{4139A561-6478-44D8-BB9B-6B2CA97BA7B1}"/>
               </a:ext>
             </a:extLst>
           </p:cNvPr>
@@ -9502,7 +9534,7 @@
             <a:pPr algn="l">
               <a:defRPr sz="1050" b="1">
                 <a:solidFill>
-                  <a:srgbClr val="FFD43B"/>
+                  <a:srgbClr val="D1CFC9"/>
                 </a:solidFill>
                 <a:latin typeface="Helvetica Neue"/>
                 <a:ea typeface="Helvetica Neue"/>
@@ -9512,7 +9544,7 @@
             <a:r>
               <a:rPr sz="1050" b="1">
                 <a:solidFill>
-                  <a:srgbClr val="FFD43B"/>
+                  <a:srgbClr val="D1CFC9"/>
                 </a:solidFill>
                 <a:latin typeface="Helvetica Neue"/>
                 <a:ea typeface="Helvetica Neue"/>
@@ -9528,7 +9560,7 @@
           <p:cNvPr id="22" name="">
             <a:extLst xmlns:a="http://schemas.openxmlformats.org/drawingml/2006/main">
               <a:ext uri="{FF2B5EF4-FFF2-40B4-BE49-F238E27FC236}">
-                <a16:creationId xmlns:a16="http://schemas.microsoft.com/office/drawing/2014/main" id="{5C54F883-0668-46BC-8788-59270095F0C3}"/>
+                <a16:creationId xmlns:a16="http://schemas.microsoft.com/office/drawing/2014/main" id="{2EC0876C-B762-4A97-BEC7-77B92C1217C9}"/>
               </a:ext>
             </a:extLst>
           </p:cNvPr>
@@ -9585,7 +9617,7 @@
           <p:cNvPr id="23" name="">
             <a:extLst xmlns:a="http://schemas.openxmlformats.org/drawingml/2006/main">
               <a:ext uri="{FF2B5EF4-FFF2-40B4-BE49-F238E27FC236}">
-                <a16:creationId xmlns:a16="http://schemas.microsoft.com/office/drawing/2014/main" id="{8A3A3E51-EFDA-4696-811B-4B02831E4FDB}"/>
+                <a16:creationId xmlns:a16="http://schemas.microsoft.com/office/drawing/2014/main" id="{95ACCACC-614E-48ED-B8A3-22CC80C883AC}"/>
               </a:ext>
             </a:extLst>
           </p:cNvPr>
@@ -9616,7 +9648,7 @@
             <a:pPr algn="l">
               <a:defRPr sz="1125" b="0">
                 <a:solidFill>
-                  <a:srgbClr val="BFE6FF"/>
+                  <a:srgbClr val="BDC4D4"/>
                 </a:solidFill>
                 <a:latin typeface="Helvetica Neue"/>
                 <a:ea typeface="Helvetica Neue"/>
@@ -9626,7 +9658,7 @@
             <a:r>
               <a:rPr sz="1125" b="0">
                 <a:solidFill>
-                  <a:srgbClr val="BFE6FF"/>
+                  <a:srgbClr val="BDC4D4"/>
                 </a:solidFill>
                 <a:latin typeface="Helvetica Neue"/>
                 <a:ea typeface="Helvetica Neue"/>
@@ -9642,7 +9674,7 @@
           <p:cNvPr id="24" name="">
             <a:extLst xmlns:a="http://schemas.openxmlformats.org/drawingml/2006/main">
               <a:ext uri="{FF2B5EF4-FFF2-40B4-BE49-F238E27FC236}">
-                <a16:creationId xmlns:a16="http://schemas.microsoft.com/office/drawing/2014/main" id="{4553590B-4B2C-4F38-84D8-652D9E24E65F}"/>
+                <a16:creationId xmlns:a16="http://schemas.microsoft.com/office/drawing/2014/main" id="{7A2BB959-524C-4571-9342-5EA3BE497F3A}"/>
               </a:ext>
             </a:extLst>
           </p:cNvPr>
@@ -9660,7 +9692,7 @@
             <a:avLst/>
           </a:prstGeom>
           <a:solidFill xmlns:a="http://schemas.openxmlformats.org/drawingml/2006/main">
-            <a:srgbClr val="D8E5F2"/>
+            <a:srgbClr val="BDC4D4"/>
           </a:solidFill>
           <a:ln xmlns:a="http://schemas.openxmlformats.org/drawingml/2006/main" w="0">
             <a:noFill/>
@@ -9672,7 +9704,7 @@
           <p:cNvPr id="25" name="">
             <a:extLst xmlns:a="http://schemas.openxmlformats.org/drawingml/2006/main">
               <a:ext uri="{FF2B5EF4-FFF2-40B4-BE49-F238E27FC236}">
-                <a16:creationId xmlns:a16="http://schemas.microsoft.com/office/drawing/2014/main" id="{98F28989-C97D-4335-83F0-937784C42FC4}"/>
+                <a16:creationId xmlns:a16="http://schemas.microsoft.com/office/drawing/2014/main" id="{E2B2C9C2-7217-48AE-8BB3-A0F055ACAFF5}"/>
               </a:ext>
             </a:extLst>
           </p:cNvPr>
@@ -9703,7 +9735,7 @@
             <a:pPr algn="l">
               <a:defRPr sz="750" b="0">
                 <a:solidFill>
-                  <a:srgbClr val="61718A"/>
+                  <a:srgbClr val="52677D"/>
                 </a:solidFill>
                 <a:latin typeface="Helvetica Neue"/>
                 <a:ea typeface="Helvetica Neue"/>
@@ -9713,7 +9745,7 @@
             <a:r>
               <a:rPr sz="750" b="0">
                 <a:solidFill>
-                  <a:srgbClr val="61718A"/>
+                  <a:srgbClr val="52677D"/>
                 </a:solidFill>
                 <a:latin typeface="Helvetica Neue"/>
                 <a:ea typeface="Helvetica Neue"/>
@@ -9729,7 +9761,7 @@
           <p:cNvPr id="26" name="">
             <a:extLst xmlns:a="http://schemas.openxmlformats.org/drawingml/2006/main">
               <a:ext uri="{FF2B5EF4-FFF2-40B4-BE49-F238E27FC236}">
-                <a16:creationId xmlns:a16="http://schemas.microsoft.com/office/drawing/2014/main" id="{EC1221E4-B285-45E3-8452-D14A6A09D6FB}"/>
+                <a16:creationId xmlns:a16="http://schemas.microsoft.com/office/drawing/2014/main" id="{1F262643-4E27-4322-9A78-A9878CFCF29D}"/>
               </a:ext>
             </a:extLst>
           </p:cNvPr>
@@ -9760,7 +9792,7 @@
             <a:pPr algn="r">
               <a:defRPr sz="825" b="1">
                 <a:solidFill>
-                  <a:srgbClr val="2563EB"/>
+                  <a:srgbClr val="52677D"/>
                 </a:solidFill>
                 <a:latin typeface="Helvetica Neue"/>
                 <a:ea typeface="Helvetica Neue"/>
@@ -9770,7 +9802,7 @@
             <a:r>
               <a:rPr sz="825" b="1">
                 <a:solidFill>
-                  <a:srgbClr val="2563EB"/>
+                  <a:srgbClr val="52677D"/>
                 </a:solidFill>
                 <a:latin typeface="Helvetica Neue"/>
                 <a:ea typeface="Helvetica Neue"/>
@@ -9784,7 +9816,7 @@
     </p:spTree>
     <p:extLst>
       <p:ext uri="{BB962C8B-B14F-4D97-AF65-F5344CB8AC3E}">
-        <p14:creationId xmlns:p14="http://schemas.microsoft.com/office/powerpoint/2010/main" val="980436574"/>
+        <p14:creationId xmlns:p14="http://schemas.microsoft.com/office/powerpoint/2010/main" val="306403392"/>
       </p:ext>
     </p:extLst>
   </p:cSld>
@@ -9815,7 +9847,7 @@
           <p:cNvPr id="24" name="">
             <a:extLst xmlns:a="http://schemas.openxmlformats.org/drawingml/2006/main">
               <a:ext uri="{FF2B5EF4-FFF2-40B4-BE49-F238E27FC236}">
-                <a16:creationId xmlns:a16="http://schemas.microsoft.com/office/drawing/2014/main" id="{0BF3487F-4091-408C-90EE-B38CCF502260}"/>
+                <a16:creationId xmlns:a16="http://schemas.microsoft.com/office/drawing/2014/main" id="{0F69E24D-E09B-497C-8E6F-FCC44C2E1F96}"/>
               </a:ext>
             </a:extLst>
           </p:cNvPr>
@@ -9833,7 +9865,7 @@
             <a:avLst/>
           </a:prstGeom>
           <a:solidFill xmlns:a="http://schemas.openxmlformats.org/drawingml/2006/main">
-            <a:srgbClr val="092454"/>
+            <a:srgbClr val="1C2E4A"/>
           </a:solidFill>
           <a:ln xmlns:a="http://schemas.openxmlformats.org/drawingml/2006/main" w="0">
             <a:noFill/>
@@ -9845,7 +9877,7 @@
           <p:cNvPr id="2" name="">
             <a:extLst xmlns:a="http://schemas.openxmlformats.org/drawingml/2006/main">
               <a:ext uri="{FF2B5EF4-FFF2-40B4-BE49-F238E27FC236}">
-                <a16:creationId xmlns:a16="http://schemas.microsoft.com/office/drawing/2014/main" id="{51E1A409-8085-43B8-B0C6-CC2E9C7F68D9}"/>
+                <a16:creationId xmlns:a16="http://schemas.microsoft.com/office/drawing/2014/main" id="{27C48332-1384-4962-93D2-0102FB48D04A}"/>
               </a:ext>
             </a:extLst>
           </p:cNvPr>
@@ -9876,7 +9908,7 @@
             <a:pPr algn="l">
               <a:defRPr sz="1125" b="1">
                 <a:solidFill>
-                  <a:srgbClr val="2563EB"/>
+                  <a:srgbClr val="52677D"/>
                 </a:solidFill>
                 <a:latin typeface="Helvetica Neue"/>
                 <a:ea typeface="Helvetica Neue"/>
@@ -9886,7 +9918,7 @@
             <a:r>
               <a:rPr sz="1125" b="1">
                 <a:solidFill>
-                  <a:srgbClr val="2563EB"/>
+                  <a:srgbClr val="52677D"/>
                 </a:solidFill>
                 <a:latin typeface="Helvetica Neue"/>
                 <a:ea typeface="Helvetica Neue"/>
@@ -9902,7 +9934,7 @@
           <p:cNvPr id="3" name="">
             <a:extLst xmlns:a="http://schemas.openxmlformats.org/drawingml/2006/main">
               <a:ext uri="{FF2B5EF4-FFF2-40B4-BE49-F238E27FC236}">
-                <a16:creationId xmlns:a16="http://schemas.microsoft.com/office/drawing/2014/main" id="{68D51BE3-2978-4EB9-B619-3A4F36E09510}"/>
+                <a16:creationId xmlns:a16="http://schemas.microsoft.com/office/drawing/2014/main" id="{4792D129-4F9E-4F17-AA3E-E9DD38CB9AFE}"/>
               </a:ext>
             </a:extLst>
           </p:cNvPr>
@@ -9922,7 +9954,7 @@
             </a:avLst>
           </a:prstGeom>
           <a:solidFill xmlns:a="http://schemas.openxmlformats.org/drawingml/2006/main">
-            <a:srgbClr val="FFD43B"/>
+            <a:srgbClr val="D1CFC9"/>
           </a:solidFill>
           <a:ln xmlns:a="http://schemas.openxmlformats.org/drawingml/2006/main" w="0">
             <a:noFill/>
@@ -9934,7 +9966,7 @@
           <p:cNvPr id="4" name="">
             <a:extLst xmlns:a="http://schemas.openxmlformats.org/drawingml/2006/main">
               <a:ext uri="{FF2B5EF4-FFF2-40B4-BE49-F238E27FC236}">
-                <a16:creationId xmlns:a16="http://schemas.microsoft.com/office/drawing/2014/main" id="{3769C18B-BFDD-4E21-A2A2-3BBFF91E1058}"/>
+                <a16:creationId xmlns:a16="http://schemas.microsoft.com/office/drawing/2014/main" id="{EE39696C-9D3A-4231-8DC0-C222805175FC}"/>
               </a:ext>
             </a:extLst>
           </p:cNvPr>
@@ -9965,7 +9997,7 @@
             <a:pPr algn="ctr">
               <a:defRPr sz="1275" b="1">
                 <a:solidFill>
-                  <a:srgbClr val="092454"/>
+                  <a:srgbClr val="1C2E4A"/>
                 </a:solidFill>
                 <a:latin typeface="Helvetica Neue"/>
                 <a:ea typeface="Helvetica Neue"/>
@@ -9975,7 +10007,7 @@
             <a:r>
               <a:rPr sz="1275" b="1">
                 <a:solidFill>
-                  <a:srgbClr val="092454"/>
+                  <a:srgbClr val="1C2E4A"/>
                 </a:solidFill>
                 <a:latin typeface="Helvetica Neue"/>
                 <a:ea typeface="Helvetica Neue"/>
@@ -9991,7 +10023,7 @@
           <p:cNvPr id="5" name="">
             <a:extLst xmlns:a="http://schemas.openxmlformats.org/drawingml/2006/main">
               <a:ext uri="{FF2B5EF4-FFF2-40B4-BE49-F238E27FC236}">
-                <a16:creationId xmlns:a16="http://schemas.microsoft.com/office/drawing/2014/main" id="{BA44CE36-111D-43B8-BC40-575BEA256732}"/>
+                <a16:creationId xmlns:a16="http://schemas.microsoft.com/office/drawing/2014/main" id="{D6619686-1CCE-4065-85D2-1E5884015572}"/>
               </a:ext>
             </a:extLst>
           </p:cNvPr>
@@ -10022,7 +10054,7 @@
             <a:pPr algn="l">
               <a:defRPr sz="2850" b="1">
                 <a:solidFill>
-                  <a:srgbClr val="092454"/>
+                  <a:srgbClr val="1C2E4A"/>
                 </a:solidFill>
                 <a:latin typeface="Helvetica Neue"/>
                 <a:ea typeface="Helvetica Neue"/>
@@ -10032,7 +10064,7 @@
             <a:r>
               <a:rPr sz="2850" b="1">
                 <a:solidFill>
-                  <a:srgbClr val="092454"/>
+                  <a:srgbClr val="1C2E4A"/>
                 </a:solidFill>
                 <a:latin typeface="Helvetica Neue"/>
                 <a:ea typeface="Helvetica Neue"/>
@@ -10048,7 +10080,7 @@
           <p:cNvPr id="6" name="">
             <a:extLst xmlns:a="http://schemas.openxmlformats.org/drawingml/2006/main">
               <a:ext uri="{FF2B5EF4-FFF2-40B4-BE49-F238E27FC236}">
-                <a16:creationId xmlns:a16="http://schemas.microsoft.com/office/drawing/2014/main" id="{56A7C068-B0CD-4F40-9A7B-E3096F4DCB5B}"/>
+                <a16:creationId xmlns:a16="http://schemas.microsoft.com/office/drawing/2014/main" id="{6269EAF7-8DFD-4DCE-BDA1-65B18793D1EA}"/>
               </a:ext>
             </a:extLst>
           </p:cNvPr>
@@ -10068,7 +10100,7 @@
             </a:avLst>
           </a:prstGeom>
           <a:solidFill xmlns:a="http://schemas.openxmlformats.org/drawingml/2006/main">
-            <a:srgbClr val="EEF7FF"/>
+            <a:srgbClr val="D1CFC9"/>
           </a:solidFill>
           <a:ln xmlns:a="http://schemas.openxmlformats.org/drawingml/2006/main" w="0">
             <a:noFill/>
@@ -10080,7 +10112,7 @@
           <p:cNvPr id="7" name="">
             <a:extLst xmlns:a="http://schemas.openxmlformats.org/drawingml/2006/main">
               <a:ext uri="{FF2B5EF4-FFF2-40B4-BE49-F238E27FC236}">
-                <a16:creationId xmlns:a16="http://schemas.microsoft.com/office/drawing/2014/main" id="{AC295918-0606-4B8F-9B8A-6BD21EC459A4}"/>
+                <a16:creationId xmlns:a16="http://schemas.microsoft.com/office/drawing/2014/main" id="{B17DF9BA-536B-456A-84D8-0B5CB810E384}"/>
               </a:ext>
             </a:extLst>
           </p:cNvPr>
@@ -10111,7 +10143,7 @@
             <a:pPr algn="ctr">
               <a:defRPr sz="1350" b="1">
                 <a:solidFill>
-                  <a:srgbClr val="2563EB"/>
+                  <a:srgbClr val="52677D"/>
                 </a:solidFill>
                 <a:latin typeface="Helvetica Neue"/>
                 <a:ea typeface="Helvetica Neue"/>
@@ -10121,7 +10153,7 @@
             <a:r>
               <a:rPr sz="1350" b="1">
                 <a:solidFill>
-                  <a:srgbClr val="2563EB"/>
+                  <a:srgbClr val="52677D"/>
                 </a:solidFill>
                 <a:latin typeface="Helvetica Neue"/>
                 <a:ea typeface="Helvetica Neue"/>
@@ -10137,7 +10169,7 @@
           <p:cNvPr id="8" name="">
             <a:extLst xmlns:a="http://schemas.openxmlformats.org/drawingml/2006/main">
               <a:ext uri="{FF2B5EF4-FFF2-40B4-BE49-F238E27FC236}">
-                <a16:creationId xmlns:a16="http://schemas.microsoft.com/office/drawing/2014/main" id="{801BA923-8469-48A2-9BDD-C5E37A5997FF}"/>
+                <a16:creationId xmlns:a16="http://schemas.microsoft.com/office/drawing/2014/main" id="{54BDD85A-1154-436B-8F4B-47019B1F17E8}"/>
               </a:ext>
             </a:extLst>
           </p:cNvPr>
@@ -10168,7 +10200,7 @@
             <a:pPr algn="l">
               <a:defRPr sz="1575" b="0">
                 <a:solidFill>
-                  <a:srgbClr val="10213D"/>
+                  <a:srgbClr val="0F1A2B"/>
                 </a:solidFill>
                 <a:latin typeface="Helvetica Neue"/>
                 <a:ea typeface="Helvetica Neue"/>
@@ -10178,7 +10210,7 @@
             <a:r>
               <a:rPr sz="1575" b="0">
                 <a:solidFill>
-                  <a:srgbClr val="10213D"/>
+                  <a:srgbClr val="0F1A2B"/>
                 </a:solidFill>
                 <a:latin typeface="Helvetica Neue"/>
                 <a:ea typeface="Helvetica Neue"/>
@@ -10194,7 +10226,7 @@
           <p:cNvPr id="9" name="">
             <a:extLst xmlns:a="http://schemas.openxmlformats.org/drawingml/2006/main">
               <a:ext uri="{FF2B5EF4-FFF2-40B4-BE49-F238E27FC236}">
-                <a16:creationId xmlns:a16="http://schemas.microsoft.com/office/drawing/2014/main" id="{F5D63EFB-861D-4CAC-A2B5-007DB2EAB405}"/>
+                <a16:creationId xmlns:a16="http://schemas.microsoft.com/office/drawing/2014/main" id="{9760580F-757B-45B8-B63A-412BFB36D88E}"/>
               </a:ext>
             </a:extLst>
           </p:cNvPr>
@@ -10214,7 +10246,7 @@
             </a:avLst>
           </a:prstGeom>
           <a:solidFill xmlns:a="http://schemas.openxmlformats.org/drawingml/2006/main">
-            <a:srgbClr val="EEF7FF"/>
+            <a:srgbClr val="D1CFC9"/>
           </a:solidFill>
           <a:ln xmlns:a="http://schemas.openxmlformats.org/drawingml/2006/main" w="0">
             <a:noFill/>
@@ -10226,7 +10258,7 @@
           <p:cNvPr id="10" name="">
             <a:extLst xmlns:a="http://schemas.openxmlformats.org/drawingml/2006/main">
               <a:ext uri="{FF2B5EF4-FFF2-40B4-BE49-F238E27FC236}">
-                <a16:creationId xmlns:a16="http://schemas.microsoft.com/office/drawing/2014/main" id="{00D0EFE7-56EA-47E1-9F9F-94BD2753D64D}"/>
+                <a16:creationId xmlns:a16="http://schemas.microsoft.com/office/drawing/2014/main" id="{66FF3EA6-C2FA-4AF2-BC54-D53941E30FE0}"/>
               </a:ext>
             </a:extLst>
           </p:cNvPr>
@@ -10257,7 +10289,7 @@
             <a:pPr algn="ctr">
               <a:defRPr sz="1350" b="1">
                 <a:solidFill>
-                  <a:srgbClr val="2563EB"/>
+                  <a:srgbClr val="52677D"/>
                 </a:solidFill>
                 <a:latin typeface="Helvetica Neue"/>
                 <a:ea typeface="Helvetica Neue"/>
@@ -10267,7 +10299,7 @@
             <a:r>
               <a:rPr sz="1350" b="1">
                 <a:solidFill>
-                  <a:srgbClr val="2563EB"/>
+                  <a:srgbClr val="52677D"/>
                 </a:solidFill>
                 <a:latin typeface="Helvetica Neue"/>
                 <a:ea typeface="Helvetica Neue"/>
@@ -10283,7 +10315,7 @@
           <p:cNvPr id="11" name="">
             <a:extLst xmlns:a="http://schemas.openxmlformats.org/drawingml/2006/main">
               <a:ext uri="{FF2B5EF4-FFF2-40B4-BE49-F238E27FC236}">
-                <a16:creationId xmlns:a16="http://schemas.microsoft.com/office/drawing/2014/main" id="{C9755ADB-74D6-49C4-8087-410E2E56B697}"/>
+                <a16:creationId xmlns:a16="http://schemas.microsoft.com/office/drawing/2014/main" id="{03EBEC9E-5B7B-46B1-9878-FF59C3ACB6E0}"/>
               </a:ext>
             </a:extLst>
           </p:cNvPr>
@@ -10314,7 +10346,7 @@
             <a:pPr algn="l">
               <a:defRPr sz="1575" b="0">
                 <a:solidFill>
-                  <a:srgbClr val="10213D"/>
+                  <a:srgbClr val="0F1A2B"/>
                 </a:solidFill>
                 <a:latin typeface="Helvetica Neue"/>
                 <a:ea typeface="Helvetica Neue"/>
@@ -10324,7 +10356,7 @@
             <a:r>
               <a:rPr sz="1575" b="0">
                 <a:solidFill>
-                  <a:srgbClr val="10213D"/>
+                  <a:srgbClr val="0F1A2B"/>
                 </a:solidFill>
                 <a:latin typeface="Helvetica Neue"/>
                 <a:ea typeface="Helvetica Neue"/>
@@ -10340,7 +10372,7 @@
           <p:cNvPr id="12" name="">
             <a:extLst xmlns:a="http://schemas.openxmlformats.org/drawingml/2006/main">
               <a:ext uri="{FF2B5EF4-FFF2-40B4-BE49-F238E27FC236}">
-                <a16:creationId xmlns:a16="http://schemas.microsoft.com/office/drawing/2014/main" id="{053C4F45-158F-4BF4-9EF4-96CE5E049F38}"/>
+                <a16:creationId xmlns:a16="http://schemas.microsoft.com/office/drawing/2014/main" id="{93A29F47-0469-48E0-BB64-3EBC40B564EF}"/>
               </a:ext>
             </a:extLst>
           </p:cNvPr>
@@ -10360,7 +10392,7 @@
             </a:avLst>
           </a:prstGeom>
           <a:solidFill xmlns:a="http://schemas.openxmlformats.org/drawingml/2006/main">
-            <a:srgbClr val="EEF7FF"/>
+            <a:srgbClr val="D1CFC9"/>
           </a:solidFill>
           <a:ln xmlns:a="http://schemas.openxmlformats.org/drawingml/2006/main" w="0">
             <a:noFill/>
@@ -10372,7 +10404,7 @@
           <p:cNvPr id="13" name="">
             <a:extLst xmlns:a="http://schemas.openxmlformats.org/drawingml/2006/main">
               <a:ext uri="{FF2B5EF4-FFF2-40B4-BE49-F238E27FC236}">
-                <a16:creationId xmlns:a16="http://schemas.microsoft.com/office/drawing/2014/main" id="{D8F58EDB-3A95-4CEE-BD1D-0BAC8DBB7C46}"/>
+                <a16:creationId xmlns:a16="http://schemas.microsoft.com/office/drawing/2014/main" id="{843B6F05-2AC7-41FD-BB60-DADDFABCE176}"/>
               </a:ext>
             </a:extLst>
           </p:cNvPr>
@@ -10403,7 +10435,7 @@
             <a:pPr algn="ctr">
               <a:defRPr sz="1350" b="1">
                 <a:solidFill>
-                  <a:srgbClr val="2563EB"/>
+                  <a:srgbClr val="52677D"/>
                 </a:solidFill>
                 <a:latin typeface="Helvetica Neue"/>
                 <a:ea typeface="Helvetica Neue"/>
@@ -10413,7 +10445,7 @@
             <a:r>
               <a:rPr sz="1350" b="1">
                 <a:solidFill>
-                  <a:srgbClr val="2563EB"/>
+                  <a:srgbClr val="52677D"/>
                 </a:solidFill>
                 <a:latin typeface="Helvetica Neue"/>
                 <a:ea typeface="Helvetica Neue"/>
@@ -10429,7 +10461,7 @@
           <p:cNvPr id="14" name="">
             <a:extLst xmlns:a="http://schemas.openxmlformats.org/drawingml/2006/main">
               <a:ext uri="{FF2B5EF4-FFF2-40B4-BE49-F238E27FC236}">
-                <a16:creationId xmlns:a16="http://schemas.microsoft.com/office/drawing/2014/main" id="{79313954-B81E-4F28-A0EE-8E96E73A7EE2}"/>
+                <a16:creationId xmlns:a16="http://schemas.microsoft.com/office/drawing/2014/main" id="{00AD1913-1169-46B8-8EBC-35BF50329593}"/>
               </a:ext>
             </a:extLst>
           </p:cNvPr>
@@ -10460,7 +10492,7 @@
             <a:pPr algn="l">
               <a:defRPr sz="1575" b="0">
                 <a:solidFill>
-                  <a:srgbClr val="10213D"/>
+                  <a:srgbClr val="0F1A2B"/>
                 </a:solidFill>
                 <a:latin typeface="Helvetica Neue"/>
                 <a:ea typeface="Helvetica Neue"/>
@@ -10470,7 +10502,7 @@
             <a:r>
               <a:rPr sz="1575" b="0">
                 <a:solidFill>
-                  <a:srgbClr val="10213D"/>
+                  <a:srgbClr val="0F1A2B"/>
                 </a:solidFill>
                 <a:latin typeface="Helvetica Neue"/>
                 <a:ea typeface="Helvetica Neue"/>
@@ -10486,7 +10518,7 @@
           <p:cNvPr id="15" name="">
             <a:extLst xmlns:a="http://schemas.openxmlformats.org/drawingml/2006/main">
               <a:ext uri="{FF2B5EF4-FFF2-40B4-BE49-F238E27FC236}">
-                <a16:creationId xmlns:a16="http://schemas.microsoft.com/office/drawing/2014/main" id="{FD125063-12D6-4FC1-AF00-941E856052BE}"/>
+                <a16:creationId xmlns:a16="http://schemas.microsoft.com/office/drawing/2014/main" id="{4295B87F-747A-42F3-967C-646A96F9F4A5}"/>
               </a:ext>
             </a:extLst>
           </p:cNvPr>
@@ -10506,7 +10538,7 @@
             </a:avLst>
           </a:prstGeom>
           <a:solidFill xmlns:a="http://schemas.openxmlformats.org/drawingml/2006/main">
-            <a:srgbClr val="EEF7FF"/>
+            <a:srgbClr val="D1CFC9"/>
           </a:solidFill>
           <a:ln xmlns:a="http://schemas.openxmlformats.org/drawingml/2006/main" w="0">
             <a:noFill/>
@@ -10518,7 +10550,7 @@
           <p:cNvPr id="16" name="">
             <a:extLst xmlns:a="http://schemas.openxmlformats.org/drawingml/2006/main">
               <a:ext uri="{FF2B5EF4-FFF2-40B4-BE49-F238E27FC236}">
-                <a16:creationId xmlns:a16="http://schemas.microsoft.com/office/drawing/2014/main" id="{B0A979AA-BC5E-4585-9337-0D47E60BE731}"/>
+                <a16:creationId xmlns:a16="http://schemas.microsoft.com/office/drawing/2014/main" id="{3D423BE4-16E4-4A71-9507-C8F752C88BD1}"/>
               </a:ext>
             </a:extLst>
           </p:cNvPr>
@@ -10549,7 +10581,7 @@
             <a:pPr algn="l">
               <a:defRPr sz="1125" b="0">
                 <a:solidFill>
-                  <a:srgbClr val="092454"/>
+                  <a:srgbClr val="1C2E4A"/>
                 </a:solidFill>
                 <a:latin typeface="Helvetica Neue"/>
                 <a:ea typeface="Helvetica Neue"/>
@@ -10559,7 +10591,7 @@
             <a:r>
               <a:rPr sz="1125" b="0">
                 <a:solidFill>
-                  <a:srgbClr val="092454"/>
+                  <a:srgbClr val="1C2E4A"/>
                 </a:solidFill>
                 <a:latin typeface="Helvetica Neue"/>
                 <a:ea typeface="Helvetica Neue"/>
@@ -10575,7 +10607,7 @@
           <p:cNvPr id="17" name="">
             <a:extLst xmlns:a="http://schemas.openxmlformats.org/drawingml/2006/main">
               <a:ext uri="{FF2B5EF4-FFF2-40B4-BE49-F238E27FC236}">
-                <a16:creationId xmlns:a16="http://schemas.microsoft.com/office/drawing/2014/main" id="{92B2FAA6-B488-4ABA-860D-AA91B5DA9B21}"/>
+                <a16:creationId xmlns:a16="http://schemas.microsoft.com/office/drawing/2014/main" id="{93B1E351-6CAA-49E2-9D6A-0060FD430678}"/>
               </a:ext>
             </a:extLst>
           </p:cNvPr>
@@ -10595,7 +10627,7 @@
             </a:avLst>
           </a:prstGeom>
           <a:solidFill xmlns:a="http://schemas.openxmlformats.org/drawingml/2006/main">
-            <a:srgbClr val="092454"/>
+            <a:srgbClr val="1C2E4A"/>
           </a:solidFill>
           <a:ln xmlns:a="http://schemas.openxmlformats.org/drawingml/2006/main" w="0">
             <a:noFill/>
@@ -10607,7 +10639,7 @@
           <p:cNvPr id="18" name="">
             <a:extLst xmlns:a="http://schemas.openxmlformats.org/drawingml/2006/main">
               <a:ext uri="{FF2B5EF4-FFF2-40B4-BE49-F238E27FC236}">
-                <a16:creationId xmlns:a16="http://schemas.microsoft.com/office/drawing/2014/main" id="{BC44E68A-0207-4B8D-AC67-9BEBF700E19D}"/>
+                <a16:creationId xmlns:a16="http://schemas.microsoft.com/office/drawing/2014/main" id="{F6488F58-A1F3-44ED-B505-A4E92138E8A4}"/>
               </a:ext>
             </a:extLst>
           </p:cNvPr>
@@ -10638,7 +10670,7 @@
             <a:pPr algn="l">
               <a:defRPr sz="1050" b="1">
                 <a:solidFill>
-                  <a:srgbClr val="FFD43B"/>
+                  <a:srgbClr val="D1CFC9"/>
                 </a:solidFill>
                 <a:latin typeface="Helvetica Neue"/>
                 <a:ea typeface="Helvetica Neue"/>
@@ -10648,7 +10680,7 @@
             <a:r>
               <a:rPr sz="1050" b="1">
                 <a:solidFill>
-                  <a:srgbClr val="FFD43B"/>
+                  <a:srgbClr val="D1CFC9"/>
                 </a:solidFill>
                 <a:latin typeface="Helvetica Neue"/>
                 <a:ea typeface="Helvetica Neue"/>
@@ -10664,7 +10696,7 @@
           <p:cNvPr id="19" name="">
             <a:extLst xmlns:a="http://schemas.openxmlformats.org/drawingml/2006/main">
               <a:ext uri="{FF2B5EF4-FFF2-40B4-BE49-F238E27FC236}">
-                <a16:creationId xmlns:a16="http://schemas.microsoft.com/office/drawing/2014/main" id="{0C160CCC-8F2A-45C1-B5F6-61358072C022}"/>
+                <a16:creationId xmlns:a16="http://schemas.microsoft.com/office/drawing/2014/main" id="{9101B189-FDB5-4C95-86E0-E7A6992E37E5}"/>
               </a:ext>
             </a:extLst>
           </p:cNvPr>
@@ -10721,7 +10753,7 @@
           <p:cNvPr id="20" name="">
             <a:extLst xmlns:a="http://schemas.openxmlformats.org/drawingml/2006/main">
               <a:ext uri="{FF2B5EF4-FFF2-40B4-BE49-F238E27FC236}">
-                <a16:creationId xmlns:a16="http://schemas.microsoft.com/office/drawing/2014/main" id="{B7D48078-0F85-4997-8662-7541A7B60AD8}"/>
+                <a16:creationId xmlns:a16="http://schemas.microsoft.com/office/drawing/2014/main" id="{01F9C303-E8A7-4DF9-836A-7A7D93CB9CE8}"/>
               </a:ext>
             </a:extLst>
           </p:cNvPr>
@@ -10752,7 +10784,7 @@
             <a:pPr algn="l">
               <a:defRPr sz="1125" b="0">
                 <a:solidFill>
-                  <a:srgbClr val="BFE6FF"/>
+                  <a:srgbClr val="BDC4D4"/>
                 </a:solidFill>
                 <a:latin typeface="Helvetica Neue"/>
                 <a:ea typeface="Helvetica Neue"/>
@@ -10762,7 +10794,7 @@
             <a:r>
               <a:rPr sz="1125" b="0">
                 <a:solidFill>
-                  <a:srgbClr val="BFE6FF"/>
+                  <a:srgbClr val="BDC4D4"/>
                 </a:solidFill>
                 <a:latin typeface="Helvetica Neue"/>
                 <a:ea typeface="Helvetica Neue"/>
@@ -10778,7 +10810,7 @@
           <p:cNvPr id="21" name="">
             <a:extLst xmlns:a="http://schemas.openxmlformats.org/drawingml/2006/main">
               <a:ext uri="{FF2B5EF4-FFF2-40B4-BE49-F238E27FC236}">
-                <a16:creationId xmlns:a16="http://schemas.microsoft.com/office/drawing/2014/main" id="{D83751BE-71C8-43E8-A1EE-28A548EDBF29}"/>
+                <a16:creationId xmlns:a16="http://schemas.microsoft.com/office/drawing/2014/main" id="{95CB6FF3-CEFB-4803-883B-8DB07B68477B}"/>
               </a:ext>
             </a:extLst>
           </p:cNvPr>
@@ -10796,7 +10828,7 @@
             <a:avLst/>
           </a:prstGeom>
           <a:solidFill xmlns:a="http://schemas.openxmlformats.org/drawingml/2006/main">
-            <a:srgbClr val="D8E5F2"/>
+            <a:srgbClr val="BDC4D4"/>
           </a:solidFill>
           <a:ln xmlns:a="http://schemas.openxmlformats.org/drawingml/2006/main" w="0">
             <a:noFill/>
@@ -10808,7 +10840,7 @@
           <p:cNvPr id="22" name="">
             <a:extLst xmlns:a="http://schemas.openxmlformats.org/drawingml/2006/main">
               <a:ext uri="{FF2B5EF4-FFF2-40B4-BE49-F238E27FC236}">
-                <a16:creationId xmlns:a16="http://schemas.microsoft.com/office/drawing/2014/main" id="{2DD1C4E9-C72A-49B5-9D12-4D32BEA24291}"/>
+                <a16:creationId xmlns:a16="http://schemas.microsoft.com/office/drawing/2014/main" id="{30C8B79E-5D28-4E34-B67E-983EFA7FAB30}"/>
               </a:ext>
             </a:extLst>
           </p:cNvPr>
@@ -10839,7 +10871,7 @@
             <a:pPr algn="l">
               <a:defRPr sz="750" b="0">
                 <a:solidFill>
-                  <a:srgbClr val="61718A"/>
+                  <a:srgbClr val="52677D"/>
                 </a:solidFill>
                 <a:latin typeface="Helvetica Neue"/>
                 <a:ea typeface="Helvetica Neue"/>
@@ -10849,7 +10881,7 @@
             <a:r>
               <a:rPr sz="750" b="0">
                 <a:solidFill>
-                  <a:srgbClr val="61718A"/>
+                  <a:srgbClr val="52677D"/>
                 </a:solidFill>
                 <a:latin typeface="Helvetica Neue"/>
                 <a:ea typeface="Helvetica Neue"/>
@@ -10865,7 +10897,7 @@
           <p:cNvPr id="23" name="">
             <a:extLst xmlns:a="http://schemas.openxmlformats.org/drawingml/2006/main">
               <a:ext uri="{FF2B5EF4-FFF2-40B4-BE49-F238E27FC236}">
-                <a16:creationId xmlns:a16="http://schemas.microsoft.com/office/drawing/2014/main" id="{CD691E9B-8CBE-464F-820F-996F12EBA190}"/>
+                <a16:creationId xmlns:a16="http://schemas.microsoft.com/office/drawing/2014/main" id="{F7138F03-6971-4B83-B1E0-B076F94B741B}"/>
               </a:ext>
             </a:extLst>
           </p:cNvPr>
@@ -10896,7 +10928,7 @@
             <a:pPr algn="r">
               <a:defRPr sz="825" b="1">
                 <a:solidFill>
-                  <a:srgbClr val="2563EB"/>
+                  <a:srgbClr val="52677D"/>
                 </a:solidFill>
                 <a:latin typeface="Helvetica Neue"/>
                 <a:ea typeface="Helvetica Neue"/>
@@ -10906,7 +10938,7 @@
             <a:r>
               <a:rPr sz="825" b="1">
                 <a:solidFill>
-                  <a:srgbClr val="2563EB"/>
+                  <a:srgbClr val="52677D"/>
                 </a:solidFill>
                 <a:latin typeface="Helvetica Neue"/>
                 <a:ea typeface="Helvetica Neue"/>
@@ -10920,7 +10952,7 @@
     </p:spTree>
     <p:extLst>
       <p:ext uri="{BB962C8B-B14F-4D97-AF65-F5344CB8AC3E}">
-        <p14:creationId xmlns:p14="http://schemas.microsoft.com/office/powerpoint/2010/main" val="1997092546"/>
+        <p14:creationId xmlns:p14="http://schemas.microsoft.com/office/powerpoint/2010/main" val="1919731733"/>
       </p:ext>
     </p:extLst>
   </p:cSld>
@@ -10951,7 +10983,7 @@
           <p:cNvPr id="33" name="">
             <a:extLst xmlns:a="http://schemas.openxmlformats.org/drawingml/2006/main">
               <a:ext uri="{FF2B5EF4-FFF2-40B4-BE49-F238E27FC236}">
-                <a16:creationId xmlns:a16="http://schemas.microsoft.com/office/drawing/2014/main" id="{6A56C2AF-F74F-49A9-8E56-D7F6C158E689}"/>
+                <a16:creationId xmlns:a16="http://schemas.microsoft.com/office/drawing/2014/main" id="{A55EFFE1-AC14-4AFC-B482-1A8D29E4D18C}"/>
               </a:ext>
             </a:extLst>
           </p:cNvPr>
@@ -10982,7 +11014,7 @@
             <a:pPr algn="l">
               <a:defRPr sz="1125" b="1">
                 <a:solidFill>
-                  <a:srgbClr val="2563EB"/>
+                  <a:srgbClr val="52677D"/>
                 </a:solidFill>
                 <a:latin typeface="Helvetica Neue"/>
                 <a:ea typeface="Helvetica Neue"/>
@@ -10992,7 +11024,7 @@
             <a:r>
               <a:rPr sz="1125" b="1">
                 <a:solidFill>
-                  <a:srgbClr val="2563EB"/>
+                  <a:srgbClr val="52677D"/>
                 </a:solidFill>
                 <a:latin typeface="Helvetica Neue"/>
                 <a:ea typeface="Helvetica Neue"/>
@@ -11008,7 +11040,7 @@
           <p:cNvPr id="2" name="">
             <a:extLst xmlns:a="http://schemas.openxmlformats.org/drawingml/2006/main">
               <a:ext uri="{FF2B5EF4-FFF2-40B4-BE49-F238E27FC236}">
-                <a16:creationId xmlns:a16="http://schemas.microsoft.com/office/drawing/2014/main" id="{C28C7ED3-99F2-4AF3-8C84-D38760993866}"/>
+                <a16:creationId xmlns:a16="http://schemas.microsoft.com/office/drawing/2014/main" id="{02ABC733-820F-43FA-B2B7-B5F112B76167}"/>
               </a:ext>
             </a:extLst>
           </p:cNvPr>
@@ -11039,7 +11071,7 @@
             <a:pPr algn="l">
               <a:defRPr sz="2850" b="1">
                 <a:solidFill>
-                  <a:srgbClr val="092454"/>
+                  <a:srgbClr val="1C2E4A"/>
                 </a:solidFill>
                 <a:latin typeface="Helvetica Neue"/>
                 <a:ea typeface="Helvetica Neue"/>
@@ -11049,7 +11081,7 @@
             <a:r>
               <a:rPr sz="2850" b="1">
                 <a:solidFill>
-                  <a:srgbClr val="092454"/>
+                  <a:srgbClr val="1C2E4A"/>
                 </a:solidFill>
                 <a:latin typeface="Helvetica Neue"/>
                 <a:ea typeface="Helvetica Neue"/>
@@ -11065,7 +11097,7 @@
           <p:cNvPr id="3" name="">
             <a:extLst xmlns:a="http://schemas.openxmlformats.org/drawingml/2006/main">
               <a:ext uri="{FF2B5EF4-FFF2-40B4-BE49-F238E27FC236}">
-                <a16:creationId xmlns:a16="http://schemas.microsoft.com/office/drawing/2014/main" id="{8E1EF9A7-2E14-4245-850F-C347AA209893}"/>
+                <a16:creationId xmlns:a16="http://schemas.microsoft.com/office/drawing/2014/main" id="{A6E93751-8499-40BC-996B-ADD392245D21}"/>
               </a:ext>
             </a:extLst>
           </p:cNvPr>
@@ -11096,7 +11128,7 @@
             <a:pPr algn="l">
               <a:defRPr sz="1425" b="0">
                 <a:solidFill>
-                  <a:srgbClr val="61718A"/>
+                  <a:srgbClr val="52677D"/>
                 </a:solidFill>
                 <a:latin typeface="Helvetica Neue"/>
                 <a:ea typeface="Helvetica Neue"/>
@@ -11106,7 +11138,7 @@
             <a:r>
               <a:rPr sz="1425" b="0">
                 <a:solidFill>
-                  <a:srgbClr val="61718A"/>
+                  <a:srgbClr val="52677D"/>
                 </a:solidFill>
                 <a:latin typeface="Helvetica Neue"/>
                 <a:ea typeface="Helvetica Neue"/>
@@ -11122,7 +11154,7 @@
           <p:cNvPr id="4" name="">
             <a:extLst xmlns:a="http://schemas.openxmlformats.org/drawingml/2006/main">
               <a:ext uri="{FF2B5EF4-FFF2-40B4-BE49-F238E27FC236}">
-                <a16:creationId xmlns:a16="http://schemas.microsoft.com/office/drawing/2014/main" id="{809D11CB-62DA-4F3F-8E39-0D2376C1150E}"/>
+                <a16:creationId xmlns:a16="http://schemas.microsoft.com/office/drawing/2014/main" id="{488ADB51-6235-426C-9430-EFBD87BF9E8F}"/>
               </a:ext>
             </a:extLst>
           </p:cNvPr>
@@ -11142,7 +11174,7 @@
             </a:avLst>
           </a:prstGeom>
           <a:solidFill xmlns:a="http://schemas.openxmlformats.org/drawingml/2006/main">
-            <a:srgbClr val="EEF7FF"/>
+            <a:srgbClr val="D1CFC9"/>
           </a:solidFill>
           <a:ln xmlns:a="http://schemas.openxmlformats.org/drawingml/2006/main" w="0">
             <a:noFill/>
@@ -11154,7 +11186,7 @@
           <p:cNvPr id="5" name="">
             <a:extLst xmlns:a="http://schemas.openxmlformats.org/drawingml/2006/main">
               <a:ext uri="{FF2B5EF4-FFF2-40B4-BE49-F238E27FC236}">
-                <a16:creationId xmlns:a16="http://schemas.microsoft.com/office/drawing/2014/main" id="{C04A8710-16C0-44B1-9BE9-613E585FEAFC}"/>
+                <a16:creationId xmlns:a16="http://schemas.microsoft.com/office/drawing/2014/main" id="{75FE1921-7CA1-41A9-828F-52E1FAF40CAF}"/>
               </a:ext>
             </a:extLst>
           </p:cNvPr>
@@ -11185,7 +11217,7 @@
             <a:pPr algn="l">
               <a:defRPr sz="1350" b="1">
                 <a:solidFill>
-                  <a:srgbClr val="2563EB"/>
+                  <a:srgbClr val="52677D"/>
                 </a:solidFill>
                 <a:latin typeface="Helvetica Neue"/>
                 <a:ea typeface="Helvetica Neue"/>
@@ -11195,7 +11227,7 @@
             <a:r>
               <a:rPr sz="1350" b="1">
                 <a:solidFill>
-                  <a:srgbClr val="2563EB"/>
+                  <a:srgbClr val="52677D"/>
                 </a:solidFill>
                 <a:latin typeface="Helvetica Neue"/>
                 <a:ea typeface="Helvetica Neue"/>
@@ -11211,7 +11243,7 @@
           <p:cNvPr id="6" name="">
             <a:extLst xmlns:a="http://schemas.openxmlformats.org/drawingml/2006/main">
               <a:ext uri="{FF2B5EF4-FFF2-40B4-BE49-F238E27FC236}">
-                <a16:creationId xmlns:a16="http://schemas.microsoft.com/office/drawing/2014/main" id="{5F6F19CE-B2BB-4EC1-B59C-191EE8C95483}"/>
+                <a16:creationId xmlns:a16="http://schemas.microsoft.com/office/drawing/2014/main" id="{DCB2F17D-EE26-4114-A85E-E0679A41EC95}"/>
               </a:ext>
             </a:extLst>
           </p:cNvPr>
@@ -11242,7 +11274,7 @@
             <a:pPr algn="l">
               <a:defRPr sz="1425" b="0">
                 <a:solidFill>
-                  <a:srgbClr val="10213D"/>
+                  <a:srgbClr val="0F1A2B"/>
                 </a:solidFill>
                 <a:latin typeface="Helvetica Neue"/>
                 <a:ea typeface="Helvetica Neue"/>
@@ -11252,7 +11284,7 @@
             <a:r>
               <a:rPr sz="1425" b="0">
                 <a:solidFill>
-                  <a:srgbClr val="10213D"/>
+                  <a:srgbClr val="0F1A2B"/>
                 </a:solidFill>
                 <a:latin typeface="Helvetica Neue"/>
                 <a:ea typeface="Helvetica Neue"/>
@@ -11268,7 +11300,7 @@
           <p:cNvPr id="7" name="">
             <a:extLst xmlns:a="http://schemas.openxmlformats.org/drawingml/2006/main">
               <a:ext uri="{FF2B5EF4-FFF2-40B4-BE49-F238E27FC236}">
-                <a16:creationId xmlns:a16="http://schemas.microsoft.com/office/drawing/2014/main" id="{963C0002-A0D2-4BA9-B8C7-AB3AF2A247B2}"/>
+                <a16:creationId xmlns:a16="http://schemas.microsoft.com/office/drawing/2014/main" id="{C108D86D-CE58-446B-B402-54721B79AC35}"/>
               </a:ext>
             </a:extLst>
           </p:cNvPr>
@@ -11288,7 +11320,7 @@
             </a:avLst>
           </a:prstGeom>
           <a:solidFill xmlns:a="http://schemas.openxmlformats.org/drawingml/2006/main">
-            <a:srgbClr val="EEF7FF"/>
+            <a:srgbClr val="D1CFC9"/>
           </a:solidFill>
           <a:ln xmlns:a="http://schemas.openxmlformats.org/drawingml/2006/main" w="0">
             <a:noFill/>
@@ -11300,7 +11332,7 @@
           <p:cNvPr id="8" name="">
             <a:extLst xmlns:a="http://schemas.openxmlformats.org/drawingml/2006/main">
               <a:ext uri="{FF2B5EF4-FFF2-40B4-BE49-F238E27FC236}">
-                <a16:creationId xmlns:a16="http://schemas.microsoft.com/office/drawing/2014/main" id="{9E9E8745-C438-48D1-8648-D84B39F7CFD1}"/>
+                <a16:creationId xmlns:a16="http://schemas.microsoft.com/office/drawing/2014/main" id="{22853D69-A4EF-4F95-BD5C-1B3311604FAF}"/>
               </a:ext>
             </a:extLst>
           </p:cNvPr>
@@ -11331,7 +11363,7 @@
             <a:pPr algn="l">
               <a:defRPr sz="1350" b="1">
                 <a:solidFill>
-                  <a:srgbClr val="2563EB"/>
+                  <a:srgbClr val="52677D"/>
                 </a:solidFill>
                 <a:latin typeface="Helvetica Neue"/>
                 <a:ea typeface="Helvetica Neue"/>
@@ -11341,7 +11373,7 @@
             <a:r>
               <a:rPr sz="1350" b="1">
                 <a:solidFill>
-                  <a:srgbClr val="2563EB"/>
+                  <a:srgbClr val="52677D"/>
                 </a:solidFill>
                 <a:latin typeface="Helvetica Neue"/>
                 <a:ea typeface="Helvetica Neue"/>
@@ -11357,7 +11389,7 @@
           <p:cNvPr id="9" name="">
             <a:extLst xmlns:a="http://schemas.openxmlformats.org/drawingml/2006/main">
               <a:ext uri="{FF2B5EF4-FFF2-40B4-BE49-F238E27FC236}">
-                <a16:creationId xmlns:a16="http://schemas.microsoft.com/office/drawing/2014/main" id="{9C5E1013-821B-438A-BA83-8E673BEC52A2}"/>
+                <a16:creationId xmlns:a16="http://schemas.microsoft.com/office/drawing/2014/main" id="{F70D39E2-F462-4505-9BF2-60DBCD34A3A8}"/>
               </a:ext>
             </a:extLst>
           </p:cNvPr>
@@ -11388,7 +11420,7 @@
             <a:pPr algn="l">
               <a:defRPr sz="1425" b="0">
                 <a:solidFill>
-                  <a:srgbClr val="10213D"/>
+                  <a:srgbClr val="0F1A2B"/>
                 </a:solidFill>
                 <a:latin typeface="Helvetica Neue"/>
                 <a:ea typeface="Helvetica Neue"/>
@@ -11398,7 +11430,7 @@
             <a:r>
               <a:rPr sz="1425" b="0">
                 <a:solidFill>
-                  <a:srgbClr val="10213D"/>
+                  <a:srgbClr val="0F1A2B"/>
                 </a:solidFill>
                 <a:latin typeface="Helvetica Neue"/>
                 <a:ea typeface="Helvetica Neue"/>
@@ -11414,7 +11446,7 @@
           <p:cNvPr id="10" name="">
             <a:extLst xmlns:a="http://schemas.openxmlformats.org/drawingml/2006/main">
               <a:ext uri="{FF2B5EF4-FFF2-40B4-BE49-F238E27FC236}">
-                <a16:creationId xmlns:a16="http://schemas.microsoft.com/office/drawing/2014/main" id="{8FD5C8C3-3E11-48A4-9FAD-2AFF2FB7BC91}"/>
+                <a16:creationId xmlns:a16="http://schemas.microsoft.com/office/drawing/2014/main" id="{BBFD6AAC-E713-41C7-B2A1-87DDE543A7A5}"/>
               </a:ext>
             </a:extLst>
           </p:cNvPr>
@@ -11434,7 +11466,7 @@
             </a:avLst>
           </a:prstGeom>
           <a:solidFill xmlns:a="http://schemas.openxmlformats.org/drawingml/2006/main">
-            <a:srgbClr val="EEF7FF"/>
+            <a:srgbClr val="D1CFC9"/>
           </a:solidFill>
           <a:ln xmlns:a="http://schemas.openxmlformats.org/drawingml/2006/main" w="0">
             <a:noFill/>
@@ -11446,7 +11478,7 @@
           <p:cNvPr id="11" name="">
             <a:extLst xmlns:a="http://schemas.openxmlformats.org/drawingml/2006/main">
               <a:ext uri="{FF2B5EF4-FFF2-40B4-BE49-F238E27FC236}">
-                <a16:creationId xmlns:a16="http://schemas.microsoft.com/office/drawing/2014/main" id="{737F76BF-C369-420E-999D-11F9E385BDF0}"/>
+                <a16:creationId xmlns:a16="http://schemas.microsoft.com/office/drawing/2014/main" id="{B0968BD7-AE18-4F69-A58D-FB26D8C837D5}"/>
               </a:ext>
             </a:extLst>
           </p:cNvPr>
@@ -11477,7 +11509,7 @@
             <a:pPr algn="l">
               <a:defRPr sz="1350" b="1">
                 <a:solidFill>
-                  <a:srgbClr val="2563EB"/>
+                  <a:srgbClr val="52677D"/>
                 </a:solidFill>
                 <a:latin typeface="Helvetica Neue"/>
                 <a:ea typeface="Helvetica Neue"/>
@@ -11487,7 +11519,7 @@
             <a:r>
               <a:rPr sz="1350" b="1">
                 <a:solidFill>
-                  <a:srgbClr val="2563EB"/>
+                  <a:srgbClr val="52677D"/>
                 </a:solidFill>
                 <a:latin typeface="Helvetica Neue"/>
                 <a:ea typeface="Helvetica Neue"/>
@@ -11503,7 +11535,7 @@
           <p:cNvPr id="12" name="">
             <a:extLst xmlns:a="http://schemas.openxmlformats.org/drawingml/2006/main">
               <a:ext uri="{FF2B5EF4-FFF2-40B4-BE49-F238E27FC236}">
-                <a16:creationId xmlns:a16="http://schemas.microsoft.com/office/drawing/2014/main" id="{A64755FD-D553-4CA0-97FA-552C7A9233E5}"/>
+                <a16:creationId xmlns:a16="http://schemas.microsoft.com/office/drawing/2014/main" id="{A3220609-3672-48B6-ACEA-3B210479DFDB}"/>
               </a:ext>
             </a:extLst>
           </p:cNvPr>
@@ -11534,7 +11566,7 @@
             <a:pPr algn="l">
               <a:defRPr sz="1425" b="0">
                 <a:solidFill>
-                  <a:srgbClr val="10213D"/>
+                  <a:srgbClr val="0F1A2B"/>
                 </a:solidFill>
                 <a:latin typeface="Helvetica Neue"/>
                 <a:ea typeface="Helvetica Neue"/>
@@ -11544,7 +11576,7 @@
             <a:r>
               <a:rPr sz="1425" b="0">
                 <a:solidFill>
-                  <a:srgbClr val="10213D"/>
+                  <a:srgbClr val="0F1A2B"/>
                 </a:solidFill>
                 <a:latin typeface="Helvetica Neue"/>
                 <a:ea typeface="Helvetica Neue"/>
@@ -11560,7 +11592,7 @@
           <p:cNvPr id="13" name="">
             <a:extLst xmlns:a="http://schemas.openxmlformats.org/drawingml/2006/main">
               <a:ext uri="{FF2B5EF4-FFF2-40B4-BE49-F238E27FC236}">
-                <a16:creationId xmlns:a16="http://schemas.microsoft.com/office/drawing/2014/main" id="{C45DE483-04A6-444B-B363-38B263BF3BCE}"/>
+                <a16:creationId xmlns:a16="http://schemas.microsoft.com/office/drawing/2014/main" id="{0B93318A-8933-4356-B4F0-7074A313C437}"/>
               </a:ext>
             </a:extLst>
           </p:cNvPr>
@@ -11580,7 +11612,7 @@
             </a:avLst>
           </a:prstGeom>
           <a:solidFill xmlns:a="http://schemas.openxmlformats.org/drawingml/2006/main">
-            <a:srgbClr val="EEF7FF"/>
+            <a:srgbClr val="D1CFC9"/>
           </a:solidFill>
           <a:ln xmlns:a="http://schemas.openxmlformats.org/drawingml/2006/main" w="0">
             <a:noFill/>
@@ -11592,7 +11624,7 @@
           <p:cNvPr id="14" name="">
             <a:extLst xmlns:a="http://schemas.openxmlformats.org/drawingml/2006/main">
               <a:ext uri="{FF2B5EF4-FFF2-40B4-BE49-F238E27FC236}">
-                <a16:creationId xmlns:a16="http://schemas.microsoft.com/office/drawing/2014/main" id="{CDEF5F6C-04A5-42B3-9354-D36E475FAC4F}"/>
+                <a16:creationId xmlns:a16="http://schemas.microsoft.com/office/drawing/2014/main" id="{6CECF0BF-7651-4C71-80BC-14C68F911E4C}"/>
               </a:ext>
             </a:extLst>
           </p:cNvPr>
@@ -11623,7 +11655,7 @@
             <a:pPr algn="l">
               <a:defRPr sz="1350" b="1">
                 <a:solidFill>
-                  <a:srgbClr val="2563EB"/>
+                  <a:srgbClr val="52677D"/>
                 </a:solidFill>
                 <a:latin typeface="Helvetica Neue"/>
                 <a:ea typeface="Helvetica Neue"/>
@@ -11633,7 +11665,7 @@
             <a:r>
               <a:rPr sz="1350" b="1">
                 <a:solidFill>
-                  <a:srgbClr val="2563EB"/>
+                  <a:srgbClr val="52677D"/>
                 </a:solidFill>
                 <a:latin typeface="Helvetica Neue"/>
                 <a:ea typeface="Helvetica Neue"/>
@@ -11649,7 +11681,7 @@
           <p:cNvPr id="15" name="">
             <a:extLst xmlns:a="http://schemas.openxmlformats.org/drawingml/2006/main">
               <a:ext uri="{FF2B5EF4-FFF2-40B4-BE49-F238E27FC236}">
-                <a16:creationId xmlns:a16="http://schemas.microsoft.com/office/drawing/2014/main" id="{749101E6-F1CD-4300-BDB8-4FEE48EB5789}"/>
+                <a16:creationId xmlns:a16="http://schemas.microsoft.com/office/drawing/2014/main" id="{0431249E-2DA5-4BDB-8991-930E0AE13942}"/>
               </a:ext>
             </a:extLst>
           </p:cNvPr>
@@ -11680,7 +11712,7 @@
             <a:pPr algn="l">
               <a:defRPr sz="1425" b="0">
                 <a:solidFill>
-                  <a:srgbClr val="10213D"/>
+                  <a:srgbClr val="0F1A2B"/>
                 </a:solidFill>
                 <a:latin typeface="Helvetica Neue"/>
                 <a:ea typeface="Helvetica Neue"/>
@@ -11690,7 +11722,7 @@
             <a:r>
               <a:rPr sz="1425" b="0">
                 <a:solidFill>
-                  <a:srgbClr val="10213D"/>
+                  <a:srgbClr val="0F1A2B"/>
                 </a:solidFill>
                 <a:latin typeface="Helvetica Neue"/>
                 <a:ea typeface="Helvetica Neue"/>
@@ -11706,7 +11738,7 @@
           <p:cNvPr id="16" name="">
             <a:extLst xmlns:a="http://schemas.openxmlformats.org/drawingml/2006/main">
               <a:ext uri="{FF2B5EF4-FFF2-40B4-BE49-F238E27FC236}">
-                <a16:creationId xmlns:a16="http://schemas.microsoft.com/office/drawing/2014/main" id="{DBCD05C7-7D03-46F8-BC8E-FD604CD647D3}"/>
+                <a16:creationId xmlns:a16="http://schemas.microsoft.com/office/drawing/2014/main" id="{59765FB7-2035-438D-8E92-79F12CE63A3D}"/>
               </a:ext>
             </a:extLst>
           </p:cNvPr>
@@ -11726,7 +11758,7 @@
             </a:avLst>
           </a:prstGeom>
           <a:solidFill xmlns:a="http://schemas.openxmlformats.org/drawingml/2006/main">
-            <a:srgbClr val="EEF7FF"/>
+            <a:srgbClr val="D1CFC9"/>
           </a:solidFill>
           <a:ln xmlns:a="http://schemas.openxmlformats.org/drawingml/2006/main" w="0">
             <a:noFill/>
@@ -11738,7 +11770,7 @@
           <p:cNvPr id="17" name="">
             <a:extLst xmlns:a="http://schemas.openxmlformats.org/drawingml/2006/main">
               <a:ext uri="{FF2B5EF4-FFF2-40B4-BE49-F238E27FC236}">
-                <a16:creationId xmlns:a16="http://schemas.microsoft.com/office/drawing/2014/main" id="{E5E42F81-D4A2-4013-A956-70FDAA7E38BC}"/>
+                <a16:creationId xmlns:a16="http://schemas.microsoft.com/office/drawing/2014/main" id="{173BE1F4-5474-4AE2-A81E-E682B62A7DFD}"/>
               </a:ext>
             </a:extLst>
           </p:cNvPr>
@@ -11769,7 +11801,7 @@
             <a:pPr algn="l">
               <a:defRPr sz="1350" b="1">
                 <a:solidFill>
-                  <a:srgbClr val="2563EB"/>
+                  <a:srgbClr val="52677D"/>
                 </a:solidFill>
                 <a:latin typeface="Helvetica Neue"/>
                 <a:ea typeface="Helvetica Neue"/>
@@ -11779,7 +11811,7 @@
             <a:r>
               <a:rPr sz="1350" b="1">
                 <a:solidFill>
-                  <a:srgbClr val="2563EB"/>
+                  <a:srgbClr val="52677D"/>
                 </a:solidFill>
                 <a:latin typeface="Helvetica Neue"/>
                 <a:ea typeface="Helvetica Neue"/>
@@ -11795,7 +11827,7 @@
           <p:cNvPr id="18" name="">
             <a:extLst xmlns:a="http://schemas.openxmlformats.org/drawingml/2006/main">
               <a:ext uri="{FF2B5EF4-FFF2-40B4-BE49-F238E27FC236}">
-                <a16:creationId xmlns:a16="http://schemas.microsoft.com/office/drawing/2014/main" id="{02DDEEF5-81AF-47A0-8B82-688B88D50273}"/>
+                <a16:creationId xmlns:a16="http://schemas.microsoft.com/office/drawing/2014/main" id="{0DEA3B60-DF41-4563-9731-4CF0B5DBC74A}"/>
               </a:ext>
             </a:extLst>
           </p:cNvPr>
@@ -11826,7 +11858,7 @@
             <a:pPr algn="l">
               <a:defRPr sz="1425" b="0">
                 <a:solidFill>
-                  <a:srgbClr val="10213D"/>
+                  <a:srgbClr val="0F1A2B"/>
                 </a:solidFill>
                 <a:latin typeface="Helvetica Neue"/>
                 <a:ea typeface="Helvetica Neue"/>
@@ -11836,7 +11868,7 @@
             <a:r>
               <a:rPr sz="1425" b="0">
                 <a:solidFill>
-                  <a:srgbClr val="10213D"/>
+                  <a:srgbClr val="0F1A2B"/>
                 </a:solidFill>
                 <a:latin typeface="Helvetica Neue"/>
                 <a:ea typeface="Helvetica Neue"/>
@@ -11852,7 +11884,7 @@
           <p:cNvPr id="19" name="">
             <a:extLst xmlns:a="http://schemas.openxmlformats.org/drawingml/2006/main">
               <a:ext uri="{FF2B5EF4-FFF2-40B4-BE49-F238E27FC236}">
-                <a16:creationId xmlns:a16="http://schemas.microsoft.com/office/drawing/2014/main" id="{BB5D799C-6340-48C7-A59E-9448F8DE066D}"/>
+                <a16:creationId xmlns:a16="http://schemas.microsoft.com/office/drawing/2014/main" id="{A244156F-F0B7-457F-9FF6-8324AA8E7584}"/>
               </a:ext>
             </a:extLst>
           </p:cNvPr>
@@ -11872,7 +11904,7 @@
             </a:avLst>
           </a:prstGeom>
           <a:solidFill xmlns:a="http://schemas.openxmlformats.org/drawingml/2006/main">
-            <a:srgbClr val="EEF7FF"/>
+            <a:srgbClr val="D1CFC9"/>
           </a:solidFill>
           <a:ln xmlns:a="http://schemas.openxmlformats.org/drawingml/2006/main" w="0">
             <a:noFill/>
@@ -11884,7 +11916,7 @@
           <p:cNvPr id="20" name="">
             <a:extLst xmlns:a="http://schemas.openxmlformats.org/drawingml/2006/main">
               <a:ext uri="{FF2B5EF4-FFF2-40B4-BE49-F238E27FC236}">
-                <a16:creationId xmlns:a16="http://schemas.microsoft.com/office/drawing/2014/main" id="{37109A9D-B70A-40ED-817E-038A9D267A1B}"/>
+                <a16:creationId xmlns:a16="http://schemas.microsoft.com/office/drawing/2014/main" id="{2807B19D-6D19-4DF0-95DD-3BE52623BC36}"/>
               </a:ext>
             </a:extLst>
           </p:cNvPr>
@@ -11915,7 +11947,7 @@
             <a:pPr algn="l">
               <a:defRPr sz="1350" b="1">
                 <a:solidFill>
-                  <a:srgbClr val="2563EB"/>
+                  <a:srgbClr val="52677D"/>
                 </a:solidFill>
                 <a:latin typeface="Helvetica Neue"/>
                 <a:ea typeface="Helvetica Neue"/>
@@ -11925,7 +11957,7 @@
             <a:r>
               <a:rPr sz="1350" b="1">
                 <a:solidFill>
-                  <a:srgbClr val="2563EB"/>
+                  <a:srgbClr val="52677D"/>
                 </a:solidFill>
                 <a:latin typeface="Helvetica Neue"/>
                 <a:ea typeface="Helvetica Neue"/>
@@ -11941,7 +11973,7 @@
           <p:cNvPr id="21" name="">
             <a:extLst xmlns:a="http://schemas.openxmlformats.org/drawingml/2006/main">
               <a:ext uri="{FF2B5EF4-FFF2-40B4-BE49-F238E27FC236}">
-                <a16:creationId xmlns:a16="http://schemas.microsoft.com/office/drawing/2014/main" id="{47382401-FEAA-442F-8898-886FE63ADBAB}"/>
+                <a16:creationId xmlns:a16="http://schemas.microsoft.com/office/drawing/2014/main" id="{B3BC878F-9A97-499C-ADDE-942C94951132}"/>
               </a:ext>
             </a:extLst>
           </p:cNvPr>
@@ -11972,7 +12004,7 @@
             <a:pPr algn="l">
               <a:defRPr sz="1425" b="0">
                 <a:solidFill>
-                  <a:srgbClr val="10213D"/>
+                  <a:srgbClr val="0F1A2B"/>
                 </a:solidFill>
                 <a:latin typeface="Helvetica Neue"/>
                 <a:ea typeface="Helvetica Neue"/>
@@ -11982,7 +12014,7 @@
             <a:r>
               <a:rPr sz="1425" b="0">
                 <a:solidFill>
-                  <a:srgbClr val="10213D"/>
+                  <a:srgbClr val="0F1A2B"/>
                 </a:solidFill>
                 <a:latin typeface="Helvetica Neue"/>
                 <a:ea typeface="Helvetica Neue"/>
@@ -11998,7 +12030,7 @@
           <p:cNvPr id="22" name="">
             <a:extLst xmlns:a="http://schemas.openxmlformats.org/drawingml/2006/main">
               <a:ext uri="{FF2B5EF4-FFF2-40B4-BE49-F238E27FC236}">
-                <a16:creationId xmlns:a16="http://schemas.microsoft.com/office/drawing/2014/main" id="{0C3BA346-A49B-43C5-86A0-D271F6A8DC33}"/>
+                <a16:creationId xmlns:a16="http://schemas.microsoft.com/office/drawing/2014/main" id="{C4F79B0B-A97A-408D-8B5D-D47C39DB20EC}"/>
               </a:ext>
             </a:extLst>
           </p:cNvPr>
@@ -12018,7 +12050,7 @@
             </a:avLst>
           </a:prstGeom>
           <a:solidFill xmlns:a="http://schemas.openxmlformats.org/drawingml/2006/main">
-            <a:srgbClr val="EEF7FF"/>
+            <a:srgbClr val="D1CFC9"/>
           </a:solidFill>
           <a:ln xmlns:a="http://schemas.openxmlformats.org/drawingml/2006/main" w="0">
             <a:noFill/>
@@ -12030,7 +12062,7 @@
           <p:cNvPr id="23" name="">
             <a:extLst xmlns:a="http://schemas.openxmlformats.org/drawingml/2006/main">
               <a:ext uri="{FF2B5EF4-FFF2-40B4-BE49-F238E27FC236}">
-                <a16:creationId xmlns:a16="http://schemas.microsoft.com/office/drawing/2014/main" id="{7617A345-7032-482E-994B-A612FE7A6C14}"/>
+                <a16:creationId xmlns:a16="http://schemas.microsoft.com/office/drawing/2014/main" id="{A5A92903-45E1-4B33-93CF-F5B066256D62}"/>
               </a:ext>
             </a:extLst>
           </p:cNvPr>
@@ -12061,7 +12093,7 @@
             <a:pPr algn="l">
               <a:defRPr sz="1350" b="1">
                 <a:solidFill>
-                  <a:srgbClr val="2563EB"/>
+                  <a:srgbClr val="52677D"/>
                 </a:solidFill>
                 <a:latin typeface="Helvetica Neue"/>
                 <a:ea typeface="Helvetica Neue"/>
@@ -12071,7 +12103,7 @@
             <a:r>
               <a:rPr sz="1350" b="1">
                 <a:solidFill>
-                  <a:srgbClr val="2563EB"/>
+                  <a:srgbClr val="52677D"/>
                 </a:solidFill>
                 <a:latin typeface="Helvetica Neue"/>
                 <a:ea typeface="Helvetica Neue"/>
@@ -12087,7 +12119,7 @@
           <p:cNvPr id="24" name="">
             <a:extLst xmlns:a="http://schemas.openxmlformats.org/drawingml/2006/main">
               <a:ext uri="{FF2B5EF4-FFF2-40B4-BE49-F238E27FC236}">
-                <a16:creationId xmlns:a16="http://schemas.microsoft.com/office/drawing/2014/main" id="{52B7FC51-2466-460D-8656-9EED3ABF6A5A}"/>
+                <a16:creationId xmlns:a16="http://schemas.microsoft.com/office/drawing/2014/main" id="{88EE7711-606D-4764-B0D2-E65199875E98}"/>
               </a:ext>
             </a:extLst>
           </p:cNvPr>
@@ -12118,7 +12150,7 @@
             <a:pPr algn="l">
               <a:defRPr sz="1425" b="0">
                 <a:solidFill>
-                  <a:srgbClr val="10213D"/>
+                  <a:srgbClr val="0F1A2B"/>
                 </a:solidFill>
                 <a:latin typeface="Helvetica Neue"/>
                 <a:ea typeface="Helvetica Neue"/>
@@ -12128,7 +12160,7 @@
             <a:r>
               <a:rPr sz="1425" b="0">
                 <a:solidFill>
-                  <a:srgbClr val="10213D"/>
+                  <a:srgbClr val="0F1A2B"/>
                 </a:solidFill>
                 <a:latin typeface="Helvetica Neue"/>
                 <a:ea typeface="Helvetica Neue"/>
@@ -12144,7 +12176,7 @@
           <p:cNvPr id="25" name="">
             <a:extLst xmlns:a="http://schemas.openxmlformats.org/drawingml/2006/main">
               <a:ext uri="{FF2B5EF4-FFF2-40B4-BE49-F238E27FC236}">
-                <a16:creationId xmlns:a16="http://schemas.microsoft.com/office/drawing/2014/main" id="{CF0900BC-02C3-41F2-9FCF-40A6CC2C0692}"/>
+                <a16:creationId xmlns:a16="http://schemas.microsoft.com/office/drawing/2014/main" id="{8B7800B3-EF4E-4F0E-B4A1-9F7D263F1230}"/>
               </a:ext>
             </a:extLst>
           </p:cNvPr>
@@ -12164,7 +12196,7 @@
             </a:avLst>
           </a:prstGeom>
           <a:solidFill xmlns:a="http://schemas.openxmlformats.org/drawingml/2006/main">
-            <a:srgbClr val="EEF7FF"/>
+            <a:srgbClr val="D1CFC9"/>
           </a:solidFill>
           <a:ln xmlns:a="http://schemas.openxmlformats.org/drawingml/2006/main" w="0">
             <a:noFill/>
@@ -12176,7 +12208,7 @@
           <p:cNvPr id="26" name="">
             <a:extLst xmlns:a="http://schemas.openxmlformats.org/drawingml/2006/main">
               <a:ext uri="{FF2B5EF4-FFF2-40B4-BE49-F238E27FC236}">
-                <a16:creationId xmlns:a16="http://schemas.microsoft.com/office/drawing/2014/main" id="{E21FD05B-4546-42D1-9F8F-7E9F99A459C3}"/>
+                <a16:creationId xmlns:a16="http://schemas.microsoft.com/office/drawing/2014/main" id="{ED470954-E24B-4C85-95C5-D7F9D16C4F1F}"/>
               </a:ext>
             </a:extLst>
           </p:cNvPr>
@@ -12207,7 +12239,7 @@
             <a:pPr algn="l">
               <a:defRPr sz="1350" b="1">
                 <a:solidFill>
-                  <a:srgbClr val="2563EB"/>
+                  <a:srgbClr val="52677D"/>
                 </a:solidFill>
                 <a:latin typeface="Helvetica Neue"/>
                 <a:ea typeface="Helvetica Neue"/>
@@ -12217,7 +12249,7 @@
             <a:r>
               <a:rPr sz="1350" b="1">
                 <a:solidFill>
-                  <a:srgbClr val="2563EB"/>
+                  <a:srgbClr val="52677D"/>
                 </a:solidFill>
                 <a:latin typeface="Helvetica Neue"/>
                 <a:ea typeface="Helvetica Neue"/>
@@ -12233,7 +12265,7 @@
           <p:cNvPr id="27" name="">
             <a:extLst xmlns:a="http://schemas.openxmlformats.org/drawingml/2006/main">
               <a:ext uri="{FF2B5EF4-FFF2-40B4-BE49-F238E27FC236}">
-                <a16:creationId xmlns:a16="http://schemas.microsoft.com/office/drawing/2014/main" id="{46F60253-3A43-418B-B203-9F435317DF1F}"/>
+                <a16:creationId xmlns:a16="http://schemas.microsoft.com/office/drawing/2014/main" id="{3BD16B57-5BEC-494C-93F6-FA42B25F1B1F}"/>
               </a:ext>
             </a:extLst>
           </p:cNvPr>
@@ -12264,7 +12296,7 @@
             <a:pPr algn="l">
               <a:defRPr sz="1425" b="0">
                 <a:solidFill>
-                  <a:srgbClr val="10213D"/>
+                  <a:srgbClr val="0F1A2B"/>
                 </a:solidFill>
                 <a:latin typeface="Helvetica Neue"/>
                 <a:ea typeface="Helvetica Neue"/>
@@ -12274,7 +12306,7 @@
             <a:r>
               <a:rPr sz="1425" b="0">
                 <a:solidFill>
-                  <a:srgbClr val="10213D"/>
+                  <a:srgbClr val="0F1A2B"/>
                 </a:solidFill>
                 <a:latin typeface="Helvetica Neue"/>
                 <a:ea typeface="Helvetica Neue"/>
@@ -12290,7 +12322,7 @@
           <p:cNvPr id="28" name="">
             <a:extLst xmlns:a="http://schemas.openxmlformats.org/drawingml/2006/main">
               <a:ext uri="{FF2B5EF4-FFF2-40B4-BE49-F238E27FC236}">
-                <a16:creationId xmlns:a16="http://schemas.microsoft.com/office/drawing/2014/main" id="{3C8F7342-B016-41DD-85FC-AA3B990381F8}"/>
+                <a16:creationId xmlns:a16="http://schemas.microsoft.com/office/drawing/2014/main" id="{67044FA3-A7E9-436B-BC3A-B8FCE2945285}"/>
               </a:ext>
             </a:extLst>
           </p:cNvPr>
@@ -12310,7 +12342,7 @@
             </a:avLst>
           </a:prstGeom>
           <a:solidFill xmlns:a="http://schemas.openxmlformats.org/drawingml/2006/main">
-            <a:srgbClr val="EEF7FF"/>
+            <a:srgbClr val="D1CFC9"/>
           </a:solidFill>
           <a:ln xmlns:a="http://schemas.openxmlformats.org/drawingml/2006/main" w="0">
             <a:noFill/>
@@ -12322,7 +12354,7 @@
           <p:cNvPr id="29" name="">
             <a:extLst xmlns:a="http://schemas.openxmlformats.org/drawingml/2006/main">
               <a:ext uri="{FF2B5EF4-FFF2-40B4-BE49-F238E27FC236}">
-                <a16:creationId xmlns:a16="http://schemas.microsoft.com/office/drawing/2014/main" id="{E45E45FF-C91A-49DE-8114-15921901BD21}"/>
+                <a16:creationId xmlns:a16="http://schemas.microsoft.com/office/drawing/2014/main" id="{DECDC652-2A61-4A03-9505-E82E42EA3C75}"/>
               </a:ext>
             </a:extLst>
           </p:cNvPr>
@@ -12353,7 +12385,7 @@
             <a:pPr algn="l">
               <a:defRPr sz="1350" b="0">
                 <a:solidFill>
-                  <a:srgbClr val="092454"/>
+                  <a:srgbClr val="1C2E4A"/>
                 </a:solidFill>
                 <a:latin typeface="Helvetica Neue"/>
                 <a:ea typeface="Helvetica Neue"/>
@@ -12363,7 +12395,7 @@
             <a:r>
               <a:rPr sz="1350" b="0">
                 <a:solidFill>
-                  <a:srgbClr val="092454"/>
+                  <a:srgbClr val="1C2E4A"/>
                 </a:solidFill>
                 <a:latin typeface="Helvetica Neue"/>
                 <a:ea typeface="Helvetica Neue"/>
@@ -12379,7 +12411,7 @@
           <p:cNvPr id="30" name="">
             <a:extLst xmlns:a="http://schemas.openxmlformats.org/drawingml/2006/main">
               <a:ext uri="{FF2B5EF4-FFF2-40B4-BE49-F238E27FC236}">
-                <a16:creationId xmlns:a16="http://schemas.microsoft.com/office/drawing/2014/main" id="{324BB08E-304E-4F67-A71D-7BB1AADD5740}"/>
+                <a16:creationId xmlns:a16="http://schemas.microsoft.com/office/drawing/2014/main" id="{71749405-CA6B-4190-BBD5-B3085B424DA1}"/>
               </a:ext>
             </a:extLst>
           </p:cNvPr>
@@ -12397,7 +12429,7 @@
             <a:avLst/>
           </a:prstGeom>
           <a:solidFill xmlns:a="http://schemas.openxmlformats.org/drawingml/2006/main">
-            <a:srgbClr val="D8E5F2"/>
+            <a:srgbClr val="BDC4D4"/>
           </a:solidFill>
           <a:ln xmlns:a="http://schemas.openxmlformats.org/drawingml/2006/main" w="0">
             <a:noFill/>
@@ -12409,7 +12441,7 @@
           <p:cNvPr id="31" name="">
             <a:extLst xmlns:a="http://schemas.openxmlformats.org/drawingml/2006/main">
               <a:ext uri="{FF2B5EF4-FFF2-40B4-BE49-F238E27FC236}">
-                <a16:creationId xmlns:a16="http://schemas.microsoft.com/office/drawing/2014/main" id="{81C5E412-0B57-4CD1-A5A3-AE937BA78E7F}"/>
+                <a16:creationId xmlns:a16="http://schemas.microsoft.com/office/drawing/2014/main" id="{B1BAE24D-D9F8-49A0-9595-254957C7177D}"/>
               </a:ext>
             </a:extLst>
           </p:cNvPr>
@@ -12440,7 +12472,7 @@
             <a:pPr algn="l">
               <a:defRPr sz="750" b="0">
                 <a:solidFill>
-                  <a:srgbClr val="61718A"/>
+                  <a:srgbClr val="52677D"/>
                 </a:solidFill>
                 <a:latin typeface="Helvetica Neue"/>
                 <a:ea typeface="Helvetica Neue"/>
@@ -12450,7 +12482,7 @@
             <a:r>
               <a:rPr sz="750" b="0">
                 <a:solidFill>
-                  <a:srgbClr val="61718A"/>
+                  <a:srgbClr val="52677D"/>
                 </a:solidFill>
                 <a:latin typeface="Helvetica Neue"/>
                 <a:ea typeface="Helvetica Neue"/>
@@ -12466,7 +12498,7 @@
           <p:cNvPr id="32" name="">
             <a:extLst xmlns:a="http://schemas.openxmlformats.org/drawingml/2006/main">
               <a:ext uri="{FF2B5EF4-FFF2-40B4-BE49-F238E27FC236}">
-                <a16:creationId xmlns:a16="http://schemas.microsoft.com/office/drawing/2014/main" id="{505094A1-73F9-4FC3-9141-B7E36D163E70}"/>
+                <a16:creationId xmlns:a16="http://schemas.microsoft.com/office/drawing/2014/main" id="{FDC482C6-E6F0-4C6C-9A9D-69F2EA7B08BC}"/>
               </a:ext>
             </a:extLst>
           </p:cNvPr>
@@ -12497,7 +12529,7 @@
             <a:pPr algn="r">
               <a:defRPr sz="825" b="1">
                 <a:solidFill>
-                  <a:srgbClr val="2563EB"/>
+                  <a:srgbClr val="52677D"/>
                 </a:solidFill>
                 <a:latin typeface="Helvetica Neue"/>
                 <a:ea typeface="Helvetica Neue"/>
@@ -12507,7 +12539,7 @@
             <a:r>
               <a:rPr sz="825" b="1">
                 <a:solidFill>
-                  <a:srgbClr val="2563EB"/>
+                  <a:srgbClr val="52677D"/>
                 </a:solidFill>
                 <a:latin typeface="Helvetica Neue"/>
                 <a:ea typeface="Helvetica Neue"/>
@@ -12521,7 +12553,7 @@
     </p:spTree>
     <p:extLst>
       <p:ext uri="{BB962C8B-B14F-4D97-AF65-F5344CB8AC3E}">
-        <p14:creationId xmlns:p14="http://schemas.microsoft.com/office/powerpoint/2010/main" val="1433916849"/>
+        <p14:creationId xmlns:p14="http://schemas.microsoft.com/office/powerpoint/2010/main" val="1985475482"/>
       </p:ext>
     </p:extLst>
   </p:cSld>
@@ -12534,7 +12566,7 @@
     <p:bg>
       <p:bgPr>
         <a:solidFill xmlns:a="http://schemas.openxmlformats.org/drawingml/2006/main">
-          <a:srgbClr val="092454"/>
+          <a:srgbClr val="1C2E4A"/>
         </a:solidFill>
       </p:bgPr>
     </p:bg>
@@ -12552,7 +12584,7 @@
           <p:cNvPr id="20" name="">
             <a:extLst xmlns:a="http://schemas.openxmlformats.org/drawingml/2006/main">
               <a:ext uri="{FF2B5EF4-FFF2-40B4-BE49-F238E27FC236}">
-                <a16:creationId xmlns:a16="http://schemas.microsoft.com/office/drawing/2014/main" id="{D73FF0D6-9ABE-497F-93F1-3101FCA9E642}"/>
+                <a16:creationId xmlns:a16="http://schemas.microsoft.com/office/drawing/2014/main" id="{3D1E9FD5-5823-40A3-9201-B9E40F072913}"/>
               </a:ext>
             </a:extLst>
           </p:cNvPr>
@@ -12583,7 +12615,7 @@
             <a:pPr algn="l">
               <a:defRPr sz="1125" b="1">
                 <a:solidFill>
-                  <a:srgbClr val="FFD43B"/>
+                  <a:srgbClr val="D1CFC9"/>
                 </a:solidFill>
                 <a:latin typeface="Helvetica Neue"/>
                 <a:ea typeface="Helvetica Neue"/>
@@ -12593,7 +12625,7 @@
             <a:r>
               <a:rPr sz="1125" b="1">
                 <a:solidFill>
-                  <a:srgbClr val="FFD43B"/>
+                  <a:srgbClr val="D1CFC9"/>
                 </a:solidFill>
                 <a:latin typeface="Helvetica Neue"/>
                 <a:ea typeface="Helvetica Neue"/>
@@ -12609,7 +12641,7 @@
           <p:cNvPr id="2" name="">
             <a:extLst xmlns:a="http://schemas.openxmlformats.org/drawingml/2006/main">
               <a:ext uri="{FF2B5EF4-FFF2-40B4-BE49-F238E27FC236}">
-                <a16:creationId xmlns:a16="http://schemas.microsoft.com/office/drawing/2014/main" id="{044FF8EB-F652-425C-95D2-357C9BAE2139}"/>
+                <a16:creationId xmlns:a16="http://schemas.microsoft.com/office/drawing/2014/main" id="{9DBAD1F7-BFBD-47C4-9E1C-A58B63604546}"/>
               </a:ext>
             </a:extLst>
           </p:cNvPr>
@@ -12666,7 +12698,7 @@
           <p:cNvPr id="3" name="">
             <a:extLst xmlns:a="http://schemas.openxmlformats.org/drawingml/2006/main">
               <a:ext uri="{FF2B5EF4-FFF2-40B4-BE49-F238E27FC236}">
-                <a16:creationId xmlns:a16="http://schemas.microsoft.com/office/drawing/2014/main" id="{7CBBD46C-D20C-4E84-BC35-670D65FFA5B3}"/>
+                <a16:creationId xmlns:a16="http://schemas.microsoft.com/office/drawing/2014/main" id="{93F4B0E1-2A35-4551-951F-9943F957C148}"/>
               </a:ext>
             </a:extLst>
           </p:cNvPr>
@@ -12686,7 +12718,7 @@
             </a:avLst>
           </a:prstGeom>
           <a:solidFill xmlns:a="http://schemas.openxmlformats.org/drawingml/2006/main">
-            <a:srgbClr val="FFD43B"/>
+            <a:srgbClr val="D1CFC9"/>
           </a:solidFill>
           <a:ln xmlns:a="http://schemas.openxmlformats.org/drawingml/2006/main" w="0">
             <a:noFill/>
@@ -12698,7 +12730,7 @@
           <p:cNvPr id="4" name="">
             <a:extLst xmlns:a="http://schemas.openxmlformats.org/drawingml/2006/main">
               <a:ext uri="{FF2B5EF4-FFF2-40B4-BE49-F238E27FC236}">
-                <a16:creationId xmlns:a16="http://schemas.microsoft.com/office/drawing/2014/main" id="{54203513-4A85-415F-8AC9-E2702DBCE814}"/>
+                <a16:creationId xmlns:a16="http://schemas.microsoft.com/office/drawing/2014/main" id="{C31EEB62-5CE3-4A02-8D09-009D5E63F911}"/>
               </a:ext>
             </a:extLst>
           </p:cNvPr>
@@ -12729,7 +12761,7 @@
             <a:pPr algn="ctr">
               <a:defRPr sz="1275" b="1">
                 <a:solidFill>
-                  <a:srgbClr val="092454"/>
+                  <a:srgbClr val="1C2E4A"/>
                 </a:solidFill>
                 <a:latin typeface="Helvetica Neue"/>
                 <a:ea typeface="Helvetica Neue"/>
@@ -12739,7 +12771,7 @@
             <a:r>
               <a:rPr sz="1275" b="1">
                 <a:solidFill>
-                  <a:srgbClr val="092454"/>
+                  <a:srgbClr val="1C2E4A"/>
                 </a:solidFill>
                 <a:latin typeface="Helvetica Neue"/>
                 <a:ea typeface="Helvetica Neue"/>
@@ -12755,7 +12787,7 @@
           <p:cNvPr id="5" name="">
             <a:extLst xmlns:a="http://schemas.openxmlformats.org/drawingml/2006/main">
               <a:ext uri="{FF2B5EF4-FFF2-40B4-BE49-F238E27FC236}">
-                <a16:creationId xmlns:a16="http://schemas.microsoft.com/office/drawing/2014/main" id="{7E025225-AA95-4CA5-AC6C-F97449C9DAFB}"/>
+                <a16:creationId xmlns:a16="http://schemas.microsoft.com/office/drawing/2014/main" id="{5F2CBF06-C8FE-45A5-8F95-4CC2414C537C}"/>
               </a:ext>
             </a:extLst>
           </p:cNvPr>
@@ -12786,7 +12818,7 @@
             <a:pPr algn="l">
               <a:defRPr sz="1950" b="1">
                 <a:solidFill>
-                  <a:srgbClr val="FFD43B"/>
+                  <a:srgbClr val="D1CFC9"/>
                 </a:solidFill>
                 <a:latin typeface="Helvetica Neue"/>
                 <a:ea typeface="Helvetica Neue"/>
@@ -12796,7 +12828,7 @@
             <a:r>
               <a:rPr sz="1950" b="1">
                 <a:solidFill>
-                  <a:srgbClr val="FFD43B"/>
+                  <a:srgbClr val="D1CFC9"/>
                 </a:solidFill>
                 <a:latin typeface="Helvetica Neue"/>
                 <a:ea typeface="Helvetica Neue"/>
@@ -12812,7 +12844,7 @@
           <p:cNvPr id="6" name="">
             <a:extLst xmlns:a="http://schemas.openxmlformats.org/drawingml/2006/main">
               <a:ext uri="{FF2B5EF4-FFF2-40B4-BE49-F238E27FC236}">
-                <a16:creationId xmlns:a16="http://schemas.microsoft.com/office/drawing/2014/main" id="{871F9B10-59EE-4D8A-8E00-FE056DC97F86}"/>
+                <a16:creationId xmlns:a16="http://schemas.microsoft.com/office/drawing/2014/main" id="{6C808624-2309-4F9B-AF88-EC11BC5FE6D4}"/>
               </a:ext>
             </a:extLst>
           </p:cNvPr>
@@ -12869,7 +12901,7 @@
           <p:cNvPr id="7" name="">
             <a:extLst xmlns:a="http://schemas.openxmlformats.org/drawingml/2006/main">
               <a:ext uri="{FF2B5EF4-FFF2-40B4-BE49-F238E27FC236}">
-                <a16:creationId xmlns:a16="http://schemas.microsoft.com/office/drawing/2014/main" id="{7AB41D22-B9BB-4531-A823-B6DEEF79D076}"/>
+                <a16:creationId xmlns:a16="http://schemas.microsoft.com/office/drawing/2014/main" id="{073999CF-5462-4A39-853C-082F29F67BCD}"/>
               </a:ext>
             </a:extLst>
           </p:cNvPr>
@@ -12900,7 +12932,7 @@
             <a:pPr algn="l">
               <a:defRPr sz="1950" b="1">
                 <a:solidFill>
-                  <a:srgbClr val="FFD43B"/>
+                  <a:srgbClr val="D1CFC9"/>
                 </a:solidFill>
                 <a:latin typeface="Helvetica Neue"/>
                 <a:ea typeface="Helvetica Neue"/>
@@ -12910,7 +12942,7 @@
             <a:r>
               <a:rPr sz="1950" b="1">
                 <a:solidFill>
-                  <a:srgbClr val="FFD43B"/>
+                  <a:srgbClr val="D1CFC9"/>
                 </a:solidFill>
                 <a:latin typeface="Helvetica Neue"/>
                 <a:ea typeface="Helvetica Neue"/>
@@ -12926,7 +12958,7 @@
           <p:cNvPr id="8" name="">
             <a:extLst xmlns:a="http://schemas.openxmlformats.org/drawingml/2006/main">
               <a:ext uri="{FF2B5EF4-FFF2-40B4-BE49-F238E27FC236}">
-                <a16:creationId xmlns:a16="http://schemas.microsoft.com/office/drawing/2014/main" id="{F224FF5E-09B9-46CD-B669-F0675813FE69}"/>
+                <a16:creationId xmlns:a16="http://schemas.microsoft.com/office/drawing/2014/main" id="{4D54E410-CA3C-4287-8B6D-31EF9D5C6ABD}"/>
               </a:ext>
             </a:extLst>
           </p:cNvPr>
@@ -12983,7 +13015,7 @@
           <p:cNvPr id="9" name="">
             <a:extLst xmlns:a="http://schemas.openxmlformats.org/drawingml/2006/main">
               <a:ext uri="{FF2B5EF4-FFF2-40B4-BE49-F238E27FC236}">
-                <a16:creationId xmlns:a16="http://schemas.microsoft.com/office/drawing/2014/main" id="{C5699BF0-02A2-45E5-9C46-D88FA8AD0A9E}"/>
+                <a16:creationId xmlns:a16="http://schemas.microsoft.com/office/drawing/2014/main" id="{FB3F162C-81E3-412B-9E23-2ADE67B9E611}"/>
               </a:ext>
             </a:extLst>
           </p:cNvPr>
@@ -13014,7 +13046,7 @@
             <a:pPr algn="l">
               <a:defRPr sz="1950" b="1">
                 <a:solidFill>
-                  <a:srgbClr val="FFD43B"/>
+                  <a:srgbClr val="D1CFC9"/>
                 </a:solidFill>
                 <a:latin typeface="Helvetica Neue"/>
                 <a:ea typeface="Helvetica Neue"/>
@@ -13024,7 +13056,7 @@
             <a:r>
               <a:rPr sz="1950" b="1">
                 <a:solidFill>
-                  <a:srgbClr val="FFD43B"/>
+                  <a:srgbClr val="D1CFC9"/>
                 </a:solidFill>
                 <a:latin typeface="Helvetica Neue"/>
                 <a:ea typeface="Helvetica Neue"/>
@@ -13040,7 +13072,7 @@
           <p:cNvPr id="10" name="">
             <a:extLst xmlns:a="http://schemas.openxmlformats.org/drawingml/2006/main">
               <a:ext uri="{FF2B5EF4-FFF2-40B4-BE49-F238E27FC236}">
-                <a16:creationId xmlns:a16="http://schemas.microsoft.com/office/drawing/2014/main" id="{58A405E1-2612-47A1-950A-A04AA2E1FB59}"/>
+                <a16:creationId xmlns:a16="http://schemas.microsoft.com/office/drawing/2014/main" id="{8E2DD1AE-BF0E-4094-A443-916700551C26}"/>
               </a:ext>
             </a:extLst>
           </p:cNvPr>
@@ -13097,7 +13129,7 @@
           <p:cNvPr id="11" name="">
             <a:extLst xmlns:a="http://schemas.openxmlformats.org/drawingml/2006/main">
               <a:ext uri="{FF2B5EF4-FFF2-40B4-BE49-F238E27FC236}">
-                <a16:creationId xmlns:a16="http://schemas.microsoft.com/office/drawing/2014/main" id="{EB75FE7A-6B22-4B02-A816-34082344DC65}"/>
+                <a16:creationId xmlns:a16="http://schemas.microsoft.com/office/drawing/2014/main" id="{B9927129-EF52-422A-A0B1-293A88898189}"/>
               </a:ext>
             </a:extLst>
           </p:cNvPr>
@@ -13128,7 +13160,7 @@
             <a:pPr algn="l">
               <a:defRPr sz="1950" b="1">
                 <a:solidFill>
-                  <a:srgbClr val="FFD43B"/>
+                  <a:srgbClr val="D1CFC9"/>
                 </a:solidFill>
                 <a:latin typeface="Helvetica Neue"/>
                 <a:ea typeface="Helvetica Neue"/>
@@ -13138,7 +13170,7 @@
             <a:r>
               <a:rPr sz="1950" b="1">
                 <a:solidFill>
-                  <a:srgbClr val="FFD43B"/>
+                  <a:srgbClr val="D1CFC9"/>
                 </a:solidFill>
                 <a:latin typeface="Helvetica Neue"/>
                 <a:ea typeface="Helvetica Neue"/>
@@ -13154,7 +13186,7 @@
           <p:cNvPr id="12" name="">
             <a:extLst xmlns:a="http://schemas.openxmlformats.org/drawingml/2006/main">
               <a:ext uri="{FF2B5EF4-FFF2-40B4-BE49-F238E27FC236}">
-                <a16:creationId xmlns:a16="http://schemas.microsoft.com/office/drawing/2014/main" id="{0E6901F3-F2EB-4AE4-870F-3837B7A9E397}"/>
+                <a16:creationId xmlns:a16="http://schemas.microsoft.com/office/drawing/2014/main" id="{708C7EED-695F-470A-B6D4-F7FA99561F19}"/>
               </a:ext>
             </a:extLst>
           </p:cNvPr>
@@ -13211,7 +13243,7 @@
           <p:cNvPr id="13" name="">
             <a:extLst xmlns:a="http://schemas.openxmlformats.org/drawingml/2006/main">
               <a:ext uri="{FF2B5EF4-FFF2-40B4-BE49-F238E27FC236}">
-                <a16:creationId xmlns:a16="http://schemas.microsoft.com/office/drawing/2014/main" id="{B2308A07-1886-4878-AC7A-95C912EF4F0F}"/>
+                <a16:creationId xmlns:a16="http://schemas.microsoft.com/office/drawing/2014/main" id="{0CCC5752-B6C1-4E73-82FF-F02CB974B5AF}"/>
               </a:ext>
             </a:extLst>
           </p:cNvPr>
@@ -13231,7 +13263,7 @@
             </a:avLst>
           </a:prstGeom>
           <a:solidFill xmlns:a="http://schemas.openxmlformats.org/drawingml/2006/main">
-            <a:srgbClr val="FFD43B"/>
+            <a:srgbClr val="D1CFC9"/>
           </a:solidFill>
           <a:ln xmlns:a="http://schemas.openxmlformats.org/drawingml/2006/main" w="0">
             <a:noFill/>
@@ -13243,7 +13275,7 @@
           <p:cNvPr id="14" name="">
             <a:extLst xmlns:a="http://schemas.openxmlformats.org/drawingml/2006/main">
               <a:ext uri="{FF2B5EF4-FFF2-40B4-BE49-F238E27FC236}">
-                <a16:creationId xmlns:a16="http://schemas.microsoft.com/office/drawing/2014/main" id="{54064570-1BDB-4DB8-B552-9BB46FECAB86}"/>
+                <a16:creationId xmlns:a16="http://schemas.microsoft.com/office/drawing/2014/main" id="{BEB3DF44-E7DE-4A0F-9B44-DE8865B4A324}"/>
               </a:ext>
             </a:extLst>
           </p:cNvPr>
@@ -13274,7 +13306,7 @@
             <a:pPr algn="ctr">
               <a:defRPr sz="1050" b="1">
                 <a:solidFill>
-                  <a:srgbClr val="092454"/>
+                  <a:srgbClr val="1C2E4A"/>
                 </a:solidFill>
                 <a:latin typeface="Helvetica Neue"/>
                 <a:ea typeface="Helvetica Neue"/>
@@ -13284,7 +13316,7 @@
             <a:r>
               <a:rPr sz="1050" b="1">
                 <a:solidFill>
-                  <a:srgbClr val="092454"/>
+                  <a:srgbClr val="1C2E4A"/>
                 </a:solidFill>
                 <a:latin typeface="Helvetica Neue"/>
                 <a:ea typeface="Helvetica Neue"/>
@@ -13300,7 +13332,7 @@
           <p:cNvPr id="15" name="">
             <a:extLst xmlns:a="http://schemas.openxmlformats.org/drawingml/2006/main">
               <a:ext uri="{FF2B5EF4-FFF2-40B4-BE49-F238E27FC236}">
-                <a16:creationId xmlns:a16="http://schemas.microsoft.com/office/drawing/2014/main" id="{FB4BF42E-2BF5-46E9-808F-B19FC60D22F8}"/>
+                <a16:creationId xmlns:a16="http://schemas.microsoft.com/office/drawing/2014/main" id="{9FE81DFB-CAC6-4E58-8924-401208E1418B}"/>
               </a:ext>
             </a:extLst>
           </p:cNvPr>
@@ -13331,7 +13363,7 @@
             <a:pPr algn="ctr">
               <a:defRPr sz="2250" b="1">
                 <a:solidFill>
-                  <a:srgbClr val="092454"/>
+                  <a:srgbClr val="1C2E4A"/>
                 </a:solidFill>
                 <a:latin typeface="Helvetica Neue"/>
                 <a:ea typeface="Helvetica Neue"/>
@@ -13341,7 +13373,7 @@
             <a:r>
               <a:rPr sz="2250" b="1">
                 <a:solidFill>
-                  <a:srgbClr val="092454"/>
+                  <a:srgbClr val="1C2E4A"/>
                 </a:solidFill>
                 <a:latin typeface="Helvetica Neue"/>
                 <a:ea typeface="Helvetica Neue"/>
@@ -13354,7 +13386,7 @@
             <a:pPr algn="ctr">
               <a:defRPr sz="2250" b="1">
                 <a:solidFill>
-                  <a:srgbClr val="092454"/>
+                  <a:srgbClr val="1C2E4A"/>
                 </a:solidFill>
                 <a:latin typeface="Helvetica Neue"/>
                 <a:ea typeface="Helvetica Neue"/>
@@ -13364,7 +13396,7 @@
             <a:r>
               <a:rPr sz="2250" b="1">
                 <a:solidFill>
-                  <a:srgbClr val="092454"/>
+                  <a:srgbClr val="1C2E4A"/>
                 </a:solidFill>
                 <a:latin typeface="Helvetica Neue"/>
                 <a:ea typeface="Helvetica Neue"/>
@@ -13377,7 +13409,7 @@
             <a:pPr algn="ctr">
               <a:defRPr sz="2250" b="1">
                 <a:solidFill>
-                  <a:srgbClr val="092454"/>
+                  <a:srgbClr val="1C2E4A"/>
                 </a:solidFill>
                 <a:latin typeface="Helvetica Neue"/>
                 <a:ea typeface="Helvetica Neue"/>
@@ -13387,7 +13419,7 @@
             <a:r>
               <a:rPr sz="2250" b="1">
                 <a:solidFill>
-                  <a:srgbClr val="092454"/>
+                  <a:srgbClr val="1C2E4A"/>
                 </a:solidFill>
                 <a:latin typeface="Helvetica Neue"/>
                 <a:ea typeface="Helvetica Neue"/>
@@ -13403,7 +13435,7 @@
           <p:cNvPr id="16" name="">
             <a:extLst xmlns:a="http://schemas.openxmlformats.org/drawingml/2006/main">
               <a:ext uri="{FF2B5EF4-FFF2-40B4-BE49-F238E27FC236}">
-                <a16:creationId xmlns:a16="http://schemas.microsoft.com/office/drawing/2014/main" id="{CFCAAB8C-FB06-4CDB-B809-D25A7695C9C6}"/>
+                <a16:creationId xmlns:a16="http://schemas.microsoft.com/office/drawing/2014/main" id="{38824FF1-C040-4C3B-A0C2-C8D815034B10}"/>
               </a:ext>
             </a:extLst>
           </p:cNvPr>
@@ -13434,7 +13466,7 @@
             <a:pPr algn="ctr">
               <a:defRPr sz="1125" b="0">
                 <a:solidFill>
-                  <a:srgbClr val="092454"/>
+                  <a:srgbClr val="1C2E4A"/>
                 </a:solidFill>
                 <a:latin typeface="Helvetica Neue"/>
                 <a:ea typeface="Helvetica Neue"/>
@@ -13444,7 +13476,7 @@
             <a:r>
               <a:rPr sz="1125" b="0">
                 <a:solidFill>
-                  <a:srgbClr val="092454"/>
+                  <a:srgbClr val="1C2E4A"/>
                 </a:solidFill>
                 <a:latin typeface="Helvetica Neue"/>
                 <a:ea typeface="Helvetica Neue"/>
@@ -13460,7 +13492,7 @@
           <p:cNvPr id="17" name="">
             <a:extLst xmlns:a="http://schemas.openxmlformats.org/drawingml/2006/main">
               <a:ext uri="{FF2B5EF4-FFF2-40B4-BE49-F238E27FC236}">
-                <a16:creationId xmlns:a16="http://schemas.microsoft.com/office/drawing/2014/main" id="{692BDB92-B432-4074-8605-0D397D4B3E2E}"/>
+                <a16:creationId xmlns:a16="http://schemas.microsoft.com/office/drawing/2014/main" id="{69382542-F546-4FF6-BD36-E7E6924C9F4A}"/>
               </a:ext>
             </a:extLst>
           </p:cNvPr>
@@ -13478,7 +13510,7 @@
             <a:avLst/>
           </a:prstGeom>
           <a:solidFill xmlns:a="http://schemas.openxmlformats.org/drawingml/2006/main">
-            <a:srgbClr val="31507E"/>
+            <a:srgbClr val="52677D"/>
           </a:solidFill>
           <a:ln xmlns:a="http://schemas.openxmlformats.org/drawingml/2006/main" w="0">
             <a:noFill/>
@@ -13490,7 +13522,7 @@
           <p:cNvPr id="18" name="">
             <a:extLst xmlns:a="http://schemas.openxmlformats.org/drawingml/2006/main">
               <a:ext uri="{FF2B5EF4-FFF2-40B4-BE49-F238E27FC236}">
-                <a16:creationId xmlns:a16="http://schemas.microsoft.com/office/drawing/2014/main" id="{293E4550-EF78-4DE5-A6F2-24974DE0A75D}"/>
+                <a16:creationId xmlns:a16="http://schemas.microsoft.com/office/drawing/2014/main" id="{55BE2AD1-71D8-4B58-B525-884B630EA757}"/>
               </a:ext>
             </a:extLst>
           </p:cNvPr>
@@ -13521,7 +13553,7 @@
             <a:pPr algn="l">
               <a:defRPr sz="750" b="0">
                 <a:solidFill>
-                  <a:srgbClr val="BFE6FF"/>
+                  <a:srgbClr val="BDC4D4"/>
                 </a:solidFill>
                 <a:latin typeface="Helvetica Neue"/>
                 <a:ea typeface="Helvetica Neue"/>
@@ -13531,7 +13563,7 @@
             <a:r>
               <a:rPr sz="750" b="0">
                 <a:solidFill>
-                  <a:srgbClr val="BFE6FF"/>
+                  <a:srgbClr val="BDC4D4"/>
                 </a:solidFill>
                 <a:latin typeface="Helvetica Neue"/>
                 <a:ea typeface="Helvetica Neue"/>
@@ -13547,7 +13579,7 @@
           <p:cNvPr id="19" name="">
             <a:extLst xmlns:a="http://schemas.openxmlformats.org/drawingml/2006/main">
               <a:ext uri="{FF2B5EF4-FFF2-40B4-BE49-F238E27FC236}">
-                <a16:creationId xmlns:a16="http://schemas.microsoft.com/office/drawing/2014/main" id="{1D3A201A-A7C1-46B8-B74F-950C013202AA}"/>
+                <a16:creationId xmlns:a16="http://schemas.microsoft.com/office/drawing/2014/main" id="{D010500F-F0F6-4944-8048-70E81CA393F7}"/>
               </a:ext>
             </a:extLst>
           </p:cNvPr>
@@ -13578,7 +13610,7 @@
             <a:pPr algn="r">
               <a:defRPr sz="825" b="1">
                 <a:solidFill>
-                  <a:srgbClr val="FFD43B"/>
+                  <a:srgbClr val="D1CFC9"/>
                 </a:solidFill>
                 <a:latin typeface="Helvetica Neue"/>
                 <a:ea typeface="Helvetica Neue"/>
@@ -13588,7 +13620,7 @@
             <a:r>
               <a:rPr sz="825" b="1">
                 <a:solidFill>
-                  <a:srgbClr val="FFD43B"/>
+                  <a:srgbClr val="D1CFC9"/>
                 </a:solidFill>
                 <a:latin typeface="Helvetica Neue"/>
                 <a:ea typeface="Helvetica Neue"/>
@@ -13602,7 +13634,7 @@
     </p:spTree>
     <p:extLst>
       <p:ext uri="{BB962C8B-B14F-4D97-AF65-F5344CB8AC3E}">
-        <p14:creationId xmlns:p14="http://schemas.microsoft.com/office/powerpoint/2010/main" val="1133284301"/>
+        <p14:creationId xmlns:p14="http://schemas.microsoft.com/office/powerpoint/2010/main" val="1686643520"/>
       </p:ext>
     </p:extLst>
   </p:cSld>
